--- a/back_populate_tables.pptx
+++ b/back_populate_tables.pptx
@@ -15,9 +15,13 @@
     <p:sldId id="263" r:id="rId9"/>
     <p:sldId id="264" r:id="rId10"/>
     <p:sldId id="265" r:id="rId11"/>
+    <p:sldId id="266" r:id="rId12"/>
+    <p:sldId id="267" r:id="rId13"/>
+    <p:sldId id="268" r:id="rId14"/>
+    <p:sldId id="269" r:id="rId15"/>
   </p:sldIdLst>
   <p:notesMasterIdLst>
-    <p:notesMasterId r:id="rId12"/>
+    <p:notesMasterId r:id="rId16"/>
   </p:notesMasterIdLst>
   <p:sldSz cx="9144000" cy="5143500"/>
   <p:notesSz cx="5143500" cy="9144000"/>
@@ -623,6 +627,358 @@
             <a:fld id="{F7021451-1387-4CA6-816F-3879F97B5CBC}" type="slidenum">
               <a:rPr lang="en-US"/>
               <a:t>10</a:t>
+            </a:fld>
+            <a:endParaRPr lang="en-US"/>
+          </a:p>
+        </p:txBody>
+      </p:sp>
+    </p:spTree>
+    <p:extLst>
+      <p:ext uri="{BB962C8B-B14F-4D97-AF65-F5344CB8AC3E}">
+        <p14:creationId xmlns:p14="http://schemas.microsoft.com/office/powerpoint/2010/main" val="1024086991"/>
+      </p:ext>
+    </p:extLst>
+  </p:cSld>
+  <p:clrMapOvr>
+    <a:masterClrMapping/>
+  </p:clrMapOvr>
+</p:notes>
+</file>
+
+<file path=ppt/notesSlides/notesSlide11.xml><?xml version="1.0" encoding="utf-8"?>
+<p:notes xmlns:a="http://schemas.openxmlformats.org/drawingml/2006/main" xmlns:r="http://schemas.openxmlformats.org/officeDocument/2006/relationships" xmlns:p="http://schemas.openxmlformats.org/presentationml/2006/main">
+  <p:cSld>
+    <p:spTree>
+      <p:nvGrpSpPr>
+        <p:cNvPr id="1" name=""/>
+        <p:cNvGrpSpPr/>
+        <p:nvPr/>
+      </p:nvGrpSpPr>
+      <p:grpSpPr>
+        <a:xfrm>
+          <a:off x="0" y="0"/>
+          <a:ext cx="0" cy="0"/>
+          <a:chOff x="0" y="0"/>
+          <a:chExt cx="0" cy="0"/>
+        </a:xfrm>
+      </p:grpSpPr>
+      <p:sp>
+        <p:nvSpPr>
+          <p:cNvPr id="2" name="Slide Image Placeholder 1"/>
+          <p:cNvSpPr>
+            <a:spLocks noGrp="1" noRot="1" noChangeAspect="1"/>
+          </p:cNvSpPr>
+          <p:nvPr>
+            <p:ph type="sldImg"/>
+          </p:nvPr>
+        </p:nvSpPr>
+        <p:spPr/>
+      </p:sp>
+      <p:sp>
+        <p:nvSpPr>
+          <p:cNvPr id="3" name="Notes Placeholder 2"/>
+          <p:cNvSpPr>
+            <a:spLocks noGrp="1"/>
+          </p:cNvSpPr>
+          <p:nvPr>
+            <p:ph type="body" idx="1"/>
+          </p:nvPr>
+        </p:nvSpPr>
+        <p:spPr/>
+        <p:txBody>
+          <a:bodyPr/>
+          <a:lstStyle/>
+          <a:p>
+            <a:r>
+              <a:rPr lang="en-US" dirty="0"/>
+              <a:t/>
+            </a:r>
+            <a:endParaRPr lang="en-US" dirty="0"/>
+          </a:p>
+        </p:txBody>
+      </p:sp>
+      <p:sp>
+        <p:nvSpPr>
+          <p:cNvPr id="4" name="Slide Number Placeholder 3"/>
+          <p:cNvSpPr>
+            <a:spLocks noGrp="1"/>
+          </p:cNvSpPr>
+          <p:nvPr>
+            <p:ph type="sldNum" sz="quarter" idx="10"/>
+          </p:nvPr>
+        </p:nvSpPr>
+        <p:spPr/>
+        <p:txBody>
+          <a:bodyPr/>
+          <a:lstStyle/>
+          <a:p>
+            <a:fld id="{F7021451-1387-4CA6-816F-3879F97B5CBC}" type="slidenum">
+              <a:rPr lang="en-US"/>
+              <a:t>11</a:t>
+            </a:fld>
+            <a:endParaRPr lang="en-US"/>
+          </a:p>
+        </p:txBody>
+      </p:sp>
+    </p:spTree>
+    <p:extLst>
+      <p:ext uri="{BB962C8B-B14F-4D97-AF65-F5344CB8AC3E}">
+        <p14:creationId xmlns:p14="http://schemas.microsoft.com/office/powerpoint/2010/main" val="1024086991"/>
+      </p:ext>
+    </p:extLst>
+  </p:cSld>
+  <p:clrMapOvr>
+    <a:masterClrMapping/>
+  </p:clrMapOvr>
+</p:notes>
+</file>
+
+<file path=ppt/notesSlides/notesSlide12.xml><?xml version="1.0" encoding="utf-8"?>
+<p:notes xmlns:a="http://schemas.openxmlformats.org/drawingml/2006/main" xmlns:r="http://schemas.openxmlformats.org/officeDocument/2006/relationships" xmlns:p="http://schemas.openxmlformats.org/presentationml/2006/main">
+  <p:cSld>
+    <p:spTree>
+      <p:nvGrpSpPr>
+        <p:cNvPr id="1" name=""/>
+        <p:cNvGrpSpPr/>
+        <p:nvPr/>
+      </p:nvGrpSpPr>
+      <p:grpSpPr>
+        <a:xfrm>
+          <a:off x="0" y="0"/>
+          <a:ext cx="0" cy="0"/>
+          <a:chOff x="0" y="0"/>
+          <a:chExt cx="0" cy="0"/>
+        </a:xfrm>
+      </p:grpSpPr>
+      <p:sp>
+        <p:nvSpPr>
+          <p:cNvPr id="2" name="Slide Image Placeholder 1"/>
+          <p:cNvSpPr>
+            <a:spLocks noGrp="1" noRot="1" noChangeAspect="1"/>
+          </p:cNvSpPr>
+          <p:nvPr>
+            <p:ph type="sldImg"/>
+          </p:nvPr>
+        </p:nvSpPr>
+        <p:spPr/>
+      </p:sp>
+      <p:sp>
+        <p:nvSpPr>
+          <p:cNvPr id="3" name="Notes Placeholder 2"/>
+          <p:cNvSpPr>
+            <a:spLocks noGrp="1"/>
+          </p:cNvSpPr>
+          <p:nvPr>
+            <p:ph type="body" idx="1"/>
+          </p:nvPr>
+        </p:nvSpPr>
+        <p:spPr/>
+        <p:txBody>
+          <a:bodyPr/>
+          <a:lstStyle/>
+          <a:p>
+            <a:r>
+              <a:rPr lang="en-US" dirty="0"/>
+              <a:t/>
+            </a:r>
+            <a:endParaRPr lang="en-US" dirty="0"/>
+          </a:p>
+        </p:txBody>
+      </p:sp>
+      <p:sp>
+        <p:nvSpPr>
+          <p:cNvPr id="4" name="Slide Number Placeholder 3"/>
+          <p:cNvSpPr>
+            <a:spLocks noGrp="1"/>
+          </p:cNvSpPr>
+          <p:nvPr>
+            <p:ph type="sldNum" sz="quarter" idx="10"/>
+          </p:nvPr>
+        </p:nvSpPr>
+        <p:spPr/>
+        <p:txBody>
+          <a:bodyPr/>
+          <a:lstStyle/>
+          <a:p>
+            <a:fld id="{F7021451-1387-4CA6-816F-3879F97B5CBC}" type="slidenum">
+              <a:rPr lang="en-US"/>
+              <a:t>12</a:t>
+            </a:fld>
+            <a:endParaRPr lang="en-US"/>
+          </a:p>
+        </p:txBody>
+      </p:sp>
+    </p:spTree>
+    <p:extLst>
+      <p:ext uri="{BB962C8B-B14F-4D97-AF65-F5344CB8AC3E}">
+        <p14:creationId xmlns:p14="http://schemas.microsoft.com/office/powerpoint/2010/main" val="1024086991"/>
+      </p:ext>
+    </p:extLst>
+  </p:cSld>
+  <p:clrMapOvr>
+    <a:masterClrMapping/>
+  </p:clrMapOvr>
+</p:notes>
+</file>
+
+<file path=ppt/notesSlides/notesSlide13.xml><?xml version="1.0" encoding="utf-8"?>
+<p:notes xmlns:a="http://schemas.openxmlformats.org/drawingml/2006/main" xmlns:r="http://schemas.openxmlformats.org/officeDocument/2006/relationships" xmlns:p="http://schemas.openxmlformats.org/presentationml/2006/main">
+  <p:cSld>
+    <p:spTree>
+      <p:nvGrpSpPr>
+        <p:cNvPr id="1" name=""/>
+        <p:cNvGrpSpPr/>
+        <p:nvPr/>
+      </p:nvGrpSpPr>
+      <p:grpSpPr>
+        <a:xfrm>
+          <a:off x="0" y="0"/>
+          <a:ext cx="0" cy="0"/>
+          <a:chOff x="0" y="0"/>
+          <a:chExt cx="0" cy="0"/>
+        </a:xfrm>
+      </p:grpSpPr>
+      <p:sp>
+        <p:nvSpPr>
+          <p:cNvPr id="2" name="Slide Image Placeholder 1"/>
+          <p:cNvSpPr>
+            <a:spLocks noGrp="1" noRot="1" noChangeAspect="1"/>
+          </p:cNvSpPr>
+          <p:nvPr>
+            <p:ph type="sldImg"/>
+          </p:nvPr>
+        </p:nvSpPr>
+        <p:spPr/>
+      </p:sp>
+      <p:sp>
+        <p:nvSpPr>
+          <p:cNvPr id="3" name="Notes Placeholder 2"/>
+          <p:cNvSpPr>
+            <a:spLocks noGrp="1"/>
+          </p:cNvSpPr>
+          <p:nvPr>
+            <p:ph type="body" idx="1"/>
+          </p:nvPr>
+        </p:nvSpPr>
+        <p:spPr/>
+        <p:txBody>
+          <a:bodyPr/>
+          <a:lstStyle/>
+          <a:p>
+            <a:r>
+              <a:rPr lang="en-US" dirty="0"/>
+              <a:t/>
+            </a:r>
+            <a:endParaRPr lang="en-US" dirty="0"/>
+          </a:p>
+        </p:txBody>
+      </p:sp>
+      <p:sp>
+        <p:nvSpPr>
+          <p:cNvPr id="4" name="Slide Number Placeholder 3"/>
+          <p:cNvSpPr>
+            <a:spLocks noGrp="1"/>
+          </p:cNvSpPr>
+          <p:nvPr>
+            <p:ph type="sldNum" sz="quarter" idx="10"/>
+          </p:nvPr>
+        </p:nvSpPr>
+        <p:spPr/>
+        <p:txBody>
+          <a:bodyPr/>
+          <a:lstStyle/>
+          <a:p>
+            <a:fld id="{F7021451-1387-4CA6-816F-3879F97B5CBC}" type="slidenum">
+              <a:rPr lang="en-US"/>
+              <a:t>13</a:t>
+            </a:fld>
+            <a:endParaRPr lang="en-US"/>
+          </a:p>
+        </p:txBody>
+      </p:sp>
+    </p:spTree>
+    <p:extLst>
+      <p:ext uri="{BB962C8B-B14F-4D97-AF65-F5344CB8AC3E}">
+        <p14:creationId xmlns:p14="http://schemas.microsoft.com/office/powerpoint/2010/main" val="1024086991"/>
+      </p:ext>
+    </p:extLst>
+  </p:cSld>
+  <p:clrMapOvr>
+    <a:masterClrMapping/>
+  </p:clrMapOvr>
+</p:notes>
+</file>
+
+<file path=ppt/notesSlides/notesSlide14.xml><?xml version="1.0" encoding="utf-8"?>
+<p:notes xmlns:a="http://schemas.openxmlformats.org/drawingml/2006/main" xmlns:r="http://schemas.openxmlformats.org/officeDocument/2006/relationships" xmlns:p="http://schemas.openxmlformats.org/presentationml/2006/main">
+  <p:cSld>
+    <p:spTree>
+      <p:nvGrpSpPr>
+        <p:cNvPr id="1" name=""/>
+        <p:cNvGrpSpPr/>
+        <p:nvPr/>
+      </p:nvGrpSpPr>
+      <p:grpSpPr>
+        <a:xfrm>
+          <a:off x="0" y="0"/>
+          <a:ext cx="0" cy="0"/>
+          <a:chOff x="0" y="0"/>
+          <a:chExt cx="0" cy="0"/>
+        </a:xfrm>
+      </p:grpSpPr>
+      <p:sp>
+        <p:nvSpPr>
+          <p:cNvPr id="2" name="Slide Image Placeholder 1"/>
+          <p:cNvSpPr>
+            <a:spLocks noGrp="1" noRot="1" noChangeAspect="1"/>
+          </p:cNvSpPr>
+          <p:nvPr>
+            <p:ph type="sldImg"/>
+          </p:nvPr>
+        </p:nvSpPr>
+        <p:spPr/>
+      </p:sp>
+      <p:sp>
+        <p:nvSpPr>
+          <p:cNvPr id="3" name="Notes Placeholder 2"/>
+          <p:cNvSpPr>
+            <a:spLocks noGrp="1"/>
+          </p:cNvSpPr>
+          <p:nvPr>
+            <p:ph type="body" idx="1"/>
+          </p:nvPr>
+        </p:nvSpPr>
+        <p:spPr/>
+        <p:txBody>
+          <a:bodyPr/>
+          <a:lstStyle/>
+          <a:p>
+            <a:r>
+              <a:rPr lang="en-US" dirty="0"/>
+              <a:t/>
+            </a:r>
+            <a:endParaRPr lang="en-US" dirty="0"/>
+          </a:p>
+        </p:txBody>
+      </p:sp>
+      <p:sp>
+        <p:nvSpPr>
+          <p:cNvPr id="4" name="Slide Number Placeholder 3"/>
+          <p:cNvSpPr>
+            <a:spLocks noGrp="1"/>
+          </p:cNvSpPr>
+          <p:nvPr>
+            <p:ph type="sldNum" sz="quarter" idx="10"/>
+          </p:nvPr>
+        </p:nvSpPr>
+        <p:spPr/>
+        <p:txBody>
+          <a:bodyPr/>
+          <a:lstStyle/>
+          <a:p>
+            <a:fld id="{F7021451-1387-4CA6-816F-3879F97B5CBC}" type="slidenum">
+              <a:rPr lang="en-US"/>
+              <a:t>14</a:t>
             </a:fld>
             <a:endParaRPr lang="en-US"/>
           </a:p>
@@ -1890,6 +2246,3639 @@
     <p:bg>
       <p:bgPr>
         <a:solidFill>
+          <a:srgbClr val="F7F3ED"/>
+        </a:solidFill>
+      </p:bgPr>
+    </p:bg>
+    <p:spTree>
+      <p:nvGrpSpPr>
+        <p:cNvPr id="1" name=""/>
+        <p:cNvGrpSpPr/>
+        <p:nvPr/>
+      </p:nvGrpSpPr>
+      <p:grpSpPr>
+        <a:xfrm>
+          <a:off x="0" y="0"/>
+          <a:ext cx="0" cy="0"/>
+          <a:chOff x="0" y="0"/>
+          <a:chExt cx="0" cy="0"/>
+        </a:xfrm>
+      </p:grpSpPr>
+      <p:sp>
+        <p:nvSpPr>
+          <p:cNvPr id="2" name="Shape 0"/>
+          <p:cNvSpPr/>
+          <p:nvPr/>
+        </p:nvSpPr>
+        <p:spPr>
+          <a:xfrm>
+            <a:off x="0" y="0"/>
+            <a:ext cx="9144000" cy="54864"/>
+          </a:xfrm>
+          <a:prstGeom prst="rect">
+            <a:avLst/>
+          </a:prstGeom>
+          <a:solidFill>
+            <a:srgbClr val="F4A940"/>
+          </a:solidFill>
+          <a:ln/>
+        </p:spPr>
+      </p:sp>
+      <p:sp>
+        <p:nvSpPr>
+          <p:cNvPr id="3" name="Text 1"/>
+          <p:cNvSpPr/>
+          <p:nvPr/>
+        </p:nvSpPr>
+        <p:spPr>
+          <a:xfrm>
+            <a:off x="457200" y="274320"/>
+            <a:ext cx="8229600" cy="548640"/>
+          </a:xfrm>
+          <a:prstGeom prst="rect">
+            <a:avLst/>
+          </a:prstGeom>
+          <a:noFill/>
+          <a:ln/>
+        </p:spPr>
+        <p:txBody>
+          <a:bodyPr wrap="square" lIns="0" tIns="0" rIns="0" bIns="0" rtlCol="0" anchor="ctr"/>
+          <a:lstStyle/>
+          <a:p>
+            <a:pPr indent="0" marL="0">
+              <a:buNone/>
+            </a:pPr>
+            <a:r>
+              <a:rPr lang="en-US" sz="3000" b="1" dirty="0">
+                <a:solidFill>
+                  <a:srgbClr val="0B3D4C"/>
+                </a:solidFill>
+                <a:latin typeface="Georgia" pitchFamily="34" charset="0"/>
+                <a:ea typeface="Georgia" pitchFamily="34" charset="-122"/>
+                <a:cs typeface="Georgia" pitchFamily="34" charset="-120"/>
+              </a:rPr>
+              <a:t>Testing: Validating Against Original ingest.py</a:t>
+            </a:r>
+            <a:endParaRPr lang="en-US" sz="3000" dirty="0"/>
+          </a:p>
+        </p:txBody>
+      </p:sp>
+      <p:sp>
+        <p:nvSpPr>
+          <p:cNvPr id="4" name="Shape 2"/>
+          <p:cNvSpPr/>
+          <p:nvPr/>
+        </p:nvSpPr>
+        <p:spPr>
+          <a:xfrm>
+            <a:off x="457200" y="1005840"/>
+            <a:ext cx="3931920" cy="3840480"/>
+          </a:xfrm>
+          <a:prstGeom prst="rect">
+            <a:avLst/>
+          </a:prstGeom>
+          <a:solidFill>
+            <a:srgbClr val="FFFFFF"/>
+          </a:solidFill>
+          <a:ln/>
+          <a:effectLst>
+            <a:outerShdw sx="100000" sy="100000" kx="0" ky="0" algn="bl" rotWithShape="0" blurRad="76200" dist="25400" dir="8100000">
+              <a:srgbClr val="000000">
+                <a:alpha val="12000"/>
+              </a:srgbClr>
+            </a:outerShdw>
+          </a:effectLst>
+        </p:spPr>
+      </p:sp>
+      <p:pic>
+        <p:nvPicPr>
+          <p:cNvPr id="5" name="Image 0" descr="preencoded.png">    </p:cNvPr>
+          <p:cNvPicPr>
+            <a:picLocks noChangeAspect="1"/>
+          </p:cNvPicPr>
+          <p:nvPr/>
+        </p:nvPicPr>
+        <p:blipFill>
+          <a:blip r:embed="rId1"/>
+          <a:stretch>
+            <a:fillRect/>
+          </a:stretch>
+        </p:blipFill>
+        <p:spPr>
+          <a:xfrm>
+            <a:off x="731520" y="1188720"/>
+            <a:ext cx="320040" cy="320040"/>
+          </a:xfrm>
+          <a:prstGeom prst="rect">
+            <a:avLst/>
+          </a:prstGeom>
+        </p:spPr>
+      </p:pic>
+      <p:sp>
+        <p:nvSpPr>
+          <p:cNvPr id="6" name="Text 3"/>
+          <p:cNvSpPr/>
+          <p:nvPr/>
+        </p:nvSpPr>
+        <p:spPr>
+          <a:xfrm>
+            <a:off x="1188720" y="1143000"/>
+            <a:ext cx="3017520" cy="411480"/>
+          </a:xfrm>
+          <a:prstGeom prst="rect">
+            <a:avLst/>
+          </a:prstGeom>
+          <a:noFill/>
+          <a:ln/>
+        </p:spPr>
+        <p:txBody>
+          <a:bodyPr wrap="square" lIns="0" tIns="0" rIns="0" bIns="0" rtlCol="0" anchor="ctr"/>
+          <a:lstStyle/>
+          <a:p>
+            <a:pPr indent="0" marL="0">
+              <a:buNone/>
+            </a:pPr>
+            <a:r>
+              <a:rPr lang="en-US" sz="1800" b="1" dirty="0">
+                <a:solidFill>
+                  <a:srgbClr val="0B3D4C"/>
+                </a:solidFill>
+                <a:latin typeface="Georgia" pitchFamily="34" charset="0"/>
+                <a:ea typeface="Georgia" pitchFamily="34" charset="-122"/>
+                <a:cs typeface="Georgia" pitchFamily="34" charset="-120"/>
+              </a:rPr>
+              <a:t>Dual-Pipeline Strategy</a:t>
+            </a:r>
+            <a:endParaRPr lang="en-US" sz="1800" dirty="0"/>
+          </a:p>
+        </p:txBody>
+      </p:sp>
+      <p:sp>
+        <p:nvSpPr>
+          <p:cNvPr id="7" name="Text 4"/>
+          <p:cNvSpPr/>
+          <p:nvPr/>
+        </p:nvSpPr>
+        <p:spPr>
+          <a:xfrm>
+            <a:off x="731520" y="1691640"/>
+            <a:ext cx="3474720" cy="2926080"/>
+          </a:xfrm>
+          <a:prstGeom prst="rect">
+            <a:avLst/>
+          </a:prstGeom>
+          <a:noFill/>
+          <a:ln/>
+        </p:spPr>
+        <p:txBody>
+          <a:bodyPr wrap="square" lIns="0" tIns="0" rIns="0" bIns="0" rtlCol="0" anchor="t"/>
+          <a:lstStyle/>
+          <a:p>
+            <a:pPr indent="0" marL="0">
+              <a:buNone/>
+            </a:pPr>
+            <a:r>
+              <a:rPr lang="en-US" sz="1300" b="1" dirty="0">
+                <a:solidFill>
+                  <a:srgbClr val="0B3D4C"/>
+                </a:solidFill>
+                <a:latin typeface="Calibri" pitchFamily="34" charset="0"/>
+                <a:ea typeface="Calibri" pitchFamily="34" charset="-122"/>
+                <a:cs typeface="Calibri" pitchFamily="34" charset="-120"/>
+              </a:rPr>
+              <a:t>Two independent implementations:</a:t>
+            </a:r>
+            <a:endParaRPr lang="en-US" sz="1300" dirty="0"/>
+          </a:p>
+          <a:p>
+            <a:pPr indent="0" marL="0">
+              <a:buNone/>
+            </a:pPr>
+            <a:endParaRPr lang="en-US" sz="1300" dirty="0"/>
+          </a:p>
+          <a:p>
+            <a:pPr indent="0" marL="0">
+              <a:buNone/>
+            </a:pPr>
+            <a:r>
+              <a:rPr lang="en-US" sz="1300" b="1" dirty="0">
+                <a:solidFill>
+                  <a:srgbClr val="127C8B"/>
+                </a:solidFill>
+                <a:latin typeface="Calibri" pitchFamily="34" charset="0"/>
+                <a:ea typeface="Calibri" pitchFamily="34" charset="-122"/>
+                <a:cs typeface="Calibri" pitchFamily="34" charset="-120"/>
+              </a:rPr>
+              <a:t>quantdb/ingest.py</a:t>
+            </a:r>
+            <a:endParaRPr lang="en-US" sz="1300" dirty="0"/>
+          </a:p>
+          <a:p>
+            <a:pPr indent="0" marL="0">
+              <a:buNone/>
+            </a:pPr>
+            <a:r>
+              <a:rPr lang="en-US" sz="1200" dirty="0">
+                <a:solidFill>
+                  <a:srgbClr val="1A2B33"/>
+                </a:solidFill>
+                <a:latin typeface="Calibri" pitchFamily="34" charset="0"/>
+                <a:ea typeface="Calibri" pitchFamily="34" charset="-122"/>
+                <a:cs typeface="Calibri" pitchFamily="34" charset="-120"/>
+              </a:rPr>
+              <a:t>Original pipeline — manual FK wiring, calls ingest_fasc_fib() to fetch and insert</a:t>
+            </a:r>
+            <a:endParaRPr lang="en-US" sz="1300" dirty="0"/>
+          </a:p>
+          <a:p>
+            <a:pPr indent="0" marL="0">
+              <a:buNone/>
+            </a:pPr>
+            <a:endParaRPr lang="en-US" sz="1300" dirty="0"/>
+          </a:p>
+          <a:p>
+            <a:pPr indent="0" marL="0">
+              <a:buNone/>
+            </a:pPr>
+            <a:r>
+              <a:rPr lang="en-US" sz="1300" b="1" dirty="0">
+                <a:solidFill>
+                  <a:srgbClr val="F4A940"/>
+                </a:solidFill>
+                <a:latin typeface="Calibri" pitchFamily="34" charset="0"/>
+                <a:ea typeface="Calibri" pitchFamily="34" charset="-122"/>
+                <a:cs typeface="Calibri" pitchFamily="34" charset="-120"/>
+              </a:rPr>
+              <a:t>ingestion/f006_ingest.py</a:t>
+            </a:r>
+            <a:endParaRPr lang="en-US" sz="1300" dirty="0"/>
+          </a:p>
+          <a:p>
+            <a:pPr indent="0" marL="0">
+              <a:buNone/>
+            </a:pPr>
+            <a:r>
+              <a:rPr lang="en-US" sz="1200" dirty="0">
+                <a:solidFill>
+                  <a:srgbClr val="1A2B33"/>
+                </a:solidFill>
+                <a:latin typeface="Calibri" pitchFamily="34" charset="0"/>
+                <a:ea typeface="Calibri" pitchFamily="34" charset="-122"/>
+                <a:cs typeface="Calibri" pitchFamily="34" charset="-120"/>
+              </a:rPr>
+              <a:t>New pipeline — uses back_populate_tables / back_populate_with_dependencies for leaf inserts</a:t>
+            </a:r>
+            <a:endParaRPr lang="en-US" sz="1300" dirty="0"/>
+          </a:p>
+          <a:p>
+            <a:pPr indent="0" marL="0">
+              <a:buNone/>
+            </a:pPr>
+            <a:endParaRPr lang="en-US" sz="1300" dirty="0"/>
+          </a:p>
+          <a:p>
+            <a:pPr indent="0" marL="0">
+              <a:buNone/>
+            </a:pPr>
+            <a:r>
+              <a:rPr lang="en-US" sz="1200" i="1" dirty="0">
+                <a:solidFill>
+                  <a:srgbClr val="5A7A85"/>
+                </a:solidFill>
+                <a:latin typeface="Calibri" pitchFamily="34" charset="0"/>
+                <a:ea typeface="Calibri" pitchFamily="34" charset="-122"/>
+                <a:cs typeface="Calibri" pitchFamily="34" charset="-120"/>
+              </a:rPr>
+              <a:t>Both must produce identical databases when given the same F006 dataset input.</a:t>
+            </a:r>
+            <a:endParaRPr lang="en-US" sz="1300" dirty="0"/>
+          </a:p>
+        </p:txBody>
+      </p:sp>
+      <p:sp>
+        <p:nvSpPr>
+          <p:cNvPr id="8" name="Shape 5"/>
+          <p:cNvSpPr/>
+          <p:nvPr/>
+        </p:nvSpPr>
+        <p:spPr>
+          <a:xfrm>
+            <a:off x="4754880" y="1005840"/>
+            <a:ext cx="3931920" cy="3840480"/>
+          </a:xfrm>
+          <a:prstGeom prst="rect">
+            <a:avLst/>
+          </a:prstGeom>
+          <a:solidFill>
+            <a:srgbClr val="FFFFFF"/>
+          </a:solidFill>
+          <a:ln/>
+          <a:effectLst>
+            <a:outerShdw sx="100000" sy="100000" kx="0" ky="0" algn="bl" rotWithShape="0" blurRad="76200" dist="25400" dir="8100000">
+              <a:srgbClr val="000000">
+                <a:alpha val="12000"/>
+              </a:srgbClr>
+            </a:outerShdw>
+          </a:effectLst>
+        </p:spPr>
+      </p:sp>
+      <p:pic>
+        <p:nvPicPr>
+          <p:cNvPr id="9" name="Image 1" descr="preencoded.png">    </p:cNvPr>
+          <p:cNvPicPr>
+            <a:picLocks noChangeAspect="1"/>
+          </p:cNvPicPr>
+          <p:nvPr/>
+        </p:nvPicPr>
+        <p:blipFill>
+          <a:blip r:embed="rId2"/>
+          <a:stretch>
+            <a:fillRect/>
+          </a:stretch>
+        </p:blipFill>
+        <p:spPr>
+          <a:xfrm>
+            <a:off x="5029200" y="1188720"/>
+            <a:ext cx="320040" cy="320040"/>
+          </a:xfrm>
+          <a:prstGeom prst="rect">
+            <a:avLst/>
+          </a:prstGeom>
+        </p:spPr>
+      </p:pic>
+      <p:sp>
+        <p:nvSpPr>
+          <p:cNvPr id="10" name="Text 6"/>
+          <p:cNvSpPr/>
+          <p:nvPr/>
+        </p:nvSpPr>
+        <p:spPr>
+          <a:xfrm>
+            <a:off x="5440680" y="1143000"/>
+            <a:ext cx="3017520" cy="411480"/>
+          </a:xfrm>
+          <a:prstGeom prst="rect">
+            <a:avLst/>
+          </a:prstGeom>
+          <a:noFill/>
+          <a:ln/>
+        </p:spPr>
+        <p:txBody>
+          <a:bodyPr wrap="square" lIns="0" tIns="0" rIns="0" bIns="0" rtlCol="0" anchor="ctr"/>
+          <a:lstStyle/>
+          <a:p>
+            <a:pPr indent="0" marL="0">
+              <a:buNone/>
+            </a:pPr>
+            <a:r>
+              <a:rPr lang="en-US" sz="1800" b="1" dirty="0">
+                <a:solidFill>
+                  <a:srgbClr val="0B3D4C"/>
+                </a:solidFill>
+                <a:latin typeface="Georgia" pitchFamily="34" charset="0"/>
+                <a:ea typeface="Georgia" pitchFamily="34" charset="-122"/>
+                <a:cs typeface="Georgia" pitchFamily="34" charset="-120"/>
+              </a:rPr>
+              <a:t>What Gets Compared</a:t>
+            </a:r>
+            <a:endParaRPr lang="en-US" sz="1800" dirty="0"/>
+          </a:p>
+        </p:txBody>
+      </p:sp>
+      <p:graphicFrame>
+        <p:nvGraphicFramePr>
+          <p:cNvPr id="11" name="Table 0"/>
+          <p:cNvGraphicFramePr>
+            <a:graphicFrameLocks noGrp="1"/>
+          </p:cNvGraphicFramePr>
+          <p:nvPr>
+            <p:extLst>
+              <p:ext uri="{D42A27DB-BD31-4B8C-83A1-F6EECF244321}">
+                <p14:modId xmlns:p14="http://schemas.microsoft.com/office/powerpoint/2010/main" val="1579011935"/>
+              </p:ext>
+            </p:extLst>
+          </p:nvPr>
+        </p:nvGraphicFramePr>
+        <p:xfrm>
+          <a:off x="4892040" y="1737360"/>
+          <a:ext cx="3657600" cy="914400"/>
+        </p:xfrm>
+        <a:graphic>
+          <a:graphicData uri="http://schemas.openxmlformats.org/drawingml/2006/table">
+            <a:tbl>
+              <a:tblPr/>
+              <a:tblGrid>
+                <a:gridCol w="1828800"/>
+                <a:gridCol w="1828800"/>
+              </a:tblGrid>
+              <a:tr h="320040">
+                <a:tc>
+                  <a:txBody>
+                    <a:bodyPr/>
+                    <a:lstStyle/>
+                    <a:p>
+                      <a:pPr indent="0" marL="0">
+                        <a:buNone/>
+                      </a:pPr>
+                      <a:r>
+                        <a:rPr lang="en-US" sz="1000" b="1" dirty="0">
+                          <a:solidFill>
+                            <a:srgbClr val="FFFFFF"/>
+                          </a:solidFill>
+                          <a:latin typeface="Calibri" pitchFamily="34" charset="0"/>
+                          <a:ea typeface="Calibri" pitchFamily="34" charset="-122"/>
+                          <a:cs typeface="Calibri" pitchFamily="34" charset="-120"/>
+                        </a:rPr>
+                        <a:t>Check</a:t>
+                      </a:r>
+                      <a:endParaRPr lang="en-US" sz="1000" dirty="0">
+                        <a:latin typeface="Calibri" charset="0"/>
+                        <a:ea typeface="Calibri" charset="0"/>
+                        <a:cs typeface="Calibri" charset="0"/>
+                      </a:endParaRPr>
+                    </a:p>
+                  </a:txBody>
+                  <a:tcPr marL="91440" marR="91440" marT="45720" marB="45720">
+                    <a:lnL w="6350" cap="flat" cmpd="sng" algn="ctr">
+                      <a:solidFill>
+                        <a:srgbClr val="CCCCCC"/>
+                      </a:solidFill>
+                      <a:prstDash val="solid"/>
+                      <a:round/>
+                      <a:headEnd type="none" w="med" len="med"/>
+                      <a:tailEnd type="none" w="med" len="med"/>
+                    </a:lnL>
+                    <a:lnR w="6350" cap="flat" cmpd="sng" algn="ctr">
+                      <a:solidFill>
+                        <a:srgbClr val="CCCCCC"/>
+                      </a:solidFill>
+                      <a:prstDash val="solid"/>
+                      <a:round/>
+                      <a:headEnd type="none" w="med" len="med"/>
+                      <a:tailEnd type="none" w="med" len="med"/>
+                    </a:lnR>
+                    <a:lnT w="6350" cap="flat" cmpd="sng" algn="ctr">
+                      <a:solidFill>
+                        <a:srgbClr val="CCCCCC"/>
+                      </a:solidFill>
+                      <a:prstDash val="solid"/>
+                      <a:round/>
+                      <a:headEnd type="none" w="med" len="med"/>
+                      <a:tailEnd type="none" w="med" len="med"/>
+                    </a:lnT>
+                    <a:lnB w="6350" cap="flat" cmpd="sng" algn="ctr">
+                      <a:solidFill>
+                        <a:srgbClr val="CCCCCC"/>
+                      </a:solidFill>
+                      <a:prstDash val="solid"/>
+                      <a:round/>
+                      <a:headEnd type="none" w="med" len="med"/>
+                      <a:tailEnd type="none" w="med" len="med"/>
+                    </a:lnB>
+                    <a:solidFill>
+                      <a:srgbClr val="127C8B"/>
+                    </a:solidFill>
+                  </a:tcPr>
+                </a:tc>
+                <a:tc>
+                  <a:txBody>
+                    <a:bodyPr/>
+                    <a:lstStyle/>
+                    <a:p>
+                      <a:pPr indent="0" marL="0">
+                        <a:buNone/>
+                      </a:pPr>
+                      <a:r>
+                        <a:rPr lang="en-US" sz="1000" b="1" dirty="0">
+                          <a:solidFill>
+                            <a:srgbClr val="FFFFFF"/>
+                          </a:solidFill>
+                          <a:latin typeface="Calibri" pitchFamily="34" charset="0"/>
+                          <a:ea typeface="Calibri" pitchFamily="34" charset="-122"/>
+                          <a:cs typeface="Calibri" pitchFamily="34" charset="-120"/>
+                        </a:rPr>
+                        <a:t>Method</a:t>
+                      </a:r>
+                      <a:endParaRPr lang="en-US" sz="1000" dirty="0">
+                        <a:latin typeface="Calibri" charset="0"/>
+                        <a:ea typeface="Calibri" charset="0"/>
+                        <a:cs typeface="Calibri" charset="0"/>
+                      </a:endParaRPr>
+                    </a:p>
+                  </a:txBody>
+                  <a:tcPr marL="91440" marR="91440" marT="45720" marB="45720">
+                    <a:lnL w="6350" cap="flat" cmpd="sng" algn="ctr">
+                      <a:solidFill>
+                        <a:srgbClr val="CCCCCC"/>
+                      </a:solidFill>
+                      <a:prstDash val="solid"/>
+                      <a:round/>
+                      <a:headEnd type="none" w="med" len="med"/>
+                      <a:tailEnd type="none" w="med" len="med"/>
+                    </a:lnL>
+                    <a:lnR w="6350" cap="flat" cmpd="sng" algn="ctr">
+                      <a:solidFill>
+                        <a:srgbClr val="CCCCCC"/>
+                      </a:solidFill>
+                      <a:prstDash val="solid"/>
+                      <a:round/>
+                      <a:headEnd type="none" w="med" len="med"/>
+                      <a:tailEnd type="none" w="med" len="med"/>
+                    </a:lnR>
+                    <a:lnT w="6350" cap="flat" cmpd="sng" algn="ctr">
+                      <a:solidFill>
+                        <a:srgbClr val="CCCCCC"/>
+                      </a:solidFill>
+                      <a:prstDash val="solid"/>
+                      <a:round/>
+                      <a:headEnd type="none" w="med" len="med"/>
+                      <a:tailEnd type="none" w="med" len="med"/>
+                    </a:lnT>
+                    <a:lnB w="6350" cap="flat" cmpd="sng" algn="ctr">
+                      <a:solidFill>
+                        <a:srgbClr val="CCCCCC"/>
+                      </a:solidFill>
+                      <a:prstDash val="solid"/>
+                      <a:round/>
+                      <a:headEnd type="none" w="med" len="med"/>
+                      <a:tailEnd type="none" w="med" len="med"/>
+                    </a:lnB>
+                    <a:solidFill>
+                      <a:srgbClr val="127C8B"/>
+                    </a:solidFill>
+                  </a:tcPr>
+                </a:tc>
+              </a:tr>
+              <a:tr h="320040">
+                <a:tc>
+                  <a:txBody>
+                    <a:bodyPr/>
+                    <a:lstStyle/>
+                    <a:p>
+                      <a:pPr indent="0" marL="0">
+                        <a:buNone/>
+                      </a:pPr>
+                      <a:r>
+                        <a:rPr lang="en-US" sz="1000" dirty="0">
+                          <a:solidFill>
+                            <a:srgbClr val="1A2B33"/>
+                          </a:solidFill>
+                          <a:latin typeface="Calibri" pitchFamily="34" charset="0"/>
+                          <a:ea typeface="Calibri" pitchFamily="34" charset="-122"/>
+                          <a:cs typeface="Calibri" pitchFamily="34" charset="-120"/>
+                        </a:rPr>
+                        <a:t>Row counts per table</a:t>
+                      </a:r>
+                      <a:endParaRPr lang="en-US" sz="1000" dirty="0">
+                        <a:latin typeface="Calibri" charset="0"/>
+                        <a:ea typeface="Calibri" charset="0"/>
+                        <a:cs typeface="Calibri" charset="0"/>
+                      </a:endParaRPr>
+                    </a:p>
+                  </a:txBody>
+                  <a:tcPr marL="91440" marR="91440" marT="45720" marB="45720">
+                    <a:lnL w="6350" cap="flat" cmpd="sng" algn="ctr">
+                      <a:solidFill>
+                        <a:srgbClr val="CCCCCC"/>
+                      </a:solidFill>
+                      <a:prstDash val="solid"/>
+                      <a:round/>
+                      <a:headEnd type="none" w="med" len="med"/>
+                      <a:tailEnd type="none" w="med" len="med"/>
+                    </a:lnL>
+                    <a:lnR w="6350" cap="flat" cmpd="sng" algn="ctr">
+                      <a:solidFill>
+                        <a:srgbClr val="CCCCCC"/>
+                      </a:solidFill>
+                      <a:prstDash val="solid"/>
+                      <a:round/>
+                      <a:headEnd type="none" w="med" len="med"/>
+                      <a:tailEnd type="none" w="med" len="med"/>
+                    </a:lnR>
+                    <a:lnT w="6350" cap="flat" cmpd="sng" algn="ctr">
+                      <a:solidFill>
+                        <a:srgbClr val="CCCCCC"/>
+                      </a:solidFill>
+                      <a:prstDash val="solid"/>
+                      <a:round/>
+                      <a:headEnd type="none" w="med" len="med"/>
+                      <a:tailEnd type="none" w="med" len="med"/>
+                    </a:lnT>
+                    <a:lnB w="6350" cap="flat" cmpd="sng" algn="ctr">
+                      <a:solidFill>
+                        <a:srgbClr val="CCCCCC"/>
+                      </a:solidFill>
+                      <a:prstDash val="solid"/>
+                      <a:round/>
+                      <a:headEnd type="none" w="med" len="med"/>
+                      <a:tailEnd type="none" w="med" len="med"/>
+                    </a:lnB>
+                    <a:solidFill>
+                      <a:srgbClr val="FFFFFF"/>
+                    </a:solidFill>
+                  </a:tcPr>
+                </a:tc>
+                <a:tc>
+                  <a:txBody>
+                    <a:bodyPr/>
+                    <a:lstStyle/>
+                    <a:p>
+                      <a:pPr indent="0" marL="0">
+                        <a:buNone/>
+                      </a:pPr>
+                      <a:r>
+                        <a:rPr lang="en-US" sz="1000" dirty="0">
+                          <a:solidFill>
+                            <a:srgbClr val="1A2B33"/>
+                          </a:solidFill>
+                          <a:latin typeface="Calibri" pitchFamily="34" charset="0"/>
+                          <a:ea typeface="Calibri" pitchFamily="34" charset="-122"/>
+                          <a:cs typeface="Calibri" pitchFamily="34" charset="-120"/>
+                        </a:rPr>
+                        <a:t>COUNT(*) across 10 tables</a:t>
+                      </a:r>
+                      <a:endParaRPr lang="en-US" sz="1000" dirty="0">
+                        <a:latin typeface="Calibri" charset="0"/>
+                        <a:ea typeface="Calibri" charset="0"/>
+                        <a:cs typeface="Calibri" charset="0"/>
+                      </a:endParaRPr>
+                    </a:p>
+                  </a:txBody>
+                  <a:tcPr marL="91440" marR="91440" marT="45720" marB="45720">
+                    <a:lnL w="6350" cap="flat" cmpd="sng" algn="ctr">
+                      <a:solidFill>
+                        <a:srgbClr val="CCCCCC"/>
+                      </a:solidFill>
+                      <a:prstDash val="solid"/>
+                      <a:round/>
+                      <a:headEnd type="none" w="med" len="med"/>
+                      <a:tailEnd type="none" w="med" len="med"/>
+                    </a:lnL>
+                    <a:lnR w="6350" cap="flat" cmpd="sng" algn="ctr">
+                      <a:solidFill>
+                        <a:srgbClr val="CCCCCC"/>
+                      </a:solidFill>
+                      <a:prstDash val="solid"/>
+                      <a:round/>
+                      <a:headEnd type="none" w="med" len="med"/>
+                      <a:tailEnd type="none" w="med" len="med"/>
+                    </a:lnR>
+                    <a:lnT w="6350" cap="flat" cmpd="sng" algn="ctr">
+                      <a:solidFill>
+                        <a:srgbClr val="CCCCCC"/>
+                      </a:solidFill>
+                      <a:prstDash val="solid"/>
+                      <a:round/>
+                      <a:headEnd type="none" w="med" len="med"/>
+                      <a:tailEnd type="none" w="med" len="med"/>
+                    </a:lnT>
+                    <a:lnB w="6350" cap="flat" cmpd="sng" algn="ctr">
+                      <a:solidFill>
+                        <a:srgbClr val="CCCCCC"/>
+                      </a:solidFill>
+                      <a:prstDash val="solid"/>
+                      <a:round/>
+                      <a:headEnd type="none" w="med" len="med"/>
+                      <a:tailEnd type="none" w="med" len="med"/>
+                    </a:lnB>
+                    <a:solidFill>
+                      <a:srgbClr val="FFFFFF"/>
+                    </a:solidFill>
+                  </a:tcPr>
+                </a:tc>
+              </a:tr>
+              <a:tr h="320040">
+                <a:tc>
+                  <a:txBody>
+                    <a:bodyPr/>
+                    <a:lstStyle/>
+                    <a:p>
+                      <a:pPr indent="0" marL="0">
+                        <a:buNone/>
+                      </a:pPr>
+                      <a:r>
+                        <a:rPr lang="en-US" sz="1000" dirty="0">
+                          <a:solidFill>
+                            <a:srgbClr val="1A2B33"/>
+                          </a:solidFill>
+                          <a:latin typeface="Calibri" pitchFamily="34" charset="0"/>
+                          <a:ea typeface="Calibri" pitchFamily="34" charset="-122"/>
+                          <a:cs typeface="Calibri" pitchFamily="34" charset="-120"/>
+                        </a:rPr>
+                        <a:t>Aspects / Units / Terms</a:t>
+                      </a:r>
+                      <a:endParaRPr lang="en-US" sz="1000" dirty="0">
+                        <a:latin typeface="Calibri" charset="0"/>
+                        <a:ea typeface="Calibri" charset="0"/>
+                        <a:cs typeface="Calibri" charset="0"/>
+                      </a:endParaRPr>
+                    </a:p>
+                  </a:txBody>
+                  <a:tcPr marL="91440" marR="91440" marT="45720" marB="45720">
+                    <a:lnL w="6350" cap="flat" cmpd="sng" algn="ctr">
+                      <a:solidFill>
+                        <a:srgbClr val="CCCCCC"/>
+                      </a:solidFill>
+                      <a:prstDash val="solid"/>
+                      <a:round/>
+                      <a:headEnd type="none" w="med" len="med"/>
+                      <a:tailEnd type="none" w="med" len="med"/>
+                    </a:lnL>
+                    <a:lnR w="6350" cap="flat" cmpd="sng" algn="ctr">
+                      <a:solidFill>
+                        <a:srgbClr val="CCCCCC"/>
+                      </a:solidFill>
+                      <a:prstDash val="solid"/>
+                      <a:round/>
+                      <a:headEnd type="none" w="med" len="med"/>
+                      <a:tailEnd type="none" w="med" len="med"/>
+                    </a:lnR>
+                    <a:lnT w="6350" cap="flat" cmpd="sng" algn="ctr">
+                      <a:solidFill>
+                        <a:srgbClr val="CCCCCC"/>
+                      </a:solidFill>
+                      <a:prstDash val="solid"/>
+                      <a:round/>
+                      <a:headEnd type="none" w="med" len="med"/>
+                      <a:tailEnd type="none" w="med" len="med"/>
+                    </a:lnT>
+                    <a:lnB w="6350" cap="flat" cmpd="sng" algn="ctr">
+                      <a:solidFill>
+                        <a:srgbClr val="CCCCCC"/>
+                      </a:solidFill>
+                      <a:prstDash val="solid"/>
+                      <a:round/>
+                      <a:headEnd type="none" w="med" len="med"/>
+                      <a:tailEnd type="none" w="med" len="med"/>
+                    </a:lnB>
+                    <a:solidFill>
+                      <a:srgbClr val="F5F5F5"/>
+                    </a:solidFill>
+                  </a:tcPr>
+                </a:tc>
+                <a:tc>
+                  <a:txBody>
+                    <a:bodyPr/>
+                    <a:lstStyle/>
+                    <a:p>
+                      <a:pPr indent="0" marL="0">
+                        <a:buNone/>
+                      </a:pPr>
+                      <a:r>
+                        <a:rPr lang="en-US" sz="1000" dirty="0">
+                          <a:solidFill>
+                            <a:srgbClr val="1A2B33"/>
+                          </a:solidFill>
+                          <a:latin typeface="Calibri" pitchFamily="34" charset="0"/>
+                          <a:ea typeface="Calibri" pitchFamily="34" charset="-122"/>
+                          <a:cs typeface="Calibri" pitchFamily="34" charset="-120"/>
+                        </a:rPr>
+                        <a:t>label + iri equality</a:t>
+                      </a:r>
+                      <a:endParaRPr lang="en-US" sz="1000" dirty="0">
+                        <a:latin typeface="Calibri" charset="0"/>
+                        <a:ea typeface="Calibri" charset="0"/>
+                        <a:cs typeface="Calibri" charset="0"/>
+                      </a:endParaRPr>
+                    </a:p>
+                  </a:txBody>
+                  <a:tcPr marL="91440" marR="91440" marT="45720" marB="45720">
+                    <a:lnL w="6350" cap="flat" cmpd="sng" algn="ctr">
+                      <a:solidFill>
+                        <a:srgbClr val="CCCCCC"/>
+                      </a:solidFill>
+                      <a:prstDash val="solid"/>
+                      <a:round/>
+                      <a:headEnd type="none" w="med" len="med"/>
+                      <a:tailEnd type="none" w="med" len="med"/>
+                    </a:lnL>
+                    <a:lnR w="6350" cap="flat" cmpd="sng" algn="ctr">
+                      <a:solidFill>
+                        <a:srgbClr val="CCCCCC"/>
+                      </a:solidFill>
+                      <a:prstDash val="solid"/>
+                      <a:round/>
+                      <a:headEnd type="none" w="med" len="med"/>
+                      <a:tailEnd type="none" w="med" len="med"/>
+                    </a:lnR>
+                    <a:lnT w="6350" cap="flat" cmpd="sng" algn="ctr">
+                      <a:solidFill>
+                        <a:srgbClr val="CCCCCC"/>
+                      </a:solidFill>
+                      <a:prstDash val="solid"/>
+                      <a:round/>
+                      <a:headEnd type="none" w="med" len="med"/>
+                      <a:tailEnd type="none" w="med" len="med"/>
+                    </a:lnT>
+                    <a:lnB w="6350" cap="flat" cmpd="sng" algn="ctr">
+                      <a:solidFill>
+                        <a:srgbClr val="CCCCCC"/>
+                      </a:solidFill>
+                      <a:prstDash val="solid"/>
+                      <a:round/>
+                      <a:headEnd type="none" w="med" len="med"/>
+                      <a:tailEnd type="none" w="med" len="med"/>
+                    </a:lnB>
+                    <a:solidFill>
+                      <a:srgbClr val="F5F5F5"/>
+                    </a:solidFill>
+                  </a:tcPr>
+                </a:tc>
+              </a:tr>
+              <a:tr h="320040">
+                <a:tc>
+                  <a:txBody>
+                    <a:bodyPr/>
+                    <a:lstStyle/>
+                    <a:p>
+                      <a:pPr indent="0" marL="0">
+                        <a:buNone/>
+                      </a:pPr>
+                      <a:r>
+                        <a:rPr lang="en-US" sz="1000" dirty="0">
+                          <a:solidFill>
+                            <a:srgbClr val="1A2B33"/>
+                          </a:solidFill>
+                          <a:latin typeface="Calibri" pitchFamily="34" charset="0"/>
+                          <a:ea typeface="Calibri" pitchFamily="34" charset="-122"/>
+                          <a:cs typeface="Calibri" pitchFamily="34" charset="-120"/>
+                        </a:rPr>
+                        <a:t>DescriptorsInst</a:t>
+                      </a:r>
+                      <a:endParaRPr lang="en-US" sz="1000" dirty="0">
+                        <a:latin typeface="Calibri" charset="0"/>
+                        <a:ea typeface="Calibri" charset="0"/>
+                        <a:cs typeface="Calibri" charset="0"/>
+                      </a:endParaRPr>
+                    </a:p>
+                  </a:txBody>
+                  <a:tcPr marL="91440" marR="91440" marT="45720" marB="45720">
+                    <a:lnL w="6350" cap="flat" cmpd="sng" algn="ctr">
+                      <a:solidFill>
+                        <a:srgbClr val="CCCCCC"/>
+                      </a:solidFill>
+                      <a:prstDash val="solid"/>
+                      <a:round/>
+                      <a:headEnd type="none" w="med" len="med"/>
+                      <a:tailEnd type="none" w="med" len="med"/>
+                    </a:lnL>
+                    <a:lnR w="6350" cap="flat" cmpd="sng" algn="ctr">
+                      <a:solidFill>
+                        <a:srgbClr val="CCCCCC"/>
+                      </a:solidFill>
+                      <a:prstDash val="solid"/>
+                      <a:round/>
+                      <a:headEnd type="none" w="med" len="med"/>
+                      <a:tailEnd type="none" w="med" len="med"/>
+                    </a:lnR>
+                    <a:lnT w="6350" cap="flat" cmpd="sng" algn="ctr">
+                      <a:solidFill>
+                        <a:srgbClr val="CCCCCC"/>
+                      </a:solidFill>
+                      <a:prstDash val="solid"/>
+                      <a:round/>
+                      <a:headEnd type="none" w="med" len="med"/>
+                      <a:tailEnd type="none" w="med" len="med"/>
+                    </a:lnT>
+                    <a:lnB w="6350" cap="flat" cmpd="sng" algn="ctr">
+                      <a:solidFill>
+                        <a:srgbClr val="CCCCCC"/>
+                      </a:solidFill>
+                      <a:prstDash val="solid"/>
+                      <a:round/>
+                      <a:headEnd type="none" w="med" len="med"/>
+                      <a:tailEnd type="none" w="med" len="med"/>
+                    </a:lnB>
+                    <a:solidFill>
+                      <a:srgbClr val="FFFFFF"/>
+                    </a:solidFill>
+                  </a:tcPr>
+                </a:tc>
+                <a:tc>
+                  <a:txBody>
+                    <a:bodyPr/>
+                    <a:lstStyle/>
+                    <a:p>
+                      <a:pPr indent="0" marL="0">
+                        <a:buNone/>
+                      </a:pPr>
+                      <a:r>
+                        <a:rPr lang="en-US" sz="1000" dirty="0">
+                          <a:solidFill>
+                            <a:srgbClr val="1A2B33"/>
+                          </a:solidFill>
+                          <a:latin typeface="Calibri" pitchFamily="34" charset="0"/>
+                          <a:ea typeface="Calibri" pitchFamily="34" charset="-122"/>
+                          <a:cs typeface="Calibri" pitchFamily="34" charset="-120"/>
+                        </a:rPr>
+                        <a:t>label + iri equality</a:t>
+                      </a:r>
+                      <a:endParaRPr lang="en-US" sz="1000" dirty="0">
+                        <a:latin typeface="Calibri" charset="0"/>
+                        <a:ea typeface="Calibri" charset="0"/>
+                        <a:cs typeface="Calibri" charset="0"/>
+                      </a:endParaRPr>
+                    </a:p>
+                  </a:txBody>
+                  <a:tcPr marL="91440" marR="91440" marT="45720" marB="45720">
+                    <a:lnL w="6350" cap="flat" cmpd="sng" algn="ctr">
+                      <a:solidFill>
+                        <a:srgbClr val="CCCCCC"/>
+                      </a:solidFill>
+                      <a:prstDash val="solid"/>
+                      <a:round/>
+                      <a:headEnd type="none" w="med" len="med"/>
+                      <a:tailEnd type="none" w="med" len="med"/>
+                    </a:lnL>
+                    <a:lnR w="6350" cap="flat" cmpd="sng" algn="ctr">
+                      <a:solidFill>
+                        <a:srgbClr val="CCCCCC"/>
+                      </a:solidFill>
+                      <a:prstDash val="solid"/>
+                      <a:round/>
+                      <a:headEnd type="none" w="med" len="med"/>
+                      <a:tailEnd type="none" w="med" len="med"/>
+                    </a:lnR>
+                    <a:lnT w="6350" cap="flat" cmpd="sng" algn="ctr">
+                      <a:solidFill>
+                        <a:srgbClr val="CCCCCC"/>
+                      </a:solidFill>
+                      <a:prstDash val="solid"/>
+                      <a:round/>
+                      <a:headEnd type="none" w="med" len="med"/>
+                      <a:tailEnd type="none" w="med" len="med"/>
+                    </a:lnT>
+                    <a:lnB w="6350" cap="flat" cmpd="sng" algn="ctr">
+                      <a:solidFill>
+                        <a:srgbClr val="CCCCCC"/>
+                      </a:solidFill>
+                      <a:prstDash val="solid"/>
+                      <a:round/>
+                      <a:headEnd type="none" w="med" len="med"/>
+                      <a:tailEnd type="none" w="med" len="med"/>
+                    </a:lnB>
+                    <a:solidFill>
+                      <a:srgbClr val="FFFFFF"/>
+                    </a:solidFill>
+                  </a:tcPr>
+                </a:tc>
+              </a:tr>
+              <a:tr h="320040">
+                <a:tc>
+                  <a:txBody>
+                    <a:bodyPr/>
+                    <a:lstStyle/>
+                    <a:p>
+                      <a:pPr indent="0" marL="0">
+                        <a:buNone/>
+                      </a:pPr>
+                      <a:r>
+                        <a:rPr lang="en-US" sz="1000" dirty="0">
+                          <a:solidFill>
+                            <a:srgbClr val="1A2B33"/>
+                          </a:solidFill>
+                          <a:latin typeface="Calibri" pitchFamily="34" charset="0"/>
+                          <a:ea typeface="Calibri" pitchFamily="34" charset="-122"/>
+                          <a:cs typeface="Calibri" pitchFamily="34" charset="-120"/>
+                        </a:rPr>
+                        <a:t>Objects (dataset/pkg)</a:t>
+                      </a:r>
+                      <a:endParaRPr lang="en-US" sz="1000" dirty="0">
+                        <a:latin typeface="Calibri" charset="0"/>
+                        <a:ea typeface="Calibri" charset="0"/>
+                        <a:cs typeface="Calibri" charset="0"/>
+                      </a:endParaRPr>
+                    </a:p>
+                  </a:txBody>
+                  <a:tcPr marL="91440" marR="91440" marT="45720" marB="45720">
+                    <a:lnL w="6350" cap="flat" cmpd="sng" algn="ctr">
+                      <a:solidFill>
+                        <a:srgbClr val="CCCCCC"/>
+                      </a:solidFill>
+                      <a:prstDash val="solid"/>
+                      <a:round/>
+                      <a:headEnd type="none" w="med" len="med"/>
+                      <a:tailEnd type="none" w="med" len="med"/>
+                    </a:lnL>
+                    <a:lnR w="6350" cap="flat" cmpd="sng" algn="ctr">
+                      <a:solidFill>
+                        <a:srgbClr val="CCCCCC"/>
+                      </a:solidFill>
+                      <a:prstDash val="solid"/>
+                      <a:round/>
+                      <a:headEnd type="none" w="med" len="med"/>
+                      <a:tailEnd type="none" w="med" len="med"/>
+                    </a:lnR>
+                    <a:lnT w="6350" cap="flat" cmpd="sng" algn="ctr">
+                      <a:solidFill>
+                        <a:srgbClr val="CCCCCC"/>
+                      </a:solidFill>
+                      <a:prstDash val="solid"/>
+                      <a:round/>
+                      <a:headEnd type="none" w="med" len="med"/>
+                      <a:tailEnd type="none" w="med" len="med"/>
+                    </a:lnT>
+                    <a:lnB w="6350" cap="flat" cmpd="sng" algn="ctr">
+                      <a:solidFill>
+                        <a:srgbClr val="CCCCCC"/>
+                      </a:solidFill>
+                      <a:prstDash val="solid"/>
+                      <a:round/>
+                      <a:headEnd type="none" w="med" len="med"/>
+                      <a:tailEnd type="none" w="med" len="med"/>
+                    </a:lnB>
+                    <a:solidFill>
+                      <a:srgbClr val="F5F5F5"/>
+                    </a:solidFill>
+                  </a:tcPr>
+                </a:tc>
+                <a:tc>
+                  <a:txBody>
+                    <a:bodyPr/>
+                    <a:lstStyle/>
+                    <a:p>
+                      <a:pPr indent="0" marL="0">
+                        <a:buNone/>
+                      </a:pPr>
+                      <a:r>
+                        <a:rPr lang="en-US" sz="1000" dirty="0">
+                          <a:solidFill>
+                            <a:srgbClr val="1A2B33"/>
+                          </a:solidFill>
+                          <a:latin typeface="Calibri" pitchFamily="34" charset="0"/>
+                          <a:ea typeface="Calibri" pitchFamily="34" charset="-122"/>
+                          <a:cs typeface="Calibri" pitchFamily="34" charset="-120"/>
+                        </a:rPr>
+                        <a:t>id + id_type equality</a:t>
+                      </a:r>
+                      <a:endParaRPr lang="en-US" sz="1000" dirty="0">
+                        <a:latin typeface="Calibri" charset="0"/>
+                        <a:ea typeface="Calibri" charset="0"/>
+                        <a:cs typeface="Calibri" charset="0"/>
+                      </a:endParaRPr>
+                    </a:p>
+                  </a:txBody>
+                  <a:tcPr marL="91440" marR="91440" marT="45720" marB="45720">
+                    <a:lnL w="6350" cap="flat" cmpd="sng" algn="ctr">
+                      <a:solidFill>
+                        <a:srgbClr val="CCCCCC"/>
+                      </a:solidFill>
+                      <a:prstDash val="solid"/>
+                      <a:round/>
+                      <a:headEnd type="none" w="med" len="med"/>
+                      <a:tailEnd type="none" w="med" len="med"/>
+                    </a:lnL>
+                    <a:lnR w="6350" cap="flat" cmpd="sng" algn="ctr">
+                      <a:solidFill>
+                        <a:srgbClr val="CCCCCC"/>
+                      </a:solidFill>
+                      <a:prstDash val="solid"/>
+                      <a:round/>
+                      <a:headEnd type="none" w="med" len="med"/>
+                      <a:tailEnd type="none" w="med" len="med"/>
+                    </a:lnR>
+                    <a:lnT w="6350" cap="flat" cmpd="sng" algn="ctr">
+                      <a:solidFill>
+                        <a:srgbClr val="CCCCCC"/>
+                      </a:solidFill>
+                      <a:prstDash val="solid"/>
+                      <a:round/>
+                      <a:headEnd type="none" w="med" len="med"/>
+                      <a:tailEnd type="none" w="med" len="med"/>
+                    </a:lnT>
+                    <a:lnB w="6350" cap="flat" cmpd="sng" algn="ctr">
+                      <a:solidFill>
+                        <a:srgbClr val="CCCCCC"/>
+                      </a:solidFill>
+                      <a:prstDash val="solid"/>
+                      <a:round/>
+                      <a:headEnd type="none" w="med" len="med"/>
+                      <a:tailEnd type="none" w="med" len="med"/>
+                    </a:lnB>
+                    <a:solidFill>
+                      <a:srgbClr val="F5F5F5"/>
+                    </a:solidFill>
+                  </a:tcPr>
+                </a:tc>
+              </a:tr>
+              <a:tr h="320040">
+                <a:tc>
+                  <a:txBody>
+                    <a:bodyPr/>
+                    <a:lstStyle/>
+                    <a:p>
+                      <a:pPr indent="0" marL="0">
+                        <a:buNone/>
+                      </a:pPr>
+                      <a:r>
+                        <a:rPr lang="en-US" sz="1000" dirty="0">
+                          <a:solidFill>
+                            <a:srgbClr val="1A2B33"/>
+                          </a:solidFill>
+                          <a:latin typeface="Calibri" pitchFamily="34" charset="0"/>
+                          <a:ea typeface="Calibri" pitchFamily="34" charset="-122"/>
+                          <a:cs typeface="Calibri" pitchFamily="34" charset="-120"/>
+                        </a:rPr>
+                        <a:t>ValuesInst</a:t>
+                      </a:r>
+                      <a:endParaRPr lang="en-US" sz="1000" dirty="0">
+                        <a:latin typeface="Calibri" charset="0"/>
+                        <a:ea typeface="Calibri" charset="0"/>
+                        <a:cs typeface="Calibri" charset="0"/>
+                      </a:endParaRPr>
+                    </a:p>
+                  </a:txBody>
+                  <a:tcPr marL="91440" marR="91440" marT="45720" marB="45720">
+                    <a:lnL w="6350" cap="flat" cmpd="sng" algn="ctr">
+                      <a:solidFill>
+                        <a:srgbClr val="CCCCCC"/>
+                      </a:solidFill>
+                      <a:prstDash val="solid"/>
+                      <a:round/>
+                      <a:headEnd type="none" w="med" len="med"/>
+                      <a:tailEnd type="none" w="med" len="med"/>
+                    </a:lnL>
+                    <a:lnR w="6350" cap="flat" cmpd="sng" algn="ctr">
+                      <a:solidFill>
+                        <a:srgbClr val="CCCCCC"/>
+                      </a:solidFill>
+                      <a:prstDash val="solid"/>
+                      <a:round/>
+                      <a:headEnd type="none" w="med" len="med"/>
+                      <a:tailEnd type="none" w="med" len="med"/>
+                    </a:lnR>
+                    <a:lnT w="6350" cap="flat" cmpd="sng" algn="ctr">
+                      <a:solidFill>
+                        <a:srgbClr val="CCCCCC"/>
+                      </a:solidFill>
+                      <a:prstDash val="solid"/>
+                      <a:round/>
+                      <a:headEnd type="none" w="med" len="med"/>
+                      <a:tailEnd type="none" w="med" len="med"/>
+                    </a:lnT>
+                    <a:lnB w="6350" cap="flat" cmpd="sng" algn="ctr">
+                      <a:solidFill>
+                        <a:srgbClr val="CCCCCC"/>
+                      </a:solidFill>
+                      <a:prstDash val="solid"/>
+                      <a:round/>
+                      <a:headEnd type="none" w="med" len="med"/>
+                      <a:tailEnd type="none" w="med" len="med"/>
+                    </a:lnB>
+                    <a:solidFill>
+                      <a:srgbClr val="FFFFFF"/>
+                    </a:solidFill>
+                  </a:tcPr>
+                </a:tc>
+                <a:tc>
+                  <a:txBody>
+                    <a:bodyPr/>
+                    <a:lstStyle/>
+                    <a:p>
+                      <a:pPr indent="0" marL="0">
+                        <a:buNone/>
+                      </a:pPr>
+                      <a:r>
+                        <a:rPr lang="en-US" sz="1000" dirty="0">
+                          <a:solidFill>
+                            <a:srgbClr val="1A2B33"/>
+                          </a:solidFill>
+                          <a:latin typeface="Calibri" pitchFamily="34" charset="0"/>
+                          <a:ea typeface="Calibri" pitchFamily="34" charset="-122"/>
+                          <a:cs typeface="Calibri" pitchFamily="34" charset="-120"/>
+                        </a:rPr>
+                        <a:t>id_formal + type + id_sub</a:t>
+                      </a:r>
+                      <a:endParaRPr lang="en-US" sz="1000" dirty="0">
+                        <a:latin typeface="Calibri" charset="0"/>
+                        <a:ea typeface="Calibri" charset="0"/>
+                        <a:cs typeface="Calibri" charset="0"/>
+                      </a:endParaRPr>
+                    </a:p>
+                  </a:txBody>
+                  <a:tcPr marL="91440" marR="91440" marT="45720" marB="45720">
+                    <a:lnL w="6350" cap="flat" cmpd="sng" algn="ctr">
+                      <a:solidFill>
+                        <a:srgbClr val="CCCCCC"/>
+                      </a:solidFill>
+                      <a:prstDash val="solid"/>
+                      <a:round/>
+                      <a:headEnd type="none" w="med" len="med"/>
+                      <a:tailEnd type="none" w="med" len="med"/>
+                    </a:lnL>
+                    <a:lnR w="6350" cap="flat" cmpd="sng" algn="ctr">
+                      <a:solidFill>
+                        <a:srgbClr val="CCCCCC"/>
+                      </a:solidFill>
+                      <a:prstDash val="solid"/>
+                      <a:round/>
+                      <a:headEnd type="none" w="med" len="med"/>
+                      <a:tailEnd type="none" w="med" len="med"/>
+                    </a:lnR>
+                    <a:lnT w="6350" cap="flat" cmpd="sng" algn="ctr">
+                      <a:solidFill>
+                        <a:srgbClr val="CCCCCC"/>
+                      </a:solidFill>
+                      <a:prstDash val="solid"/>
+                      <a:round/>
+                      <a:headEnd type="none" w="med" len="med"/>
+                      <a:tailEnd type="none" w="med" len="med"/>
+                    </a:lnT>
+                    <a:lnB w="6350" cap="flat" cmpd="sng" algn="ctr">
+                      <a:solidFill>
+                        <a:srgbClr val="CCCCCC"/>
+                      </a:solidFill>
+                      <a:prstDash val="solid"/>
+                      <a:round/>
+                      <a:headEnd type="none" w="med" len="med"/>
+                      <a:tailEnd type="none" w="med" len="med"/>
+                    </a:lnB>
+                    <a:solidFill>
+                      <a:srgbClr val="FFFFFF"/>
+                    </a:solidFill>
+                  </a:tcPr>
+                </a:tc>
+              </a:tr>
+              <a:tr h="320040">
+                <a:tc>
+                  <a:txBody>
+                    <a:bodyPr/>
+                    <a:lstStyle/>
+                    <a:p>
+                      <a:pPr indent="0" marL="0">
+                        <a:buNone/>
+                      </a:pPr>
+                      <a:r>
+                        <a:rPr lang="en-US" sz="1000" dirty="0">
+                          <a:solidFill>
+                            <a:srgbClr val="1A2B33"/>
+                          </a:solidFill>
+                          <a:latin typeface="Calibri" pitchFamily="34" charset="0"/>
+                          <a:ea typeface="Calibri" pitchFamily="34" charset="-122"/>
+                          <a:cs typeface="Calibri" pitchFamily="34" charset="-120"/>
+                        </a:rPr>
+                        <a:t>ValuesQuant</a:t>
+                      </a:r>
+                      <a:endParaRPr lang="en-US" sz="1000" dirty="0">
+                        <a:latin typeface="Calibri" charset="0"/>
+                        <a:ea typeface="Calibri" charset="0"/>
+                        <a:cs typeface="Calibri" charset="0"/>
+                      </a:endParaRPr>
+                    </a:p>
+                  </a:txBody>
+                  <a:tcPr marL="91440" marR="91440" marT="45720" marB="45720">
+                    <a:lnL w="6350" cap="flat" cmpd="sng" algn="ctr">
+                      <a:solidFill>
+                        <a:srgbClr val="CCCCCC"/>
+                      </a:solidFill>
+                      <a:prstDash val="solid"/>
+                      <a:round/>
+                      <a:headEnd type="none" w="med" len="med"/>
+                      <a:tailEnd type="none" w="med" len="med"/>
+                    </a:lnL>
+                    <a:lnR w="6350" cap="flat" cmpd="sng" algn="ctr">
+                      <a:solidFill>
+                        <a:srgbClr val="CCCCCC"/>
+                      </a:solidFill>
+                      <a:prstDash val="solid"/>
+                      <a:round/>
+                      <a:headEnd type="none" w="med" len="med"/>
+                      <a:tailEnd type="none" w="med" len="med"/>
+                    </a:lnR>
+                    <a:lnT w="6350" cap="flat" cmpd="sng" algn="ctr">
+                      <a:solidFill>
+                        <a:srgbClr val="CCCCCC"/>
+                      </a:solidFill>
+                      <a:prstDash val="solid"/>
+                      <a:round/>
+                      <a:headEnd type="none" w="med" len="med"/>
+                      <a:tailEnd type="none" w="med" len="med"/>
+                    </a:lnT>
+                    <a:lnB w="6350" cap="flat" cmpd="sng" algn="ctr">
+                      <a:solidFill>
+                        <a:srgbClr val="CCCCCC"/>
+                      </a:solidFill>
+                      <a:prstDash val="solid"/>
+                      <a:round/>
+                      <a:headEnd type="none" w="med" len="med"/>
+                      <a:tailEnd type="none" w="med" len="med"/>
+                    </a:lnB>
+                    <a:solidFill>
+                      <a:srgbClr val="F5F5F5"/>
+                    </a:solidFill>
+                  </a:tcPr>
+                </a:tc>
+                <a:tc>
+                  <a:txBody>
+                    <a:bodyPr/>
+                    <a:lstStyle/>
+                    <a:p>
+                      <a:pPr indent="0" marL="0">
+                        <a:buNone/>
+                      </a:pPr>
+                      <a:r>
+                        <a:rPr lang="en-US" sz="1000" dirty="0">
+                          <a:solidFill>
+                            <a:srgbClr val="1A2B33"/>
+                          </a:solidFill>
+                          <a:latin typeface="Calibri" pitchFamily="34" charset="0"/>
+                          <a:ea typeface="Calibri" pitchFamily="34" charset="-122"/>
+                          <a:cs typeface="Calibri" pitchFamily="34" charset="-120"/>
+                        </a:rPr>
+                        <a:t>value + orig_value</a:t>
+                      </a:r>
+                      <a:endParaRPr lang="en-US" sz="1000" dirty="0">
+                        <a:latin typeface="Calibri" charset="0"/>
+                        <a:ea typeface="Calibri" charset="0"/>
+                        <a:cs typeface="Calibri" charset="0"/>
+                      </a:endParaRPr>
+                    </a:p>
+                  </a:txBody>
+                  <a:tcPr marL="91440" marR="91440" marT="45720" marB="45720">
+                    <a:lnL w="6350" cap="flat" cmpd="sng" algn="ctr">
+                      <a:solidFill>
+                        <a:srgbClr val="CCCCCC"/>
+                      </a:solidFill>
+                      <a:prstDash val="solid"/>
+                      <a:round/>
+                      <a:headEnd type="none" w="med" len="med"/>
+                      <a:tailEnd type="none" w="med" len="med"/>
+                    </a:lnL>
+                    <a:lnR w="6350" cap="flat" cmpd="sng" algn="ctr">
+                      <a:solidFill>
+                        <a:srgbClr val="CCCCCC"/>
+                      </a:solidFill>
+                      <a:prstDash val="solid"/>
+                      <a:round/>
+                      <a:headEnd type="none" w="med" len="med"/>
+                      <a:tailEnd type="none" w="med" len="med"/>
+                    </a:lnR>
+                    <a:lnT w="6350" cap="flat" cmpd="sng" algn="ctr">
+                      <a:solidFill>
+                        <a:srgbClr val="CCCCCC"/>
+                      </a:solidFill>
+                      <a:prstDash val="solid"/>
+                      <a:round/>
+                      <a:headEnd type="none" w="med" len="med"/>
+                      <a:tailEnd type="none" w="med" len="med"/>
+                    </a:lnT>
+                    <a:lnB w="6350" cap="flat" cmpd="sng" algn="ctr">
+                      <a:solidFill>
+                        <a:srgbClr val="CCCCCC"/>
+                      </a:solidFill>
+                      <a:prstDash val="solid"/>
+                      <a:round/>
+                      <a:headEnd type="none" w="med" len="med"/>
+                      <a:tailEnd type="none" w="med" len="med"/>
+                    </a:lnB>
+                    <a:solidFill>
+                      <a:srgbClr val="F5F5F5"/>
+                    </a:solidFill>
+                  </a:tcPr>
+                </a:tc>
+              </a:tr>
+            </a:tbl>
+          </a:graphicData>
+        </a:graphic>
+      </p:graphicFrame>
+    </p:spTree>
+  </p:cSld>
+  <p:clrMapOvr>
+    <a:masterClrMapping/>
+  </p:clrMapOvr>
+</p:sld>
+</file>
+
+<file path=ppt/slides/slide11.xml><?xml version="1.0" encoding="utf-8"?>
+<p:sld xmlns:a="http://schemas.openxmlformats.org/drawingml/2006/main" xmlns:r="http://schemas.openxmlformats.org/officeDocument/2006/relationships" xmlns:p="http://schemas.openxmlformats.org/presentationml/2006/main">
+  <p:cSld name="Slide 11">
+    <p:bg>
+      <p:bgPr>
+        <a:solidFill>
+          <a:srgbClr val="FFFFFF"/>
+        </a:solidFill>
+      </p:bgPr>
+    </p:bg>
+    <p:spTree>
+      <p:nvGrpSpPr>
+        <p:cNvPr id="1" name=""/>
+        <p:cNvGrpSpPr/>
+        <p:nvPr/>
+      </p:nvGrpSpPr>
+      <p:grpSpPr>
+        <a:xfrm>
+          <a:off x="0" y="0"/>
+          <a:ext cx="0" cy="0"/>
+          <a:chOff x="0" y="0"/>
+          <a:chExt cx="0" cy="0"/>
+        </a:xfrm>
+      </p:grpSpPr>
+      <p:sp>
+        <p:nvSpPr>
+          <p:cNvPr id="2" name="Shape 0"/>
+          <p:cNvSpPr/>
+          <p:nvPr/>
+        </p:nvSpPr>
+        <p:spPr>
+          <a:xfrm>
+            <a:off x="0" y="0"/>
+            <a:ext cx="9144000" cy="54864"/>
+          </a:xfrm>
+          <a:prstGeom prst="rect">
+            <a:avLst/>
+          </a:prstGeom>
+          <a:solidFill>
+            <a:srgbClr val="127C8B"/>
+          </a:solidFill>
+          <a:ln/>
+        </p:spPr>
+      </p:sp>
+      <p:sp>
+        <p:nvSpPr>
+          <p:cNvPr id="3" name="Text 1"/>
+          <p:cNvSpPr/>
+          <p:nvPr/>
+        </p:nvSpPr>
+        <p:spPr>
+          <a:xfrm>
+            <a:off x="457200" y="274320"/>
+            <a:ext cx="8229600" cy="548640"/>
+          </a:xfrm>
+          <a:prstGeom prst="rect">
+            <a:avLst/>
+          </a:prstGeom>
+          <a:noFill/>
+          <a:ln/>
+        </p:spPr>
+        <p:txBody>
+          <a:bodyPr wrap="square" lIns="0" tIns="0" rIns="0" bIns="0" rtlCol="0" anchor="ctr"/>
+          <a:lstStyle/>
+          <a:p>
+            <a:pPr indent="0" marL="0">
+              <a:buNone/>
+            </a:pPr>
+            <a:r>
+              <a:rPr lang="en-US" sz="3200" b="1" dirty="0">
+                <a:solidFill>
+                  <a:srgbClr val="0B3D4C"/>
+                </a:solidFill>
+                <a:latin typeface="Georgia" pitchFamily="34" charset="0"/>
+                <a:ea typeface="Georgia" pitchFamily="34" charset="-122"/>
+                <a:cs typeface="Georgia" pitchFamily="34" charset="-120"/>
+              </a:rPr>
+              <a:t>Test Suite Overview</a:t>
+            </a:r>
+            <a:endParaRPr lang="en-US" sz="3200" dirty="0"/>
+          </a:p>
+        </p:txBody>
+      </p:sp>
+      <p:sp>
+        <p:nvSpPr>
+          <p:cNvPr id="4" name="Shape 2"/>
+          <p:cNvSpPr/>
+          <p:nvPr/>
+        </p:nvSpPr>
+        <p:spPr>
+          <a:xfrm>
+            <a:off x="365760" y="1005840"/>
+            <a:ext cx="2697480" cy="2743200"/>
+          </a:xfrm>
+          <a:prstGeom prst="rect">
+            <a:avLst/>
+          </a:prstGeom>
+          <a:solidFill>
+            <a:srgbClr val="FFFFFF"/>
+          </a:solidFill>
+          <a:ln/>
+          <a:effectLst>
+            <a:outerShdw sx="100000" sy="100000" kx="0" ky="0" algn="bl" rotWithShape="0" blurRad="76200" dist="25400" dir="8100000">
+              <a:srgbClr val="000000">
+                <a:alpha val="12000"/>
+              </a:srgbClr>
+            </a:outerShdw>
+          </a:effectLst>
+        </p:spPr>
+      </p:sp>
+      <p:sp>
+        <p:nvSpPr>
+          <p:cNvPr id="5" name="Shape 3"/>
+          <p:cNvSpPr/>
+          <p:nvPr/>
+        </p:nvSpPr>
+        <p:spPr>
+          <a:xfrm>
+            <a:off x="365760" y="1005840"/>
+            <a:ext cx="2697480" cy="54864"/>
+          </a:xfrm>
+          <a:prstGeom prst="rect">
+            <a:avLst/>
+          </a:prstGeom>
+          <a:solidFill>
+            <a:srgbClr val="127C8B"/>
+          </a:solidFill>
+          <a:ln/>
+        </p:spPr>
+      </p:sp>
+      <p:sp>
+        <p:nvSpPr>
+          <p:cNvPr id="6" name="Text 4"/>
+          <p:cNvSpPr/>
+          <p:nvPr/>
+        </p:nvSpPr>
+        <p:spPr>
+          <a:xfrm>
+            <a:off x="502920" y="1188720"/>
+            <a:ext cx="2423160" cy="594360"/>
+          </a:xfrm>
+          <a:prstGeom prst="rect">
+            <a:avLst/>
+          </a:prstGeom>
+          <a:noFill/>
+          <a:ln/>
+        </p:spPr>
+        <p:txBody>
+          <a:bodyPr wrap="square" lIns="0" tIns="0" rIns="0" bIns="0" rtlCol="0" anchor="t"/>
+          <a:lstStyle/>
+          <a:p>
+            <a:pPr indent="0" marL="0">
+              <a:buNone/>
+            </a:pPr>
+            <a:r>
+              <a:rPr lang="en-US" sz="1200" b="1" dirty="0">
+                <a:solidFill>
+                  <a:srgbClr val="0B3D4C"/>
+                </a:solidFill>
+                <a:latin typeface="Consolas" pitchFamily="34" charset="0"/>
+                <a:ea typeface="Consolas" pitchFamily="34" charset="-122"/>
+                <a:cs typeface="Consolas" pitchFamily="34" charset="-120"/>
+              </a:rPr>
+              <a:t>test_back_populate</a:t>
+            </a:r>
+            <a:endParaRPr lang="en-US" sz="1200" dirty="0"/>
+          </a:p>
+          <a:p>
+            <a:pPr indent="0" marL="0">
+              <a:buNone/>
+            </a:pPr>
+            <a:r>
+              <a:rPr lang="en-US" sz="1200" b="1" dirty="0">
+                <a:solidFill>
+                  <a:srgbClr val="0B3D4C"/>
+                </a:solidFill>
+                <a:latin typeface="Consolas" pitchFamily="34" charset="0"/>
+                <a:ea typeface="Consolas" pitchFamily="34" charset="-122"/>
+                <a:cs typeface="Consolas" pitchFamily="34" charset="-120"/>
+              </a:rPr>
+              <a:t>_simple.py</a:t>
+            </a:r>
+            <a:endParaRPr lang="en-US" sz="1200" dirty="0"/>
+          </a:p>
+        </p:txBody>
+      </p:sp>
+      <p:sp>
+        <p:nvSpPr>
+          <p:cNvPr id="7" name="Text 5"/>
+          <p:cNvSpPr/>
+          <p:nvPr/>
+        </p:nvSpPr>
+        <p:spPr>
+          <a:xfrm>
+            <a:off x="502920" y="1920240"/>
+            <a:ext cx="2423160" cy="1645920"/>
+          </a:xfrm>
+          <a:prstGeom prst="rect">
+            <a:avLst/>
+          </a:prstGeom>
+          <a:noFill/>
+          <a:ln/>
+        </p:spPr>
+        <p:txBody>
+          <a:bodyPr wrap="square" lIns="0" tIns="0" rIns="0" bIns="0" rtlCol="0" anchor="t"/>
+          <a:lstStyle/>
+          <a:p>
+            <a:pPr indent="0" marL="0">
+              <a:buNone/>
+            </a:pPr>
+            <a:r>
+              <a:rPr lang="en-US" sz="1100" dirty="0">
+                <a:solidFill>
+                  <a:srgbClr val="5A7A85"/>
+                </a:solidFill>
+                <a:latin typeface="Calibri" pitchFamily="34" charset="0"/>
+                <a:ea typeface="Calibri" pitchFamily="34" charset="-122"/>
+                <a:cs typeface="Calibri" pitchFamily="34" charset="-120"/>
+              </a:rPr>
+              <a:t>Unit tests — minimal objects. Creates one ValuesCat and one ValuesQuant with minimal parents, verifies back_populate resolves all FKs.</a:t>
+            </a:r>
+            <a:endParaRPr lang="en-US" sz="1100" dirty="0"/>
+          </a:p>
+        </p:txBody>
+      </p:sp>
+      <p:sp>
+        <p:nvSpPr>
+          <p:cNvPr id="8" name="Shape 6"/>
+          <p:cNvSpPr/>
+          <p:nvPr/>
+        </p:nvSpPr>
+        <p:spPr>
+          <a:xfrm>
+            <a:off x="3246120" y="1005840"/>
+            <a:ext cx="2697480" cy="2743200"/>
+          </a:xfrm>
+          <a:prstGeom prst="rect">
+            <a:avLst/>
+          </a:prstGeom>
+          <a:solidFill>
+            <a:srgbClr val="FFFFFF"/>
+          </a:solidFill>
+          <a:ln/>
+          <a:effectLst>
+            <a:outerShdw sx="100000" sy="100000" kx="0" ky="0" algn="bl" rotWithShape="0" blurRad="76200" dist="25400" dir="8100000">
+              <a:srgbClr val="000000">
+                <a:alpha val="12000"/>
+              </a:srgbClr>
+            </a:outerShdw>
+          </a:effectLst>
+        </p:spPr>
+      </p:sp>
+      <p:sp>
+        <p:nvSpPr>
+          <p:cNvPr id="9" name="Shape 7"/>
+          <p:cNvSpPr/>
+          <p:nvPr/>
+        </p:nvSpPr>
+        <p:spPr>
+          <a:xfrm>
+            <a:off x="3246120" y="1005840"/>
+            <a:ext cx="2697480" cy="54864"/>
+          </a:xfrm>
+          <a:prstGeom prst="rect">
+            <a:avLst/>
+          </a:prstGeom>
+          <a:solidFill>
+            <a:srgbClr val="1BA3B4"/>
+          </a:solidFill>
+          <a:ln/>
+        </p:spPr>
+      </p:sp>
+      <p:sp>
+        <p:nvSpPr>
+          <p:cNvPr id="10" name="Text 8"/>
+          <p:cNvSpPr/>
+          <p:nvPr/>
+        </p:nvSpPr>
+        <p:spPr>
+          <a:xfrm>
+            <a:off x="3383280" y="1188720"/>
+            <a:ext cx="2423160" cy="594360"/>
+          </a:xfrm>
+          <a:prstGeom prst="rect">
+            <a:avLst/>
+          </a:prstGeom>
+          <a:noFill/>
+          <a:ln/>
+        </p:spPr>
+        <p:txBody>
+          <a:bodyPr wrap="square" lIns="0" tIns="0" rIns="0" bIns="0" rtlCol="0" anchor="t"/>
+          <a:lstStyle/>
+          <a:p>
+            <a:pPr indent="0" marL="0">
+              <a:buNone/>
+            </a:pPr>
+            <a:r>
+              <a:rPr lang="en-US" sz="1200" b="1" dirty="0">
+                <a:solidFill>
+                  <a:srgbClr val="0B3D4C"/>
+                </a:solidFill>
+                <a:latin typeface="Consolas" pitchFamily="34" charset="0"/>
+                <a:ea typeface="Consolas" pitchFamily="34" charset="-122"/>
+                <a:cs typeface="Consolas" pitchFamily="34" charset="-120"/>
+              </a:rPr>
+              <a:t>test_back_populate</a:t>
+            </a:r>
+            <a:endParaRPr lang="en-US" sz="1200" dirty="0"/>
+          </a:p>
+          <a:p>
+            <a:pPr indent="0" marL="0">
+              <a:buNone/>
+            </a:pPr>
+            <a:r>
+              <a:rPr lang="en-US" sz="1200" b="1" dirty="0">
+                <a:solidFill>
+                  <a:srgbClr val="0B3D4C"/>
+                </a:solidFill>
+                <a:latin typeface="Consolas" pitchFamily="34" charset="0"/>
+                <a:ea typeface="Consolas" pitchFamily="34" charset="-122"/>
+                <a:cs typeface="Consolas" pitchFamily="34" charset="-120"/>
+              </a:rPr>
+              <a:t>_tables.py</a:t>
+            </a:r>
+            <a:endParaRPr lang="en-US" sz="1200" dirty="0"/>
+          </a:p>
+        </p:txBody>
+      </p:sp>
+      <p:sp>
+        <p:nvSpPr>
+          <p:cNvPr id="11" name="Text 9"/>
+          <p:cNvSpPr/>
+          <p:nvPr/>
+        </p:nvSpPr>
+        <p:spPr>
+          <a:xfrm>
+            <a:off x="3383280" y="1920240"/>
+            <a:ext cx="2423160" cy="1645920"/>
+          </a:xfrm>
+          <a:prstGeom prst="rect">
+            <a:avLst/>
+          </a:prstGeom>
+          <a:noFill/>
+          <a:ln/>
+        </p:spPr>
+        <p:txBody>
+          <a:bodyPr wrap="square" lIns="0" tIns="0" rIns="0" bIns="0" rtlCol="0" anchor="t"/>
+          <a:lstStyle/>
+          <a:p>
+            <a:pPr indent="0" marL="0">
+              <a:buNone/>
+            </a:pPr>
+            <a:r>
+              <a:rPr lang="en-US" sz="1100" dirty="0">
+                <a:solidFill>
+                  <a:srgbClr val="5A7A85"/>
+                </a:solidFill>
+                <a:latin typeface="Calibri" pitchFamily="34" charset="0"/>
+                <a:ea typeface="Calibri" pitchFamily="34" charset="-122"/>
+                <a:cs typeface="Calibri" pitchFamily="34" charset="-120"/>
+              </a:rPr>
+              <a:t>Integration tests — full hierarchy. Builds all 4 tiers (root → leaf), tests missing-parent creation, documents population order.</a:t>
+            </a:r>
+            <a:endParaRPr lang="en-US" sz="1100" dirty="0"/>
+          </a:p>
+        </p:txBody>
+      </p:sp>
+      <p:sp>
+        <p:nvSpPr>
+          <p:cNvPr id="12" name="Shape 10"/>
+          <p:cNvSpPr/>
+          <p:nvPr/>
+        </p:nvSpPr>
+        <p:spPr>
+          <a:xfrm>
+            <a:off x="6126480" y="1005840"/>
+            <a:ext cx="2697480" cy="2743200"/>
+          </a:xfrm>
+          <a:prstGeom prst="rect">
+            <a:avLst/>
+          </a:prstGeom>
+          <a:solidFill>
+            <a:srgbClr val="FFFFFF"/>
+          </a:solidFill>
+          <a:ln/>
+          <a:effectLst>
+            <a:outerShdw sx="100000" sy="100000" kx="0" ky="0" algn="bl" rotWithShape="0" blurRad="76200" dist="25400" dir="8100000">
+              <a:srgbClr val="000000">
+                <a:alpha val="12000"/>
+              </a:srgbClr>
+            </a:outerShdw>
+          </a:effectLst>
+        </p:spPr>
+      </p:sp>
+      <p:sp>
+        <p:nvSpPr>
+          <p:cNvPr id="13" name="Shape 11"/>
+          <p:cNvSpPr/>
+          <p:nvPr/>
+        </p:nvSpPr>
+        <p:spPr>
+          <a:xfrm>
+            <a:off x="6126480" y="1005840"/>
+            <a:ext cx="2697480" cy="54864"/>
+          </a:xfrm>
+          <a:prstGeom prst="rect">
+            <a:avLst/>
+          </a:prstGeom>
+          <a:solidFill>
+            <a:srgbClr val="F4A940"/>
+          </a:solidFill>
+          <a:ln/>
+        </p:spPr>
+      </p:sp>
+      <p:sp>
+        <p:nvSpPr>
+          <p:cNvPr id="14" name="Text 12"/>
+          <p:cNvSpPr/>
+          <p:nvPr/>
+        </p:nvSpPr>
+        <p:spPr>
+          <a:xfrm>
+            <a:off x="6263640" y="1188720"/>
+            <a:ext cx="2423160" cy="594360"/>
+          </a:xfrm>
+          <a:prstGeom prst="rect">
+            <a:avLst/>
+          </a:prstGeom>
+          <a:noFill/>
+          <a:ln/>
+        </p:spPr>
+        <p:txBody>
+          <a:bodyPr wrap="square" lIns="0" tIns="0" rIns="0" bIns="0" rtlCol="0" anchor="t"/>
+          <a:lstStyle/>
+          <a:p>
+            <a:pPr indent="0" marL="0">
+              <a:buNone/>
+            </a:pPr>
+            <a:r>
+              <a:rPr lang="en-US" sz="1200" b="1" dirty="0">
+                <a:solidFill>
+                  <a:srgbClr val="0B3D4C"/>
+                </a:solidFill>
+                <a:latin typeface="Consolas" pitchFamily="34" charset="0"/>
+                <a:ea typeface="Consolas" pitchFamily="34" charset="-122"/>
+                <a:cs typeface="Consolas" pitchFamily="34" charset="-120"/>
+              </a:rPr>
+              <a:t>test_f006_database</a:t>
+            </a:r>
+            <a:endParaRPr lang="en-US" sz="1200" dirty="0"/>
+          </a:p>
+          <a:p>
+            <a:pPr indent="0" marL="0">
+              <a:buNone/>
+            </a:pPr>
+            <a:r>
+              <a:rPr lang="en-US" sz="1200" b="1" dirty="0">
+                <a:solidFill>
+                  <a:srgbClr val="0B3D4C"/>
+                </a:solidFill>
+                <a:latin typeface="Consolas" pitchFamily="34" charset="0"/>
+                <a:ea typeface="Consolas" pitchFamily="34" charset="-122"/>
+                <a:cs typeface="Consolas" pitchFamily="34" charset="-120"/>
+              </a:rPr>
+              <a:t>_comparison.py</a:t>
+            </a:r>
+            <a:endParaRPr lang="en-US" sz="1200" dirty="0"/>
+          </a:p>
+        </p:txBody>
+      </p:sp>
+      <p:sp>
+        <p:nvSpPr>
+          <p:cNvPr id="15" name="Text 13"/>
+          <p:cNvSpPr/>
+          <p:nvPr/>
+        </p:nvSpPr>
+        <p:spPr>
+          <a:xfrm>
+            <a:off x="6263640" y="1920240"/>
+            <a:ext cx="2423160" cy="1645920"/>
+          </a:xfrm>
+          <a:prstGeom prst="rect">
+            <a:avLst/>
+          </a:prstGeom>
+          <a:noFill/>
+          <a:ln/>
+        </p:spPr>
+        <p:txBody>
+          <a:bodyPr wrap="square" lIns="0" tIns="0" rIns="0" bIns="0" rtlCol="0" anchor="t"/>
+          <a:lstStyle/>
+          <a:p>
+            <a:pPr indent="0" marL="0">
+              <a:buNone/>
+            </a:pPr>
+            <a:r>
+              <a:rPr lang="en-US" sz="1100" dirty="0">
+                <a:solidFill>
+                  <a:srgbClr val="5A7A85"/>
+                </a:solidFill>
+                <a:latin typeface="Calibri" pitchFamily="34" charset="0"/>
+                <a:ea typeface="Calibri" pitchFamily="34" charset="-122"/>
+                <a:cs typeface="Calibri" pitchFamily="34" charset="-120"/>
+              </a:rPr>
+              <a:t>End-to-end comparison. Runs both ingest.py and f006_ingest.py, compares row counts + sample data across 10 tables.</a:t>
+            </a:r>
+            <a:endParaRPr lang="en-US" sz="1100" dirty="0"/>
+          </a:p>
+        </p:txBody>
+      </p:sp>
+      <p:sp>
+        <p:nvSpPr>
+          <p:cNvPr id="16" name="Shape 14"/>
+          <p:cNvSpPr/>
+          <p:nvPr/>
+        </p:nvSpPr>
+        <p:spPr>
+          <a:xfrm>
+            <a:off x="365760" y="3977640"/>
+            <a:ext cx="8412480" cy="960120"/>
+          </a:xfrm>
+          <a:prstGeom prst="rect">
+            <a:avLst/>
+          </a:prstGeom>
+          <a:solidFill>
+            <a:srgbClr val="F7F3ED"/>
+          </a:solidFill>
+          <a:ln/>
+          <a:effectLst>
+            <a:outerShdw sx="100000" sy="100000" kx="0" ky="0" algn="bl" rotWithShape="0" blurRad="76200" dist="25400" dir="8100000">
+              <a:srgbClr val="000000">
+                <a:alpha val="12000"/>
+              </a:srgbClr>
+            </a:outerShdw>
+          </a:effectLst>
+        </p:spPr>
+      </p:sp>
+      <p:sp>
+        <p:nvSpPr>
+          <p:cNvPr id="17" name="Text 15"/>
+          <p:cNvSpPr/>
+          <p:nvPr/>
+        </p:nvSpPr>
+        <p:spPr>
+          <a:xfrm>
+            <a:off x="548640" y="4023360"/>
+            <a:ext cx="2286000" cy="320040"/>
+          </a:xfrm>
+          <a:prstGeom prst="rect">
+            <a:avLst/>
+          </a:prstGeom>
+          <a:noFill/>
+          <a:ln/>
+        </p:spPr>
+        <p:txBody>
+          <a:bodyPr wrap="square" lIns="0" tIns="0" rIns="0" bIns="0" rtlCol="0" anchor="ctr"/>
+          <a:lstStyle/>
+          <a:p>
+            <a:pPr indent="0" marL="0">
+              <a:buNone/>
+            </a:pPr>
+            <a:r>
+              <a:rPr lang="en-US" sz="1300" b="1" dirty="0">
+                <a:solidFill>
+                  <a:srgbClr val="0B3D4C"/>
+                </a:solidFill>
+                <a:latin typeface="Georgia" pitchFamily="34" charset="0"/>
+                <a:ea typeface="Georgia" pitchFamily="34" charset="-122"/>
+                <a:cs typeface="Georgia" pitchFamily="34" charset="-120"/>
+              </a:rPr>
+              <a:t>Comparison Workflow</a:t>
+            </a:r>
+            <a:endParaRPr lang="en-US" sz="1300" dirty="0"/>
+          </a:p>
+        </p:txBody>
+      </p:sp>
+      <p:sp>
+        <p:nvSpPr>
+          <p:cNvPr id="18" name="Shape 16"/>
+          <p:cNvSpPr/>
+          <p:nvPr/>
+        </p:nvSpPr>
+        <p:spPr>
+          <a:xfrm>
+            <a:off x="548640" y="4434840"/>
+            <a:ext cx="1188720" cy="365760"/>
+          </a:xfrm>
+          <a:prstGeom prst="rect">
+            <a:avLst/>
+          </a:prstGeom>
+          <a:solidFill>
+            <a:srgbClr val="127C8B"/>
+          </a:solidFill>
+          <a:ln/>
+        </p:spPr>
+      </p:sp>
+      <p:sp>
+        <p:nvSpPr>
+          <p:cNvPr id="19" name="Text 17"/>
+          <p:cNvSpPr/>
+          <p:nvPr/>
+        </p:nvSpPr>
+        <p:spPr>
+          <a:xfrm>
+            <a:off x="548640" y="4434840"/>
+            <a:ext cx="1188720" cy="365760"/>
+          </a:xfrm>
+          <a:prstGeom prst="rect">
+            <a:avLst/>
+          </a:prstGeom>
+          <a:noFill/>
+          <a:ln/>
+        </p:spPr>
+        <p:txBody>
+          <a:bodyPr wrap="square" lIns="0" tIns="0" rIns="0" bIns="0" rtlCol="0" anchor="ctr"/>
+          <a:lstStyle/>
+          <a:p>
+            <a:pPr algn="ctr" indent="0" marL="0">
+              <a:buNone/>
+            </a:pPr>
+            <a:r>
+              <a:rPr lang="en-US" sz="1000" dirty="0">
+                <a:solidFill>
+                  <a:srgbClr val="FFFFFF"/>
+                </a:solidFill>
+                <a:latin typeface="Calibri" pitchFamily="34" charset="0"/>
+                <a:ea typeface="Calibri" pitchFamily="34" charset="-122"/>
+                <a:cs typeface="Calibri" pitchFamily="34" charset="-120"/>
+              </a:rPr>
+              <a:t>Clear DB</a:t>
+            </a:r>
+            <a:endParaRPr lang="en-US" sz="1000" dirty="0"/>
+          </a:p>
+        </p:txBody>
+      </p:sp>
+      <p:sp>
+        <p:nvSpPr>
+          <p:cNvPr id="20" name="Text 18"/>
+          <p:cNvSpPr/>
+          <p:nvPr/>
+        </p:nvSpPr>
+        <p:spPr>
+          <a:xfrm>
+            <a:off x="1691640" y="4434840"/>
+            <a:ext cx="320040" cy="365760"/>
+          </a:xfrm>
+          <a:prstGeom prst="rect">
+            <a:avLst/>
+          </a:prstGeom>
+          <a:noFill/>
+          <a:ln/>
+        </p:spPr>
+        <p:txBody>
+          <a:bodyPr wrap="square" lIns="0" tIns="0" rIns="0" bIns="0" rtlCol="0" anchor="ctr"/>
+          <a:lstStyle/>
+          <a:p>
+            <a:pPr algn="ctr" indent="0" marL="0">
+              <a:buNone/>
+            </a:pPr>
+            <a:r>
+              <a:rPr lang="en-US" sz="1600" dirty="0">
+                <a:solidFill>
+                  <a:srgbClr val="5A7A85"/>
+                </a:solidFill>
+                <a:latin typeface="Calibri" pitchFamily="34" charset="0"/>
+                <a:ea typeface="Calibri" pitchFamily="34" charset="-122"/>
+                <a:cs typeface="Calibri" pitchFamily="34" charset="-120"/>
+              </a:rPr>
+              <a:t>→</a:t>
+            </a:r>
+            <a:endParaRPr lang="en-US" sz="1600" dirty="0"/>
+          </a:p>
+        </p:txBody>
+      </p:sp>
+      <p:sp>
+        <p:nvSpPr>
+          <p:cNvPr id="21" name="Shape 19"/>
+          <p:cNvSpPr/>
+          <p:nvPr/>
+        </p:nvSpPr>
+        <p:spPr>
+          <a:xfrm>
+            <a:off x="1920240" y="4434840"/>
+            <a:ext cx="1188720" cy="365760"/>
+          </a:xfrm>
+          <a:prstGeom prst="rect">
+            <a:avLst/>
+          </a:prstGeom>
+          <a:solidFill>
+            <a:srgbClr val="127C8B"/>
+          </a:solidFill>
+          <a:ln/>
+        </p:spPr>
+      </p:sp>
+      <p:sp>
+        <p:nvSpPr>
+          <p:cNvPr id="22" name="Text 20"/>
+          <p:cNvSpPr/>
+          <p:nvPr/>
+        </p:nvSpPr>
+        <p:spPr>
+          <a:xfrm>
+            <a:off x="1920240" y="4434840"/>
+            <a:ext cx="1188720" cy="365760"/>
+          </a:xfrm>
+          <a:prstGeom prst="rect">
+            <a:avLst/>
+          </a:prstGeom>
+          <a:noFill/>
+          <a:ln/>
+        </p:spPr>
+        <p:txBody>
+          <a:bodyPr wrap="square" lIns="0" tIns="0" rIns="0" bIns="0" rtlCol="0" anchor="ctr"/>
+          <a:lstStyle/>
+          <a:p>
+            <a:pPr algn="ctr" indent="0" marL="0">
+              <a:buNone/>
+            </a:pPr>
+            <a:r>
+              <a:rPr lang="en-US" sz="1000" dirty="0">
+                <a:solidFill>
+                  <a:srgbClr val="FFFFFF"/>
+                </a:solidFill>
+                <a:latin typeface="Calibri" pitchFamily="34" charset="0"/>
+                <a:ea typeface="Calibri" pitchFamily="34" charset="-122"/>
+                <a:cs typeface="Calibri" pitchFamily="34" charset="-120"/>
+              </a:rPr>
+              <a:t>Run ingest.py</a:t>
+            </a:r>
+            <a:endParaRPr lang="en-US" sz="1000" dirty="0"/>
+          </a:p>
+        </p:txBody>
+      </p:sp>
+      <p:sp>
+        <p:nvSpPr>
+          <p:cNvPr id="23" name="Text 21"/>
+          <p:cNvSpPr/>
+          <p:nvPr/>
+        </p:nvSpPr>
+        <p:spPr>
+          <a:xfrm>
+            <a:off x="3063240" y="4434840"/>
+            <a:ext cx="320040" cy="365760"/>
+          </a:xfrm>
+          <a:prstGeom prst="rect">
+            <a:avLst/>
+          </a:prstGeom>
+          <a:noFill/>
+          <a:ln/>
+        </p:spPr>
+        <p:txBody>
+          <a:bodyPr wrap="square" lIns="0" tIns="0" rIns="0" bIns="0" rtlCol="0" anchor="ctr"/>
+          <a:lstStyle/>
+          <a:p>
+            <a:pPr algn="ctr" indent="0" marL="0">
+              <a:buNone/>
+            </a:pPr>
+            <a:r>
+              <a:rPr lang="en-US" sz="1600" dirty="0">
+                <a:solidFill>
+                  <a:srgbClr val="5A7A85"/>
+                </a:solidFill>
+                <a:latin typeface="Calibri" pitchFamily="34" charset="0"/>
+                <a:ea typeface="Calibri" pitchFamily="34" charset="-122"/>
+                <a:cs typeface="Calibri" pitchFamily="34" charset="-120"/>
+              </a:rPr>
+              <a:t>→</a:t>
+            </a:r>
+            <a:endParaRPr lang="en-US" sz="1600" dirty="0"/>
+          </a:p>
+        </p:txBody>
+      </p:sp>
+      <p:sp>
+        <p:nvSpPr>
+          <p:cNvPr id="24" name="Shape 22"/>
+          <p:cNvSpPr/>
+          <p:nvPr/>
+        </p:nvSpPr>
+        <p:spPr>
+          <a:xfrm>
+            <a:off x="3383280" y="4434840"/>
+            <a:ext cx="1188720" cy="365760"/>
+          </a:xfrm>
+          <a:prstGeom prst="rect">
+            <a:avLst/>
+          </a:prstGeom>
+          <a:solidFill>
+            <a:srgbClr val="127C8B"/>
+          </a:solidFill>
+          <a:ln/>
+        </p:spPr>
+      </p:sp>
+      <p:sp>
+        <p:nvSpPr>
+          <p:cNvPr id="25" name="Text 23"/>
+          <p:cNvSpPr/>
+          <p:nvPr/>
+        </p:nvSpPr>
+        <p:spPr>
+          <a:xfrm>
+            <a:off x="3383280" y="4434840"/>
+            <a:ext cx="1188720" cy="365760"/>
+          </a:xfrm>
+          <a:prstGeom prst="rect">
+            <a:avLst/>
+          </a:prstGeom>
+          <a:noFill/>
+          <a:ln/>
+        </p:spPr>
+        <p:txBody>
+          <a:bodyPr wrap="square" lIns="0" tIns="0" rIns="0" bIns="0" rtlCol="0" anchor="ctr"/>
+          <a:lstStyle/>
+          <a:p>
+            <a:pPr algn="ctr" indent="0" marL="0">
+              <a:buNone/>
+            </a:pPr>
+            <a:r>
+              <a:rPr lang="en-US" sz="1000" dirty="0">
+                <a:solidFill>
+                  <a:srgbClr val="FFFFFF"/>
+                </a:solidFill>
+                <a:latin typeface="Calibri" pitchFamily="34" charset="0"/>
+                <a:ea typeface="Calibri" pitchFamily="34" charset="-122"/>
+                <a:cs typeface="Calibri" pitchFamily="34" charset="-120"/>
+              </a:rPr>
+              <a:t>Snapshot</a:t>
+            </a:r>
+            <a:endParaRPr lang="en-US" sz="1000" dirty="0"/>
+          </a:p>
+        </p:txBody>
+      </p:sp>
+      <p:sp>
+        <p:nvSpPr>
+          <p:cNvPr id="26" name="Text 24"/>
+          <p:cNvSpPr/>
+          <p:nvPr/>
+        </p:nvSpPr>
+        <p:spPr>
+          <a:xfrm>
+            <a:off x="4526280" y="4434840"/>
+            <a:ext cx="320040" cy="365760"/>
+          </a:xfrm>
+          <a:prstGeom prst="rect">
+            <a:avLst/>
+          </a:prstGeom>
+          <a:noFill/>
+          <a:ln/>
+        </p:spPr>
+        <p:txBody>
+          <a:bodyPr wrap="square" lIns="0" tIns="0" rIns="0" bIns="0" rtlCol="0" anchor="ctr"/>
+          <a:lstStyle/>
+          <a:p>
+            <a:pPr algn="ctr" indent="0" marL="0">
+              <a:buNone/>
+            </a:pPr>
+            <a:r>
+              <a:rPr lang="en-US" sz="1600" dirty="0">
+                <a:solidFill>
+                  <a:srgbClr val="5A7A85"/>
+                </a:solidFill>
+                <a:latin typeface="Calibri" pitchFamily="34" charset="0"/>
+                <a:ea typeface="Calibri" pitchFamily="34" charset="-122"/>
+                <a:cs typeface="Calibri" pitchFamily="34" charset="-120"/>
+              </a:rPr>
+              <a:t>→</a:t>
+            </a:r>
+            <a:endParaRPr lang="en-US" sz="1600" dirty="0"/>
+          </a:p>
+        </p:txBody>
+      </p:sp>
+      <p:sp>
+        <p:nvSpPr>
+          <p:cNvPr id="27" name="Shape 25"/>
+          <p:cNvSpPr/>
+          <p:nvPr/>
+        </p:nvSpPr>
+        <p:spPr>
+          <a:xfrm>
+            <a:off x="4572000" y="4434840"/>
+            <a:ext cx="1188720" cy="365760"/>
+          </a:xfrm>
+          <a:prstGeom prst="rect">
+            <a:avLst/>
+          </a:prstGeom>
+          <a:solidFill>
+            <a:srgbClr val="F4A940"/>
+          </a:solidFill>
+          <a:ln/>
+        </p:spPr>
+      </p:sp>
+      <p:sp>
+        <p:nvSpPr>
+          <p:cNvPr id="28" name="Text 26"/>
+          <p:cNvSpPr/>
+          <p:nvPr/>
+        </p:nvSpPr>
+        <p:spPr>
+          <a:xfrm>
+            <a:off x="4572000" y="4434840"/>
+            <a:ext cx="1188720" cy="365760"/>
+          </a:xfrm>
+          <a:prstGeom prst="rect">
+            <a:avLst/>
+          </a:prstGeom>
+          <a:noFill/>
+          <a:ln/>
+        </p:spPr>
+        <p:txBody>
+          <a:bodyPr wrap="square" lIns="0" tIns="0" rIns="0" bIns="0" rtlCol="0" anchor="ctr"/>
+          <a:lstStyle/>
+          <a:p>
+            <a:pPr algn="ctr" indent="0" marL="0">
+              <a:buNone/>
+            </a:pPr>
+            <a:r>
+              <a:rPr lang="en-US" sz="1000" dirty="0">
+                <a:solidFill>
+                  <a:srgbClr val="FFFFFF"/>
+                </a:solidFill>
+                <a:latin typeface="Calibri" pitchFamily="34" charset="0"/>
+                <a:ea typeface="Calibri" pitchFamily="34" charset="-122"/>
+                <a:cs typeface="Calibri" pitchFamily="34" charset="-120"/>
+              </a:rPr>
+              <a:t>Clear DB</a:t>
+            </a:r>
+            <a:endParaRPr lang="en-US" sz="1000" dirty="0"/>
+          </a:p>
+        </p:txBody>
+      </p:sp>
+      <p:sp>
+        <p:nvSpPr>
+          <p:cNvPr id="29" name="Text 27"/>
+          <p:cNvSpPr/>
+          <p:nvPr/>
+        </p:nvSpPr>
+        <p:spPr>
+          <a:xfrm>
+            <a:off x="5715000" y="4434840"/>
+            <a:ext cx="320040" cy="365760"/>
+          </a:xfrm>
+          <a:prstGeom prst="rect">
+            <a:avLst/>
+          </a:prstGeom>
+          <a:noFill/>
+          <a:ln/>
+        </p:spPr>
+        <p:txBody>
+          <a:bodyPr wrap="square" lIns="0" tIns="0" rIns="0" bIns="0" rtlCol="0" anchor="ctr"/>
+          <a:lstStyle/>
+          <a:p>
+            <a:pPr algn="ctr" indent="0" marL="0">
+              <a:buNone/>
+            </a:pPr>
+            <a:r>
+              <a:rPr lang="en-US" sz="1600" dirty="0">
+                <a:solidFill>
+                  <a:srgbClr val="5A7A85"/>
+                </a:solidFill>
+                <a:latin typeface="Calibri" pitchFamily="34" charset="0"/>
+                <a:ea typeface="Calibri" pitchFamily="34" charset="-122"/>
+                <a:cs typeface="Calibri" pitchFamily="34" charset="-120"/>
+              </a:rPr>
+              <a:t>→</a:t>
+            </a:r>
+            <a:endParaRPr lang="en-US" sz="1600" dirty="0"/>
+          </a:p>
+        </p:txBody>
+      </p:sp>
+      <p:sp>
+        <p:nvSpPr>
+          <p:cNvPr id="30" name="Shape 28"/>
+          <p:cNvSpPr/>
+          <p:nvPr/>
+        </p:nvSpPr>
+        <p:spPr>
+          <a:xfrm>
+            <a:off x="5943600" y="4434840"/>
+            <a:ext cx="1188720" cy="365760"/>
+          </a:xfrm>
+          <a:prstGeom prst="rect">
+            <a:avLst/>
+          </a:prstGeom>
+          <a:solidFill>
+            <a:srgbClr val="F4A940"/>
+          </a:solidFill>
+          <a:ln/>
+        </p:spPr>
+      </p:sp>
+      <p:sp>
+        <p:nvSpPr>
+          <p:cNvPr id="31" name="Text 29"/>
+          <p:cNvSpPr/>
+          <p:nvPr/>
+        </p:nvSpPr>
+        <p:spPr>
+          <a:xfrm>
+            <a:off x="5943600" y="4434840"/>
+            <a:ext cx="1188720" cy="365760"/>
+          </a:xfrm>
+          <a:prstGeom prst="rect">
+            <a:avLst/>
+          </a:prstGeom>
+          <a:noFill/>
+          <a:ln/>
+        </p:spPr>
+        <p:txBody>
+          <a:bodyPr wrap="square" lIns="0" tIns="0" rIns="0" bIns="0" rtlCol="0" anchor="ctr"/>
+          <a:lstStyle/>
+          <a:p>
+            <a:pPr algn="ctr" indent="0" marL="0">
+              <a:buNone/>
+            </a:pPr>
+            <a:r>
+              <a:rPr lang="en-US" sz="1000" dirty="0">
+                <a:solidFill>
+                  <a:srgbClr val="FFFFFF"/>
+                </a:solidFill>
+                <a:latin typeface="Calibri" pitchFamily="34" charset="0"/>
+                <a:ea typeface="Calibri" pitchFamily="34" charset="-122"/>
+                <a:cs typeface="Calibri" pitchFamily="34" charset="-120"/>
+              </a:rPr>
+              <a:t>Run f006_ingest</a:t>
+            </a:r>
+            <a:endParaRPr lang="en-US" sz="1000" dirty="0"/>
+          </a:p>
+        </p:txBody>
+      </p:sp>
+      <p:sp>
+        <p:nvSpPr>
+          <p:cNvPr id="32" name="Text 30"/>
+          <p:cNvSpPr/>
+          <p:nvPr/>
+        </p:nvSpPr>
+        <p:spPr>
+          <a:xfrm>
+            <a:off x="7086600" y="4434840"/>
+            <a:ext cx="320040" cy="365760"/>
+          </a:xfrm>
+          <a:prstGeom prst="rect">
+            <a:avLst/>
+          </a:prstGeom>
+          <a:noFill/>
+          <a:ln/>
+        </p:spPr>
+        <p:txBody>
+          <a:bodyPr wrap="square" lIns="0" tIns="0" rIns="0" bIns="0" rtlCol="0" anchor="ctr"/>
+          <a:lstStyle/>
+          <a:p>
+            <a:pPr algn="ctr" indent="0" marL="0">
+              <a:buNone/>
+            </a:pPr>
+            <a:r>
+              <a:rPr lang="en-US" sz="1600" dirty="0">
+                <a:solidFill>
+                  <a:srgbClr val="5A7A85"/>
+                </a:solidFill>
+                <a:latin typeface="Calibri" pitchFamily="34" charset="0"/>
+                <a:ea typeface="Calibri" pitchFamily="34" charset="-122"/>
+                <a:cs typeface="Calibri" pitchFamily="34" charset="-120"/>
+              </a:rPr>
+              <a:t>→</a:t>
+            </a:r>
+            <a:endParaRPr lang="en-US" sz="1600" dirty="0"/>
+          </a:p>
+        </p:txBody>
+      </p:sp>
+      <p:sp>
+        <p:nvSpPr>
+          <p:cNvPr id="33" name="Shape 31"/>
+          <p:cNvSpPr/>
+          <p:nvPr/>
+        </p:nvSpPr>
+        <p:spPr>
+          <a:xfrm>
+            <a:off x="7498080" y="4434840"/>
+            <a:ext cx="1188720" cy="365760"/>
+          </a:xfrm>
+          <a:prstGeom prst="rect">
+            <a:avLst/>
+          </a:prstGeom>
+          <a:solidFill>
+            <a:srgbClr val="F4A940"/>
+          </a:solidFill>
+          <a:ln/>
+        </p:spPr>
+      </p:sp>
+      <p:sp>
+        <p:nvSpPr>
+          <p:cNvPr id="34" name="Text 32"/>
+          <p:cNvSpPr/>
+          <p:nvPr/>
+        </p:nvSpPr>
+        <p:spPr>
+          <a:xfrm>
+            <a:off x="7498080" y="4434840"/>
+            <a:ext cx="1188720" cy="365760"/>
+          </a:xfrm>
+          <a:prstGeom prst="rect">
+            <a:avLst/>
+          </a:prstGeom>
+          <a:noFill/>
+          <a:ln/>
+        </p:spPr>
+        <p:txBody>
+          <a:bodyPr wrap="square" lIns="0" tIns="0" rIns="0" bIns="0" rtlCol="0" anchor="ctr"/>
+          <a:lstStyle/>
+          <a:p>
+            <a:pPr algn="ctr" indent="0" marL="0">
+              <a:buNone/>
+            </a:pPr>
+            <a:r>
+              <a:rPr lang="en-US" sz="1000" dirty="0">
+                <a:solidFill>
+                  <a:srgbClr val="FFFFFF"/>
+                </a:solidFill>
+                <a:latin typeface="Calibri" pitchFamily="34" charset="0"/>
+                <a:ea typeface="Calibri" pitchFamily="34" charset="-122"/>
+                <a:cs typeface="Calibri" pitchFamily="34" charset="-120"/>
+              </a:rPr>
+              <a:t>Snapshot</a:t>
+            </a:r>
+            <a:endParaRPr lang="en-US" sz="1000" dirty="0"/>
+          </a:p>
+        </p:txBody>
+      </p:sp>
+      <p:sp>
+        <p:nvSpPr>
+          <p:cNvPr id="35" name="Text 33"/>
+          <p:cNvSpPr/>
+          <p:nvPr/>
+        </p:nvSpPr>
+        <p:spPr>
+          <a:xfrm>
+            <a:off x="2286000" y="4023360"/>
+            <a:ext cx="5029200" cy="320040"/>
+          </a:xfrm>
+          <a:prstGeom prst="rect">
+            <a:avLst/>
+          </a:prstGeom>
+          <a:noFill/>
+          <a:ln/>
+        </p:spPr>
+        <p:txBody>
+          <a:bodyPr wrap="square" lIns="0" tIns="0" rIns="0" bIns="0" rtlCol="0" anchor="ctr"/>
+          <a:lstStyle/>
+          <a:p>
+            <a:pPr algn="r" indent="0" marL="0">
+              <a:buNone/>
+            </a:pPr>
+            <a:r>
+              <a:rPr lang="en-US" sz="1100" dirty="0">
+                <a:solidFill>
+                  <a:srgbClr val="5A7A85"/>
+                </a:solidFill>
+                <a:latin typeface="Calibri" pitchFamily="34" charset="0"/>
+                <a:ea typeface="Calibri" pitchFamily="34" charset="-122"/>
+                <a:cs typeface="Calibri" pitchFamily="34" charset="-120"/>
+              </a:rPr>
+              <a:t>=  compare row counts + sample data  =</a:t>
+            </a:r>
+            <a:endParaRPr lang="en-US" sz="1100" dirty="0"/>
+          </a:p>
+        </p:txBody>
+      </p:sp>
+    </p:spTree>
+  </p:cSld>
+  <p:clrMapOvr>
+    <a:masterClrMapping/>
+  </p:clrMapOvr>
+</p:sld>
+</file>
+
+<file path=ppt/slides/slide12.xml><?xml version="1.0" encoding="utf-8"?>
+<p:sld xmlns:a="http://schemas.openxmlformats.org/drawingml/2006/main" xmlns:r="http://schemas.openxmlformats.org/officeDocument/2006/relationships" xmlns:p="http://schemas.openxmlformats.org/presentationml/2006/main">
+  <p:cSld name="Slide 12">
+    <p:bg>
+      <p:bgPr>
+        <a:solidFill>
+          <a:srgbClr val="F7F3ED"/>
+        </a:solidFill>
+      </p:bgPr>
+    </p:bg>
+    <p:spTree>
+      <p:nvGrpSpPr>
+        <p:cNvPr id="1" name=""/>
+        <p:cNvGrpSpPr/>
+        <p:nvPr/>
+      </p:nvGrpSpPr>
+      <p:grpSpPr>
+        <a:xfrm>
+          <a:off x="0" y="0"/>
+          <a:ext cx="0" cy="0"/>
+          <a:chOff x="0" y="0"/>
+          <a:chExt cx="0" cy="0"/>
+        </a:xfrm>
+      </p:grpSpPr>
+      <p:sp>
+        <p:nvSpPr>
+          <p:cNvPr id="2" name="Shape 0"/>
+          <p:cNvSpPr/>
+          <p:nvPr/>
+        </p:nvSpPr>
+        <p:spPr>
+          <a:xfrm>
+            <a:off x="0" y="0"/>
+            <a:ext cx="9144000" cy="54864"/>
+          </a:xfrm>
+          <a:prstGeom prst="rect">
+            <a:avLst/>
+          </a:prstGeom>
+          <a:solidFill>
+            <a:srgbClr val="F4A940"/>
+          </a:solidFill>
+          <a:ln/>
+        </p:spPr>
+      </p:sp>
+      <p:sp>
+        <p:nvSpPr>
+          <p:cNvPr id="3" name="Text 1"/>
+          <p:cNvSpPr/>
+          <p:nvPr/>
+        </p:nvSpPr>
+        <p:spPr>
+          <a:xfrm>
+            <a:off x="548640" y="320040"/>
+            <a:ext cx="8229600" cy="548640"/>
+          </a:xfrm>
+          <a:prstGeom prst="rect">
+            <a:avLst/>
+          </a:prstGeom>
+          <a:noFill/>
+          <a:ln/>
+        </p:spPr>
+        <p:txBody>
+          <a:bodyPr wrap="square" lIns="0" tIns="0" rIns="0" bIns="0" rtlCol="0" anchor="ctr"/>
+          <a:lstStyle/>
+          <a:p>
+            <a:pPr indent="0" marL="0">
+              <a:buNone/>
+            </a:pPr>
+            <a:r>
+              <a:rPr lang="en-US" sz="3600" b="1" dirty="0">
+                <a:solidFill>
+                  <a:srgbClr val="0B3D4C"/>
+                </a:solidFill>
+                <a:latin typeface="Georgia" pitchFamily="34" charset="0"/>
+                <a:ea typeface="Georgia" pitchFamily="34" charset="-122"/>
+                <a:cs typeface="Georgia" pitchFamily="34" charset="-120"/>
+              </a:rPr>
+              <a:t>F006 Dataset Application</a:t>
+            </a:r>
+            <a:endParaRPr lang="en-US" sz="3600" dirty="0"/>
+          </a:p>
+        </p:txBody>
+      </p:sp>
+      <p:sp>
+        <p:nvSpPr>
+          <p:cNvPr id="4" name="Shape 2"/>
+          <p:cNvSpPr/>
+          <p:nvPr/>
+        </p:nvSpPr>
+        <p:spPr>
+          <a:xfrm>
+            <a:off x="457200" y="1097280"/>
+            <a:ext cx="4023360" cy="3474720"/>
+          </a:xfrm>
+          <a:prstGeom prst="rect">
+            <a:avLst/>
+          </a:prstGeom>
+          <a:solidFill>
+            <a:srgbClr val="FFFFFF"/>
+          </a:solidFill>
+          <a:ln/>
+          <a:effectLst>
+            <a:outerShdw sx="100000" sy="100000" kx="0" ky="0" algn="bl" rotWithShape="0" blurRad="76200" dist="25400" dir="8100000">
+              <a:srgbClr val="000000">
+                <a:alpha val="12000"/>
+              </a:srgbClr>
+            </a:outerShdw>
+          </a:effectLst>
+        </p:spPr>
+      </p:sp>
+      <p:pic>
+        <p:nvPicPr>
+          <p:cNvPr id="5" name="Image 0" descr="preencoded.png">    </p:cNvPr>
+          <p:cNvPicPr>
+            <a:picLocks noChangeAspect="1"/>
+          </p:cNvPicPr>
+          <p:nvPr/>
+        </p:nvPicPr>
+        <p:blipFill>
+          <a:blip r:embed="rId1"/>
+          <a:stretch>
+            <a:fillRect/>
+          </a:stretch>
+        </p:blipFill>
+        <p:spPr>
+          <a:xfrm>
+            <a:off x="731520" y="1280160"/>
+            <a:ext cx="365760" cy="365760"/>
+          </a:xfrm>
+          <a:prstGeom prst="rect">
+            <a:avLst/>
+          </a:prstGeom>
+        </p:spPr>
+      </p:pic>
+      <p:sp>
+        <p:nvSpPr>
+          <p:cNvPr id="6" name="Text 3"/>
+          <p:cNvSpPr/>
+          <p:nvPr/>
+        </p:nvSpPr>
+        <p:spPr>
+          <a:xfrm>
+            <a:off x="1234440" y="1234440"/>
+            <a:ext cx="3017520" cy="457200"/>
+          </a:xfrm>
+          <a:prstGeom prst="rect">
+            <a:avLst/>
+          </a:prstGeom>
+          <a:noFill/>
+          <a:ln/>
+        </p:spPr>
+        <p:txBody>
+          <a:bodyPr wrap="square" lIns="0" tIns="0" rIns="0" bIns="0" rtlCol="0" anchor="ctr"/>
+          <a:lstStyle/>
+          <a:p>
+            <a:pPr indent="0" marL="0">
+              <a:buNone/>
+            </a:pPr>
+            <a:r>
+              <a:rPr lang="en-US" sz="1800" b="1" dirty="0">
+                <a:solidFill>
+                  <a:srgbClr val="0B3D4C"/>
+                </a:solidFill>
+                <a:latin typeface="Georgia" pitchFamily="34" charset="0"/>
+                <a:ea typeface="Georgia" pitchFamily="34" charset="-122"/>
+                <a:cs typeface="Georgia" pitchFamily="34" charset="-120"/>
+              </a:rPr>
+              <a:t>What F006 Ingests</a:t>
+            </a:r>
+            <a:endParaRPr lang="en-US" sz="1800" dirty="0"/>
+          </a:p>
+        </p:txBody>
+      </p:sp>
+      <p:sp>
+        <p:nvSpPr>
+          <p:cNvPr id="7" name="Text 4"/>
+          <p:cNvSpPr/>
+          <p:nvPr/>
+        </p:nvSpPr>
+        <p:spPr>
+          <a:xfrm>
+            <a:off x="731520" y="1828800"/>
+            <a:ext cx="3566160" cy="2468880"/>
+          </a:xfrm>
+          <a:prstGeom prst="rect">
+            <a:avLst/>
+          </a:prstGeom>
+          <a:noFill/>
+          <a:ln/>
+        </p:spPr>
+        <p:txBody>
+          <a:bodyPr wrap="square" lIns="0" tIns="0" rIns="0" bIns="0" rtlCol="0" anchor="t"/>
+          <a:lstStyle/>
+          <a:p>
+            <a:pPr indent="0" marL="0">
+              <a:buNone/>
+            </a:pPr>
+            <a:r>
+              <a:rPr lang="en-US" sz="1300" dirty="0">
+                <a:solidFill>
+                  <a:srgbClr val="1A2B33"/>
+                </a:solidFill>
+                <a:latin typeface="Calibri" pitchFamily="34" charset="0"/>
+                <a:ea typeface="Calibri" pitchFamily="34" charset="-122"/>
+                <a:cs typeface="Calibri" pitchFamily="34" charset="-120"/>
+              </a:rPr>
+              <a:t>Neuroanatomical measurements from micro-CT imaging including:</a:t>
+            </a:r>
+            <a:endParaRPr lang="en-US" sz="1300" dirty="0"/>
+          </a:p>
+          <a:p>
+            <a:pPr indent="0" marL="0">
+              <a:buNone/>
+            </a:pPr>
+            <a:endParaRPr lang="en-US" sz="1300" dirty="0"/>
+          </a:p>
+          <a:p>
+            <a:pPr marL="342900" indent="-342900">
+              <a:buSzPct val="100000"/>
+              <a:buChar char="•"/>
+            </a:pPr>
+            <a:r>
+              <a:rPr lang="en-US" sz="1300" dirty="0">
+                <a:solidFill>
+                  <a:srgbClr val="1A2B33"/>
+                </a:solidFill>
+                <a:latin typeface="Calibri" pitchFamily="34" charset="0"/>
+                <a:ea typeface="Calibri" pitchFamily="34" charset="-122"/>
+                <a:cs typeface="Calibri" pitchFamily="34" charset="-120"/>
+              </a:rPr>
+              <a:t>Nerve volumes (mm³)</a:t>
+            </a:r>
+            <a:endParaRPr lang="en-US" sz="1300" dirty="0"/>
+          </a:p>
+          <a:p>
+            <a:pPr marL="342900" indent="-342900">
+              <a:buSzPct val="100000"/>
+              <a:buChar char="•"/>
+            </a:pPr>
+            <a:r>
+              <a:rPr lang="en-US" sz="1300" dirty="0">
+                <a:solidFill>
+                  <a:srgbClr val="1A2B33"/>
+                </a:solidFill>
+                <a:latin typeface="Calibri" pitchFamily="34" charset="0"/>
+                <a:ea typeface="Calibri" pitchFamily="34" charset="-122"/>
+                <a:cs typeface="Calibri" pitchFamily="34" charset="-120"/>
+              </a:rPr>
+              <a:t>Cross-section diameters (μm)</a:t>
+            </a:r>
+            <a:endParaRPr lang="en-US" sz="1300" dirty="0"/>
+          </a:p>
+          <a:p>
+            <a:pPr marL="342900" indent="-342900">
+              <a:buSzPct val="100000"/>
+              <a:buChar char="•"/>
+            </a:pPr>
+            <a:r>
+              <a:rPr lang="en-US" sz="1300" dirty="0">
+                <a:solidFill>
+                  <a:srgbClr val="1A2B33"/>
+                </a:solidFill>
+                <a:latin typeface="Calibri" pitchFamily="34" charset="0"/>
+                <a:ea typeface="Calibri" pitchFamily="34" charset="-122"/>
+                <a:cs typeface="Calibri" pitchFamily="34" charset="-120"/>
+              </a:rPr>
+              <a:t>Fiber-fascicle hierarchies</a:t>
+            </a:r>
+            <a:endParaRPr lang="en-US" sz="1300" dirty="0"/>
+          </a:p>
+          <a:p>
+            <a:pPr marL="342900" indent="-342900">
+              <a:buSzPct val="100000"/>
+              <a:buChar char="•"/>
+            </a:pPr>
+            <a:r>
+              <a:rPr lang="en-US" sz="1300" dirty="0">
+                <a:solidFill>
+                  <a:srgbClr val="1A2B33"/>
+                </a:solidFill>
+                <a:latin typeface="Calibri" pitchFamily="34" charset="0"/>
+                <a:ea typeface="Calibri" pitchFamily="34" charset="-122"/>
+                <a:cs typeface="Calibri" pitchFamily="34" charset="-120"/>
+              </a:rPr>
+              <a:t>Subject/sample metadata</a:t>
+            </a:r>
+            <a:endParaRPr lang="en-US" sz="1300" dirty="0"/>
+          </a:p>
+          <a:p>
+            <a:pPr marL="342900" indent="-342900">
+              <a:buSzPct val="100000"/>
+              <a:buChar char="•"/>
+            </a:pPr>
+            <a:r>
+              <a:rPr lang="en-US" sz="1300" dirty="0">
+                <a:solidFill>
+                  <a:srgbClr val="1A2B33"/>
+                </a:solidFill>
+                <a:latin typeface="Calibri" pitchFamily="34" charset="0"/>
+                <a:ea typeface="Calibri" pitchFamily="34" charset="-122"/>
+                <a:cs typeface="Calibri" pitchFamily="34" charset="-120"/>
+              </a:rPr>
+              <a:t>InterLex term mappings</a:t>
+            </a:r>
+            <a:endParaRPr lang="en-US" sz="1300" dirty="0"/>
+          </a:p>
+        </p:txBody>
+      </p:sp>
+      <p:sp>
+        <p:nvSpPr>
+          <p:cNvPr id="8" name="Shape 5"/>
+          <p:cNvSpPr/>
+          <p:nvPr/>
+        </p:nvSpPr>
+        <p:spPr>
+          <a:xfrm>
+            <a:off x="4663440" y="1097280"/>
+            <a:ext cx="4023360" cy="3474720"/>
+          </a:xfrm>
+          <a:prstGeom prst="rect">
+            <a:avLst/>
+          </a:prstGeom>
+          <a:solidFill>
+            <a:srgbClr val="FFFFFF"/>
+          </a:solidFill>
+          <a:ln/>
+          <a:effectLst>
+            <a:outerShdw sx="100000" sy="100000" kx="0" ky="0" algn="bl" rotWithShape="0" blurRad="76200" dist="25400" dir="8100000">
+              <a:srgbClr val="000000">
+                <a:alpha val="12000"/>
+              </a:srgbClr>
+            </a:outerShdw>
+          </a:effectLst>
+        </p:spPr>
+      </p:sp>
+      <p:pic>
+        <p:nvPicPr>
+          <p:cNvPr id="9" name="Image 1" descr="preencoded.png">    </p:cNvPr>
+          <p:cNvPicPr>
+            <a:picLocks noChangeAspect="1"/>
+          </p:cNvPicPr>
+          <p:nvPr/>
+        </p:nvPicPr>
+        <p:blipFill>
+          <a:blip r:embed="rId2"/>
+          <a:stretch>
+            <a:fillRect/>
+          </a:stretch>
+        </p:blipFill>
+        <p:spPr>
+          <a:xfrm>
+            <a:off x="4937760" y="1280160"/>
+            <a:ext cx="365760" cy="365760"/>
+          </a:xfrm>
+          <a:prstGeom prst="rect">
+            <a:avLst/>
+          </a:prstGeom>
+        </p:spPr>
+      </p:pic>
+      <p:sp>
+        <p:nvSpPr>
+          <p:cNvPr id="10" name="Text 6"/>
+          <p:cNvSpPr/>
+          <p:nvPr/>
+        </p:nvSpPr>
+        <p:spPr>
+          <a:xfrm>
+            <a:off x="5440680" y="1234440"/>
+            <a:ext cx="3017520" cy="457200"/>
+          </a:xfrm>
+          <a:prstGeom prst="rect">
+            <a:avLst/>
+          </a:prstGeom>
+          <a:noFill/>
+          <a:ln/>
+        </p:spPr>
+        <p:txBody>
+          <a:bodyPr wrap="square" lIns="0" tIns="0" rIns="0" bIns="0" rtlCol="0" anchor="ctr"/>
+          <a:lstStyle/>
+          <a:p>
+            <a:pPr indent="0" marL="0">
+              <a:buNone/>
+            </a:pPr>
+            <a:r>
+              <a:rPr lang="en-US" sz="1800" b="1" dirty="0">
+                <a:solidFill>
+                  <a:srgbClr val="0B3D4C"/>
+                </a:solidFill>
+                <a:latin typeface="Georgia" pitchFamily="34" charset="0"/>
+                <a:ea typeface="Georgia" pitchFamily="34" charset="-122"/>
+                <a:cs typeface="Georgia" pitchFamily="34" charset="-120"/>
+              </a:rPr>
+              <a:t>How back_populate Helps</a:t>
+            </a:r>
+            <a:endParaRPr lang="en-US" sz="1800" dirty="0"/>
+          </a:p>
+        </p:txBody>
+      </p:sp>
+      <p:sp>
+        <p:nvSpPr>
+          <p:cNvPr id="11" name="Text 7"/>
+          <p:cNvSpPr/>
+          <p:nvPr/>
+        </p:nvSpPr>
+        <p:spPr>
+          <a:xfrm>
+            <a:off x="4937760" y="1828800"/>
+            <a:ext cx="3566160" cy="2468880"/>
+          </a:xfrm>
+          <a:prstGeom prst="rect">
+            <a:avLst/>
+          </a:prstGeom>
+          <a:noFill/>
+          <a:ln/>
+        </p:spPr>
+        <p:txBody>
+          <a:bodyPr wrap="square" lIns="0" tIns="0" rIns="0" bIns="0" rtlCol="0" anchor="t"/>
+          <a:lstStyle/>
+          <a:p>
+            <a:pPr indent="0" marL="0">
+              <a:buNone/>
+            </a:pPr>
+            <a:r>
+              <a:rPr lang="en-US" sz="1300" dirty="0">
+                <a:solidFill>
+                  <a:srgbClr val="1A2B33"/>
+                </a:solidFill>
+                <a:latin typeface="Calibri" pitchFamily="34" charset="0"/>
+                <a:ea typeface="Calibri" pitchFamily="34" charset="-122"/>
+                <a:cs typeface="Calibri" pitchFamily="34" charset="-120"/>
+              </a:rPr>
+              <a:t>The F006 ingestion pipeline uses back_populate_tables for:</a:t>
+            </a:r>
+            <a:endParaRPr lang="en-US" sz="1300" dirty="0"/>
+          </a:p>
+          <a:p>
+            <a:pPr indent="0" marL="0">
+              <a:buNone/>
+            </a:pPr>
+            <a:endParaRPr lang="en-US" sz="1300" dirty="0"/>
+          </a:p>
+          <a:p>
+            <a:pPr marL="342900" indent="-342900">
+              <a:buSzPct val="100000"/>
+              <a:buChar char="•"/>
+            </a:pPr>
+            <a:r>
+              <a:rPr lang="en-US" sz="1300" dirty="0">
+                <a:solidFill>
+                  <a:srgbClr val="1A2B33"/>
+                </a:solidFill>
+                <a:latin typeface="Calibri" pitchFamily="34" charset="0"/>
+                <a:ea typeface="Calibri" pitchFamily="34" charset="-122"/>
+                <a:cs typeface="Calibri" pitchFamily="34" charset="-120"/>
+              </a:rPr>
+              <a:t>ValuesCat — modality tags (micro-CT)</a:t>
+            </a:r>
+            <a:endParaRPr lang="en-US" sz="1300" dirty="0"/>
+          </a:p>
+          <a:p>
+            <a:pPr marL="342900" indent="-342900">
+              <a:buSzPct val="100000"/>
+              <a:buChar char="•"/>
+            </a:pPr>
+            <a:r>
+              <a:rPr lang="en-US" sz="1300" dirty="0">
+                <a:solidFill>
+                  <a:srgbClr val="1A2B33"/>
+                </a:solidFill>
+                <a:latin typeface="Calibri" pitchFamily="34" charset="0"/>
+                <a:ea typeface="Calibri" pitchFamily="34" charset="-122"/>
+                <a:cs typeface="Calibri" pitchFamily="34" charset="-120"/>
+              </a:rPr>
+              <a:t>ValuesQuant — actual measurements</a:t>
+            </a:r>
+            <a:endParaRPr lang="en-US" sz="1300" dirty="0"/>
+          </a:p>
+          <a:p>
+            <a:pPr indent="0" marL="0">
+              <a:buNone/>
+            </a:pPr>
+            <a:endParaRPr lang="en-US" sz="1300" dirty="0"/>
+          </a:p>
+          <a:p>
+            <a:pPr indent="0" marL="0">
+              <a:buNone/>
+            </a:pPr>
+            <a:r>
+              <a:rPr lang="en-US" sz="1300" i="1" dirty="0">
+                <a:solidFill>
+                  <a:srgbClr val="5A7A85"/>
+                </a:solidFill>
+                <a:latin typeface="Calibri" pitchFamily="34" charset="0"/>
+                <a:ea typeface="Calibri" pitchFamily="34" charset="-122"/>
+                <a:cs typeface="Calibri" pitchFamily="34" charset="-120"/>
+              </a:rPr>
+              <a:t>This avoids manually wiring 7+ FK relationships per measurement row.</a:t>
+            </a:r>
+            <a:endParaRPr lang="en-US" sz="1300" dirty="0"/>
+          </a:p>
+        </p:txBody>
+      </p:sp>
+    </p:spTree>
+  </p:cSld>
+  <p:clrMapOvr>
+    <a:masterClrMapping/>
+  </p:clrMapOvr>
+</p:sld>
+</file>
+
+<file path=ppt/slides/slide13.xml><?xml version="1.0" encoding="utf-8"?>
+<p:sld xmlns:a="http://schemas.openxmlformats.org/drawingml/2006/main" xmlns:r="http://schemas.openxmlformats.org/officeDocument/2006/relationships" xmlns:p="http://schemas.openxmlformats.org/presentationml/2006/main">
+  <p:cSld name="Slide 13">
+    <p:bg>
+      <p:bgPr>
+        <a:solidFill>
+          <a:srgbClr val="FFFFFF"/>
+        </a:solidFill>
+      </p:bgPr>
+    </p:bg>
+    <p:spTree>
+      <p:nvGrpSpPr>
+        <p:cNvPr id="1" name=""/>
+        <p:cNvGrpSpPr/>
+        <p:nvPr/>
+      </p:nvGrpSpPr>
+      <p:grpSpPr>
+        <a:xfrm>
+          <a:off x="0" y="0"/>
+          <a:ext cx="0" cy="0"/>
+          <a:chOff x="0" y="0"/>
+          <a:chExt cx="0" cy="0"/>
+        </a:xfrm>
+      </p:grpSpPr>
+      <p:sp>
+        <p:nvSpPr>
+          <p:cNvPr id="2" name="Shape 0"/>
+          <p:cNvSpPr/>
+          <p:nvPr/>
+        </p:nvSpPr>
+        <p:spPr>
+          <a:xfrm>
+            <a:off x="0" y="0"/>
+            <a:ext cx="9144000" cy="54864"/>
+          </a:xfrm>
+          <a:prstGeom prst="rect">
+            <a:avLst/>
+          </a:prstGeom>
+          <a:solidFill>
+            <a:srgbClr val="127C8B"/>
+          </a:solidFill>
+          <a:ln/>
+        </p:spPr>
+      </p:sp>
+      <p:sp>
+        <p:nvSpPr>
+          <p:cNvPr id="3" name="Text 1"/>
+          <p:cNvSpPr/>
+          <p:nvPr/>
+        </p:nvSpPr>
+        <p:spPr>
+          <a:xfrm>
+            <a:off x="548640" y="274320"/>
+            <a:ext cx="8229600" cy="548640"/>
+          </a:xfrm>
+          <a:prstGeom prst="rect">
+            <a:avLst/>
+          </a:prstGeom>
+          <a:noFill/>
+          <a:ln/>
+        </p:spPr>
+        <p:txBody>
+          <a:bodyPr wrap="square" lIns="0" tIns="0" rIns="0" bIns="0" rtlCol="0" anchor="ctr"/>
+          <a:lstStyle/>
+          <a:p>
+            <a:pPr indent="0" marL="0">
+              <a:buNone/>
+            </a:pPr>
+            <a:r>
+              <a:rPr lang="en-US" sz="3600" b="1" dirty="0">
+                <a:solidFill>
+                  <a:srgbClr val="0B3D4C"/>
+                </a:solidFill>
+                <a:latin typeface="Georgia" pitchFamily="34" charset="0"/>
+                <a:ea typeface="Georgia" pitchFamily="34" charset="-122"/>
+                <a:cs typeface="Georgia" pitchFamily="34" charset="-120"/>
+              </a:rPr>
+              <a:t>Best Practices &amp; Pitfalls</a:t>
+            </a:r>
+            <a:endParaRPr lang="en-US" sz="3600" dirty="0"/>
+          </a:p>
+        </p:txBody>
+      </p:sp>
+      <p:sp>
+        <p:nvSpPr>
+          <p:cNvPr id="4" name="Shape 2"/>
+          <p:cNvSpPr/>
+          <p:nvPr/>
+        </p:nvSpPr>
+        <p:spPr>
+          <a:xfrm>
+            <a:off x="457200" y="1005840"/>
+            <a:ext cx="3931920" cy="3749040"/>
+          </a:xfrm>
+          <a:prstGeom prst="rect">
+            <a:avLst/>
+          </a:prstGeom>
+          <a:solidFill>
+            <a:srgbClr val="E8F6F3"/>
+          </a:solidFill>
+          <a:ln/>
+          <a:effectLst>
+            <a:outerShdw sx="100000" sy="100000" kx="0" ky="0" algn="bl" rotWithShape="0" blurRad="76200" dist="25400" dir="8100000">
+              <a:srgbClr val="000000">
+                <a:alpha val="12000"/>
+              </a:srgbClr>
+            </a:outerShdw>
+          </a:effectLst>
+        </p:spPr>
+      </p:sp>
+      <p:pic>
+        <p:nvPicPr>
+          <p:cNvPr id="5" name="Image 0" descr="preencoded.png">    </p:cNvPr>
+          <p:cNvPicPr>
+            <a:picLocks noChangeAspect="1"/>
+          </p:cNvPicPr>
+          <p:nvPr/>
+        </p:nvPicPr>
+        <p:blipFill>
+          <a:blip r:embed="rId1"/>
+          <a:stretch>
+            <a:fillRect/>
+          </a:stretch>
+        </p:blipFill>
+        <p:spPr>
+          <a:xfrm>
+            <a:off x="731520" y="1188720"/>
+            <a:ext cx="320040" cy="320040"/>
+          </a:xfrm>
+          <a:prstGeom prst="rect">
+            <a:avLst/>
+          </a:prstGeom>
+        </p:spPr>
+      </p:pic>
+      <p:sp>
+        <p:nvSpPr>
+          <p:cNvPr id="6" name="Text 3"/>
+          <p:cNvSpPr/>
+          <p:nvPr/>
+        </p:nvSpPr>
+        <p:spPr>
+          <a:xfrm>
+            <a:off x="1143000" y="1143000"/>
+            <a:ext cx="1371600" cy="411480"/>
+          </a:xfrm>
+          <a:prstGeom prst="rect">
+            <a:avLst/>
+          </a:prstGeom>
+          <a:noFill/>
+          <a:ln/>
+        </p:spPr>
+        <p:txBody>
+          <a:bodyPr wrap="square" lIns="0" tIns="0" rIns="0" bIns="0" rtlCol="0" anchor="ctr"/>
+          <a:lstStyle/>
+          <a:p>
+            <a:pPr indent="0" marL="0">
+              <a:buNone/>
+            </a:pPr>
+            <a:r>
+              <a:rPr lang="en-US" sz="2000" b="1" dirty="0">
+                <a:solidFill>
+                  <a:srgbClr val="127C8B"/>
+                </a:solidFill>
+                <a:latin typeface="Georgia" pitchFamily="34" charset="0"/>
+                <a:ea typeface="Georgia" pitchFamily="34" charset="-122"/>
+                <a:cs typeface="Georgia" pitchFamily="34" charset="-120"/>
+              </a:rPr>
+              <a:t>Do</a:t>
+            </a:r>
+            <a:endParaRPr lang="en-US" sz="2000" dirty="0"/>
+          </a:p>
+        </p:txBody>
+      </p:sp>
+      <p:sp>
+        <p:nvSpPr>
+          <p:cNvPr id="7" name="Text 4"/>
+          <p:cNvSpPr/>
+          <p:nvPr/>
+        </p:nvSpPr>
+        <p:spPr>
+          <a:xfrm>
+            <a:off x="731520" y="1691640"/>
+            <a:ext cx="3474720" cy="2834640"/>
+          </a:xfrm>
+          <a:prstGeom prst="rect">
+            <a:avLst/>
+          </a:prstGeom>
+          <a:noFill/>
+          <a:ln/>
+        </p:spPr>
+        <p:txBody>
+          <a:bodyPr wrap="square" lIns="0" tIns="0" rIns="0" bIns="0" rtlCol="0" anchor="t"/>
+          <a:lstStyle/>
+          <a:p>
+            <a:pPr marL="342900" indent="-342900">
+              <a:buSzPct val="100000"/>
+              <a:buChar char="•"/>
+            </a:pPr>
+            <a:r>
+              <a:rPr lang="en-US" sz="1300" dirty="0">
+                <a:solidFill>
+                  <a:srgbClr val="1A2B33"/>
+                </a:solidFill>
+                <a:latin typeface="Calibri" pitchFamily="34" charset="0"/>
+                <a:ea typeface="Calibri" pitchFamily="34" charset="-122"/>
+                <a:cs typeface="Calibri" pitchFamily="34" charset="-120"/>
+              </a:rPr>
+              <a:t>Follow Root → Intermediate → Leaf order</a:t>
+            </a:r>
+            <a:endParaRPr lang="en-US" sz="1300" dirty="0"/>
+          </a:p>
+          <a:p>
+            <a:pPr indent="0" marL="0">
+              <a:buNone/>
+            </a:pPr>
+            <a:endParaRPr lang="en-US" sz="1300" dirty="0"/>
+          </a:p>
+          <a:p>
+            <a:pPr marL="342900" indent="-342900">
+              <a:buSzPct val="100000"/>
+              <a:buChar char="•"/>
+            </a:pPr>
+            <a:r>
+              <a:rPr lang="en-US" sz="1300" dirty="0">
+                <a:solidFill>
+                  <a:srgbClr val="1A2B33"/>
+                </a:solidFill>
+                <a:latin typeface="Calibri" pitchFamily="34" charset="0"/>
+                <a:ea typeface="Calibri" pitchFamily="34" charset="-122"/>
+                <a:cs typeface="Calibri" pitchFamily="34" charset="-120"/>
+              </a:rPr>
+              <a:t>Set all relationship properties before calling back_populate_tables</a:t>
+            </a:r>
+            <a:endParaRPr lang="en-US" sz="1300" dirty="0"/>
+          </a:p>
+          <a:p>
+            <a:pPr indent="0" marL="0">
+              <a:buNone/>
+            </a:pPr>
+            <a:endParaRPr lang="en-US" sz="1300" dirty="0"/>
+          </a:p>
+          <a:p>
+            <a:pPr marL="342900" indent="-342900">
+              <a:buSzPct val="100000"/>
+              <a:buChar char="•"/>
+            </a:pPr>
+            <a:r>
+              <a:rPr lang="en-US" sz="1300" dirty="0">
+                <a:solidFill>
+                  <a:srgbClr val="1A2B33"/>
+                </a:solidFill>
+                <a:latin typeface="Calibri" pitchFamily="34" charset="0"/>
+                <a:ea typeface="Calibri" pitchFamily="34" charset="-122"/>
+                <a:cs typeface="Calibri" pitchFamily="34" charset="-120"/>
+              </a:rPr>
+              <a:t>Use get_or_create for root and intermediate tables</a:t>
+            </a:r>
+            <a:endParaRPr lang="en-US" sz="1300" dirty="0"/>
+          </a:p>
+          <a:p>
+            <a:pPr indent="0" marL="0">
+              <a:buNone/>
+            </a:pPr>
+            <a:endParaRPr lang="en-US" sz="1300" dirty="0"/>
+          </a:p>
+          <a:p>
+            <a:pPr marL="342900" indent="-342900">
+              <a:buSzPct val="100000"/>
+              <a:buChar char="•"/>
+            </a:pPr>
+            <a:r>
+              <a:rPr lang="en-US" sz="1300" dirty="0">
+                <a:solidFill>
+                  <a:srgbClr val="1A2B33"/>
+                </a:solidFill>
+                <a:latin typeface="Calibri" pitchFamily="34" charset="0"/>
+                <a:ea typeface="Calibri" pitchFamily="34" charset="-122"/>
+                <a:cs typeface="Calibri" pitchFamily="34" charset="-120"/>
+              </a:rPr>
+              <a:t>Match ID patterns: sub- for subjects, sam- for samples</a:t>
+            </a:r>
+            <a:endParaRPr lang="en-US" sz="1300" dirty="0"/>
+          </a:p>
+          <a:p>
+            <a:pPr indent="0" marL="0">
+              <a:buNone/>
+            </a:pPr>
+            <a:endParaRPr lang="en-US" sz="1300" dirty="0"/>
+          </a:p>
+          <a:p>
+            <a:pPr marL="342900" indent="-342900">
+              <a:buSzPct val="100000"/>
+              <a:buChar char="•"/>
+            </a:pPr>
+            <a:r>
+              <a:rPr lang="en-US" sz="1300" dirty="0">
+                <a:solidFill>
+                  <a:srgbClr val="1A2B33"/>
+                </a:solidFill>
+                <a:latin typeface="Calibri" pitchFamily="34" charset="0"/>
+                <a:ea typeface="Calibri" pitchFamily="34" charset="-122"/>
+                <a:cs typeface="Calibri" pitchFamily="34" charset="-120"/>
+              </a:rPr>
+              <a:t>Always set id_file on package-type Objects</a:t>
+            </a:r>
+            <a:endParaRPr lang="en-US" sz="1300" dirty="0"/>
+          </a:p>
+        </p:txBody>
+      </p:sp>
+      <p:sp>
+        <p:nvSpPr>
+          <p:cNvPr id="8" name="Shape 5"/>
+          <p:cNvSpPr/>
+          <p:nvPr/>
+        </p:nvSpPr>
+        <p:spPr>
+          <a:xfrm>
+            <a:off x="4754880" y="1005840"/>
+            <a:ext cx="3931920" cy="3749040"/>
+          </a:xfrm>
+          <a:prstGeom prst="rect">
+            <a:avLst/>
+          </a:prstGeom>
+          <a:solidFill>
+            <a:srgbClr val="FDF2E9"/>
+          </a:solidFill>
+          <a:ln/>
+          <a:effectLst>
+            <a:outerShdw sx="100000" sy="100000" kx="0" ky="0" algn="bl" rotWithShape="0" blurRad="76200" dist="25400" dir="8100000">
+              <a:srgbClr val="000000">
+                <a:alpha val="12000"/>
+              </a:srgbClr>
+            </a:outerShdw>
+          </a:effectLst>
+        </p:spPr>
+      </p:sp>
+      <p:pic>
+        <p:nvPicPr>
+          <p:cNvPr id="9" name="Image 1" descr="preencoded.png">    </p:cNvPr>
+          <p:cNvPicPr>
+            <a:picLocks noChangeAspect="1"/>
+          </p:cNvPicPr>
+          <p:nvPr/>
+        </p:nvPicPr>
+        <p:blipFill>
+          <a:blip r:embed="rId2"/>
+          <a:stretch>
+            <a:fillRect/>
+          </a:stretch>
+        </p:blipFill>
+        <p:spPr>
+          <a:xfrm>
+            <a:off x="5029200" y="1188720"/>
+            <a:ext cx="320040" cy="320040"/>
+          </a:xfrm>
+          <a:prstGeom prst="rect">
+            <a:avLst/>
+          </a:prstGeom>
+        </p:spPr>
+      </p:pic>
+      <p:sp>
+        <p:nvSpPr>
+          <p:cNvPr id="10" name="Text 6"/>
+          <p:cNvSpPr/>
+          <p:nvPr/>
+        </p:nvSpPr>
+        <p:spPr>
+          <a:xfrm>
+            <a:off x="5440680" y="1143000"/>
+            <a:ext cx="1371600" cy="411480"/>
+          </a:xfrm>
+          <a:prstGeom prst="rect">
+            <a:avLst/>
+          </a:prstGeom>
+          <a:noFill/>
+          <a:ln/>
+        </p:spPr>
+        <p:txBody>
+          <a:bodyPr wrap="square" lIns="0" tIns="0" rIns="0" bIns="0" rtlCol="0" anchor="ctr"/>
+          <a:lstStyle/>
+          <a:p>
+            <a:pPr indent="0" marL="0">
+              <a:buNone/>
+            </a:pPr>
+            <a:r>
+              <a:rPr lang="en-US" sz="2000" b="1" dirty="0">
+                <a:solidFill>
+                  <a:srgbClr val="F4A940"/>
+                </a:solidFill>
+                <a:latin typeface="Georgia" pitchFamily="34" charset="0"/>
+                <a:ea typeface="Georgia" pitchFamily="34" charset="-122"/>
+                <a:cs typeface="Georgia" pitchFamily="34" charset="-120"/>
+              </a:rPr>
+              <a:t>Don't</a:t>
+            </a:r>
+            <a:endParaRPr lang="en-US" sz="2000" dirty="0"/>
+          </a:p>
+        </p:txBody>
+      </p:sp>
+      <p:sp>
+        <p:nvSpPr>
+          <p:cNvPr id="11" name="Text 7"/>
+          <p:cNvSpPr/>
+          <p:nvPr/>
+        </p:nvSpPr>
+        <p:spPr>
+          <a:xfrm>
+            <a:off x="5029200" y="1691640"/>
+            <a:ext cx="3474720" cy="2834640"/>
+          </a:xfrm>
+          <a:prstGeom prst="rect">
+            <a:avLst/>
+          </a:prstGeom>
+          <a:noFill/>
+          <a:ln/>
+        </p:spPr>
+        <p:txBody>
+          <a:bodyPr wrap="square" lIns="0" tIns="0" rIns="0" bIns="0" rtlCol="0" anchor="t"/>
+          <a:lstStyle/>
+          <a:p>
+            <a:pPr marL="342900" indent="-342900">
+              <a:buSzPct val="100000"/>
+              <a:buChar char="•"/>
+            </a:pPr>
+            <a:r>
+              <a:rPr lang="en-US" sz="1300" dirty="0">
+                <a:solidFill>
+                  <a:srgbClr val="1A2B33"/>
+                </a:solidFill>
+                <a:latin typeface="Calibri" pitchFamily="34" charset="0"/>
+                <a:ea typeface="Calibri" pitchFamily="34" charset="-122"/>
+                <a:cs typeface="Calibri" pitchFamily="34" charset="-120"/>
+              </a:rPr>
+              <a:t>Skip the population order — FK violations guaranteed</a:t>
+            </a:r>
+            <a:endParaRPr lang="en-US" sz="1300" dirty="0"/>
+          </a:p>
+          <a:p>
+            <a:pPr indent="0" marL="0">
+              <a:buNone/>
+            </a:pPr>
+            <a:endParaRPr lang="en-US" sz="1300" dirty="0"/>
+          </a:p>
+          <a:p>
+            <a:pPr marL="342900" indent="-342900">
+              <a:buSzPct val="100000"/>
+              <a:buChar char="•"/>
+            </a:pPr>
+            <a:r>
+              <a:rPr lang="en-US" sz="1300" dirty="0">
+                <a:solidFill>
+                  <a:srgbClr val="1A2B33"/>
+                </a:solidFill>
+                <a:latin typeface="Calibri" pitchFamily="34" charset="0"/>
+                <a:ea typeface="Calibri" pitchFamily="34" charset="-122"/>
+                <a:cs typeface="Calibri" pitchFamily="34" charset="-120"/>
+              </a:rPr>
+              <a:t>Use dataset objects in obj_desc_* tables (only packages)</a:t>
+            </a:r>
+            <a:endParaRPr lang="en-US" sz="1300" dirty="0"/>
+          </a:p>
+          <a:p>
+            <a:pPr indent="0" marL="0">
+              <a:buNone/>
+            </a:pPr>
+            <a:endParaRPr lang="en-US" sz="1300" dirty="0"/>
+          </a:p>
+          <a:p>
+            <a:pPr marL="342900" indent="-342900">
+              <a:buSzPct val="100000"/>
+              <a:buChar char="•"/>
+            </a:pPr>
+            <a:r>
+              <a:rPr lang="en-US" sz="1300" dirty="0">
+                <a:solidFill>
+                  <a:srgbClr val="1A2B33"/>
+                </a:solidFill>
+                <a:latin typeface="Calibri" pitchFamily="34" charset="0"/>
+                <a:ea typeface="Calibri" pitchFamily="34" charset="-122"/>
+                <a:cs typeface="Calibri" pitchFamily="34" charset="-120"/>
+              </a:rPr>
+              <a:t>Manually manage leaf table FKs — let back_populate handle it</a:t>
+            </a:r>
+            <a:endParaRPr lang="en-US" sz="1300" dirty="0"/>
+          </a:p>
+          <a:p>
+            <a:pPr indent="0" marL="0">
+              <a:buNone/>
+            </a:pPr>
+            <a:endParaRPr lang="en-US" sz="1300" dirty="0"/>
+          </a:p>
+          <a:p>
+            <a:pPr marL="342900" indent="-342900">
+              <a:buSzPct val="100000"/>
+              <a:buChar char="•"/>
+            </a:pPr>
+            <a:r>
+              <a:rPr lang="en-US" sz="1300" dirty="0">
+                <a:solidFill>
+                  <a:srgbClr val="1A2B33"/>
+                </a:solidFill>
+                <a:latin typeface="Calibri" pitchFamily="34" charset="0"/>
+                <a:ea typeface="Calibri" pitchFamily="34" charset="-122"/>
+                <a:cs typeface="Calibri" pitchFamily="34" charset="-120"/>
+              </a:rPr>
+              <a:t>Forget required enum values (address_type, instance_type, etc.)</a:t>
+            </a:r>
+            <a:endParaRPr lang="en-US" sz="1300" dirty="0"/>
+          </a:p>
+          <a:p>
+            <a:pPr indent="0" marL="0">
+              <a:buNone/>
+            </a:pPr>
+            <a:endParaRPr lang="en-US" sz="1300" dirty="0"/>
+          </a:p>
+          <a:p>
+            <a:pPr marL="342900" indent="-342900">
+              <a:buSzPct val="100000"/>
+              <a:buChar char="•"/>
+            </a:pPr>
+            <a:r>
+              <a:rPr lang="en-US" sz="1300" dirty="0">
+                <a:solidFill>
+                  <a:srgbClr val="1A2B33"/>
+                </a:solidFill>
+                <a:latin typeface="Calibri" pitchFamily="34" charset="0"/>
+                <a:ea typeface="Calibri" pitchFamily="34" charset="-122"/>
+                <a:cs typeface="Calibri" pitchFamily="34" charset="-120"/>
+              </a:rPr>
+              <a:t>Assume circular deps will resolve — they won't without recursion</a:t>
+            </a:r>
+            <a:endParaRPr lang="en-US" sz="1300" dirty="0"/>
+          </a:p>
+        </p:txBody>
+      </p:sp>
+    </p:spTree>
+  </p:cSld>
+  <p:clrMapOvr>
+    <a:masterClrMapping/>
+  </p:clrMapOvr>
+</p:sld>
+</file>
+
+<file path=ppt/slides/slide14.xml><?xml version="1.0" encoding="utf-8"?>
+<p:sld xmlns:a="http://schemas.openxmlformats.org/drawingml/2006/main" xmlns:r="http://schemas.openxmlformats.org/officeDocument/2006/relationships" xmlns:p="http://schemas.openxmlformats.org/presentationml/2006/main">
+  <p:cSld name="Slide 14">
+    <p:bg>
+      <p:bgPr>
+        <a:solidFill>
           <a:srgbClr val="0B3D4C"/>
         </a:solidFill>
       </p:bgPr>
@@ -6337,7 +10326,7 @@
         </p:nvSpPr>
         <p:spPr>
           <a:xfrm>
-            <a:off x="548640" y="320040"/>
+            <a:off x="457200" y="274320"/>
             <a:ext cx="8229600" cy="548640"/>
           </a:xfrm>
           <a:prstGeom prst="rect">
@@ -6354,7 +10343,7 @@
               <a:buNone/>
             </a:pPr>
             <a:r>
-              <a:rPr lang="en-US" sz="3600" b="1" dirty="0">
+              <a:rPr lang="en-US" sz="3000" b="1" dirty="0">
                 <a:solidFill>
                   <a:srgbClr val="0B3D4C"/>
                 </a:solidFill>
@@ -6362,9 +10351,9 @@
                 <a:ea typeface="Georgia" pitchFamily="34" charset="-122"/>
                 <a:cs typeface="Georgia" pitchFamily="34" charset="-120"/>
               </a:rPr>
-              <a:t>F006 Dataset Application</a:t>
-            </a:r>
-            <a:endParaRPr lang="en-US" sz="3600" dirty="0"/>
+              <a:t>get_or_create  vs  back_populate_tables</a:t>
+            </a:r>
+            <a:endParaRPr lang="en-US" sz="3000" dirty="0"/>
           </a:p>
         </p:txBody>
       </p:sp>
@@ -6376,8 +10365,8 @@
         </p:nvSpPr>
         <p:spPr>
           <a:xfrm>
-            <a:off x="457200" y="1097280"/>
-            <a:ext cx="4023360" cy="3474720"/>
+            <a:off x="457200" y="1005840"/>
+            <a:ext cx="3931920" cy="3840480"/>
           </a:xfrm>
           <a:prstGeom prst="rect">
             <a:avLst/>
@@ -6395,40 +10384,36 @@
           </a:effectLst>
         </p:spPr>
       </p:sp>
-      <p:pic>
-        <p:nvPicPr>
-          <p:cNvPr id="5" name="Image 0" descr="preencoded.png">    </p:cNvPr>
-          <p:cNvPicPr>
-            <a:picLocks noChangeAspect="1"/>
-          </p:cNvPicPr>
-          <p:nvPr/>
-        </p:nvPicPr>
-        <p:blipFill>
-          <a:blip r:embed="rId1"/>
-          <a:stretch>
-            <a:fillRect/>
-          </a:stretch>
-        </p:blipFill>
-        <p:spPr>
-          <a:xfrm>
-            <a:off x="731520" y="1280160"/>
-            <a:ext cx="365760" cy="365760"/>
-          </a:xfrm>
-          <a:prstGeom prst="rect">
-            <a:avLst/>
-          </a:prstGeom>
-        </p:spPr>
-      </p:pic>
-      <p:sp>
-        <p:nvSpPr>
-          <p:cNvPr id="6" name="Text 3"/>
-          <p:cNvSpPr/>
-          <p:nvPr/>
-        </p:nvSpPr>
-        <p:spPr>
-          <a:xfrm>
-            <a:off x="1234440" y="1234440"/>
-            <a:ext cx="3017520" cy="457200"/>
+      <p:sp>
+        <p:nvSpPr>
+          <p:cNvPr id="5" name="Shape 3"/>
+          <p:cNvSpPr/>
+          <p:nvPr/>
+        </p:nvSpPr>
+        <p:spPr>
+          <a:xfrm>
+            <a:off x="457200" y="1005840"/>
+            <a:ext cx="3931920" cy="457200"/>
+          </a:xfrm>
+          <a:prstGeom prst="rect">
+            <a:avLst/>
+          </a:prstGeom>
+          <a:solidFill>
+            <a:srgbClr val="127C8B"/>
+          </a:solidFill>
+          <a:ln/>
+        </p:spPr>
+      </p:sp>
+      <p:sp>
+        <p:nvSpPr>
+          <p:cNvPr id="6" name="Text 4"/>
+          <p:cNvSpPr/>
+          <p:nvPr/>
+        </p:nvSpPr>
+        <p:spPr>
+          <a:xfrm>
+            <a:off x="640080" y="1005840"/>
+            <a:ext cx="3566160" cy="457200"/>
           </a:xfrm>
           <a:prstGeom prst="rect">
             <a:avLst/>
@@ -6444,62 +10429,62 @@
               <a:buNone/>
             </a:pPr>
             <a:r>
-              <a:rPr lang="en-US" sz="1800" b="1" dirty="0">
+              <a:rPr lang="en-US" sz="1400" b="1" dirty="0">
+                <a:solidFill>
+                  <a:srgbClr val="FFFFFF"/>
+                </a:solidFill>
+                <a:latin typeface="Consolas" pitchFamily="34" charset="0"/>
+                <a:ea typeface="Consolas" pitchFamily="34" charset="-122"/>
+                <a:cs typeface="Consolas" pitchFamily="34" charset="-120"/>
+              </a:rPr>
+              <a:t>get_or_create(session, obj)</a:t>
+            </a:r>
+            <a:endParaRPr lang="en-US" sz="1400" dirty="0"/>
+          </a:p>
+        </p:txBody>
+      </p:sp>
+      <p:sp>
+        <p:nvSpPr>
+          <p:cNvPr id="7" name="Text 5"/>
+          <p:cNvSpPr/>
+          <p:nvPr/>
+        </p:nvSpPr>
+        <p:spPr>
+          <a:xfrm>
+            <a:off x="640080" y="1645920"/>
+            <a:ext cx="3566160" cy="3017520"/>
+          </a:xfrm>
+          <a:prstGeom prst="rect">
+            <a:avLst/>
+          </a:prstGeom>
+          <a:noFill/>
+          <a:ln/>
+        </p:spPr>
+        <p:txBody>
+          <a:bodyPr wrap="square" lIns="0" tIns="0" rIns="0" bIns="0" rtlCol="0" anchor="t"/>
+          <a:lstStyle/>
+          <a:p>
+            <a:pPr indent="0" marL="0">
+              <a:buNone/>
+            </a:pPr>
+            <a:r>
+              <a:rPr lang="en-US" sz="1400" b="1" dirty="0">
                 <a:solidFill>
                   <a:srgbClr val="0B3D4C"/>
-                </a:solidFill>
-                <a:latin typeface="Georgia" pitchFamily="34" charset="0"/>
-                <a:ea typeface="Georgia" pitchFamily="34" charset="-122"/>
-                <a:cs typeface="Georgia" pitchFamily="34" charset="-120"/>
-              </a:rPr>
-              <a:t>What F006 Ingests</a:t>
-            </a:r>
-            <a:endParaRPr lang="en-US" sz="1800" dirty="0"/>
-          </a:p>
-        </p:txBody>
-      </p:sp>
-      <p:sp>
-        <p:nvSpPr>
-          <p:cNvPr id="7" name="Text 4"/>
-          <p:cNvSpPr/>
-          <p:nvPr/>
-        </p:nvSpPr>
-        <p:spPr>
-          <a:xfrm>
-            <a:off x="731520" y="1828800"/>
-            <a:ext cx="3566160" cy="2468880"/>
-          </a:xfrm>
-          <a:prstGeom prst="rect">
-            <a:avLst/>
-          </a:prstGeom>
-          <a:noFill/>
-          <a:ln/>
-        </p:spPr>
-        <p:txBody>
-          <a:bodyPr wrap="square" lIns="0" tIns="0" rIns="0" bIns="0" rtlCol="0" anchor="t"/>
-          <a:lstStyle/>
-          <a:p>
-            <a:pPr indent="0" marL="0">
-              <a:buNone/>
-            </a:pPr>
-            <a:r>
-              <a:rPr lang="en-US" sz="1300" dirty="0">
-                <a:solidFill>
-                  <a:srgbClr val="1A2B33"/>
                 </a:solidFill>
                 <a:latin typeface="Calibri" pitchFamily="34" charset="0"/>
                 <a:ea typeface="Calibri" pitchFamily="34" charset="-122"/>
                 <a:cs typeface="Calibri" pitchFamily="34" charset="-120"/>
               </a:rPr>
-              <a:t>Neuroanatomical measurements from micro-CT imaging including:</a:t>
-            </a:r>
-            <a:endParaRPr lang="en-US" sz="1300" dirty="0"/>
-          </a:p>
-          <a:p>
-            <a:pPr indent="0" marL="0">
-              <a:buNone/>
-            </a:pPr>
-            <a:endParaRPr lang="en-US" sz="1300" dirty="0"/>
+              <a:t>For root &amp; intermediate tables</a:t>
+            </a:r>
+            <a:endParaRPr lang="en-US" sz="1400" dirty="0"/>
+          </a:p>
+          <a:p>
+            <a:pPr indent="0" marL="0">
+              <a:buNone/>
+            </a:pPr>
+            <a:endParaRPr lang="en-US" sz="1400" dirty="0"/>
           </a:p>
           <a:p>
             <a:pPr marL="342900" indent="-342900">
@@ -6507,7 +10492,7 @@
               <a:buChar char="•"/>
             </a:pPr>
             <a:r>
-              <a:rPr lang="en-US" sz="1300" dirty="0">
+              <a:rPr lang="en-US" sz="1200" dirty="0">
                 <a:solidFill>
                   <a:srgbClr val="1A2B33"/>
                 </a:solidFill>
@@ -6515,9 +10500,15 @@
                 <a:ea typeface="Calibri" pitchFamily="34" charset="-122"/>
                 <a:cs typeface="Calibri" pitchFamily="34" charset="-120"/>
               </a:rPr>
-              <a:t>Nerve volumes (mm³)</a:t>
-            </a:r>
-            <a:endParaRPr lang="en-US" sz="1300" dirty="0"/>
+              <a:t>Query by all columns → if exists, return it</a:t>
+            </a:r>
+            <a:endParaRPr lang="en-US" sz="1400" dirty="0"/>
+          </a:p>
+          <a:p>
+            <a:pPr indent="0" marL="0">
+              <a:buNone/>
+            </a:pPr>
+            <a:endParaRPr lang="en-US" sz="1400" dirty="0"/>
           </a:p>
           <a:p>
             <a:pPr marL="342900" indent="-342900">
@@ -6525,7 +10516,7 @@
               <a:buChar char="•"/>
             </a:pPr>
             <a:r>
-              <a:rPr lang="en-US" sz="1300" dirty="0">
+              <a:rPr lang="en-US" sz="1200" dirty="0">
                 <a:solidFill>
                   <a:srgbClr val="1A2B33"/>
                 </a:solidFill>
@@ -6533,9 +10524,15 @@
                 <a:ea typeface="Calibri" pitchFamily="34" charset="-122"/>
                 <a:cs typeface="Calibri" pitchFamily="34" charset="-120"/>
               </a:rPr>
-              <a:t>Cross-section diameters (μm)</a:t>
-            </a:r>
-            <a:endParaRPr lang="en-US" sz="1300" dirty="0"/>
+              <a:t>Fallback: query by unique constraints</a:t>
+            </a:r>
+            <a:endParaRPr lang="en-US" sz="1400" dirty="0"/>
+          </a:p>
+          <a:p>
+            <a:pPr indent="0" marL="0">
+              <a:buNone/>
+            </a:pPr>
+            <a:endParaRPr lang="en-US" sz="1400" dirty="0"/>
           </a:p>
           <a:p>
             <a:pPr marL="342900" indent="-342900">
@@ -6543,7 +10540,7 @@
               <a:buChar char="•"/>
             </a:pPr>
             <a:r>
-              <a:rPr lang="en-US" sz="1300" dirty="0">
+              <a:rPr lang="en-US" sz="1200" dirty="0">
                 <a:solidFill>
                   <a:srgbClr val="1A2B33"/>
                 </a:solidFill>
@@ -6551,9 +10548,15 @@
                 <a:ea typeface="Calibri" pitchFamily="34" charset="-122"/>
                 <a:cs typeface="Calibri" pitchFamily="34" charset="-120"/>
               </a:rPr>
-              <a:t>Fiber-fascicle hierarchies</a:t>
-            </a:r>
-            <a:endParaRPr lang="en-US" sz="1300" dirty="0"/>
+              <a:t>If not found → create, commit, return</a:t>
+            </a:r>
+            <a:endParaRPr lang="en-US" sz="1400" dirty="0"/>
+          </a:p>
+          <a:p>
+            <a:pPr indent="0" marL="0">
+              <a:buNone/>
+            </a:pPr>
+            <a:endParaRPr lang="en-US" sz="1400" dirty="0"/>
           </a:p>
           <a:p>
             <a:pPr marL="342900" indent="-342900">
@@ -6561,7 +10564,7 @@
               <a:buChar char="•"/>
             </a:pPr>
             <a:r>
-              <a:rPr lang="en-US" sz="1300" dirty="0">
+              <a:rPr lang="en-US" sz="1200" dirty="0">
                 <a:solidFill>
                   <a:srgbClr val="1A2B33"/>
                 </a:solidFill>
@@ -6569,40 +10572,45 @@
                 <a:ea typeface="Calibri" pitchFamily="34" charset="-122"/>
                 <a:cs typeface="Calibri" pitchFamily="34" charset="-120"/>
               </a:rPr>
-              <a:t>Subject/sample metadata</a:t>
-            </a:r>
-            <a:endParaRPr lang="en-US" sz="1300" dirty="0"/>
-          </a:p>
-          <a:p>
-            <a:pPr marL="342900" indent="-342900">
-              <a:buSzPct val="100000"/>
-              <a:buChar char="•"/>
-            </a:pPr>
-            <a:r>
-              <a:rPr lang="en-US" sz="1300" dirty="0">
-                <a:solidFill>
-                  <a:srgbClr val="1A2B33"/>
+              <a:t>On IntegrityError → rollback, re-query</a:t>
+            </a:r>
+            <a:endParaRPr lang="en-US" sz="1400" dirty="0"/>
+          </a:p>
+          <a:p>
+            <a:pPr indent="0" marL="0">
+              <a:buNone/>
+            </a:pPr>
+            <a:endParaRPr lang="en-US" sz="1400" dirty="0"/>
+          </a:p>
+          <a:p>
+            <a:pPr indent="0" marL="0">
+              <a:buNone/>
+            </a:pPr>
+            <a:r>
+              <a:rPr lang="en-US" sz="1100" i="1" dirty="0">
+                <a:solidFill>
+                  <a:srgbClr val="5A7A85"/>
                 </a:solidFill>
                 <a:latin typeface="Calibri" pitchFamily="34" charset="0"/>
                 <a:ea typeface="Calibri" pitchFamily="34" charset="-122"/>
                 <a:cs typeface="Calibri" pitchFamily="34" charset="-120"/>
               </a:rPr>
-              <a:t>InterLex term mappings</a:t>
-            </a:r>
-            <a:endParaRPr lang="en-US" sz="1300" dirty="0"/>
-          </a:p>
-        </p:txBody>
-      </p:sp>
-      <p:sp>
-        <p:nvSpPr>
-          <p:cNvPr id="8" name="Shape 5"/>
-          <p:cNvSpPr/>
-          <p:nvPr/>
-        </p:nvSpPr>
-        <p:spPr>
-          <a:xfrm>
-            <a:off x="4663440" y="1097280"/>
-            <a:ext cx="4023360" cy="3474720"/>
+              <a:t>Handles: Addresses, Aspects, Units, ControlledTerms, DescriptorsInst, Objects, ObjDesc*, ValuesInst</a:t>
+            </a:r>
+            <a:endParaRPr lang="en-US" sz="1400" dirty="0"/>
+          </a:p>
+        </p:txBody>
+      </p:sp>
+      <p:sp>
+        <p:nvSpPr>
+          <p:cNvPr id="8" name="Shape 6"/>
+          <p:cNvSpPr/>
+          <p:nvPr/>
+        </p:nvSpPr>
+        <p:spPr>
+          <a:xfrm>
+            <a:off x="4754880" y="1005840"/>
+            <a:ext cx="3931920" cy="3840480"/>
           </a:xfrm>
           <a:prstGeom prst="rect">
             <a:avLst/>
@@ -6620,40 +10628,36 @@
           </a:effectLst>
         </p:spPr>
       </p:sp>
-      <p:pic>
-        <p:nvPicPr>
-          <p:cNvPr id="9" name="Image 1" descr="preencoded.png">    </p:cNvPr>
-          <p:cNvPicPr>
-            <a:picLocks noChangeAspect="1"/>
-          </p:cNvPicPr>
-          <p:nvPr/>
-        </p:nvPicPr>
-        <p:blipFill>
-          <a:blip r:embed="rId2"/>
-          <a:stretch>
-            <a:fillRect/>
-          </a:stretch>
-        </p:blipFill>
-        <p:spPr>
-          <a:xfrm>
-            <a:off x="4937760" y="1280160"/>
-            <a:ext cx="365760" cy="365760"/>
-          </a:xfrm>
-          <a:prstGeom prst="rect">
-            <a:avLst/>
-          </a:prstGeom>
-        </p:spPr>
-      </p:pic>
-      <p:sp>
-        <p:nvSpPr>
-          <p:cNvPr id="10" name="Text 6"/>
-          <p:cNvSpPr/>
-          <p:nvPr/>
-        </p:nvSpPr>
-        <p:spPr>
-          <a:xfrm>
-            <a:off x="5440680" y="1234440"/>
-            <a:ext cx="3017520" cy="457200"/>
+      <p:sp>
+        <p:nvSpPr>
+          <p:cNvPr id="9" name="Shape 7"/>
+          <p:cNvSpPr/>
+          <p:nvPr/>
+        </p:nvSpPr>
+        <p:spPr>
+          <a:xfrm>
+            <a:off x="4754880" y="1005840"/>
+            <a:ext cx="3931920" cy="457200"/>
+          </a:xfrm>
+          <a:prstGeom prst="rect">
+            <a:avLst/>
+          </a:prstGeom>
+          <a:solidFill>
+            <a:srgbClr val="F4A940"/>
+          </a:solidFill>
+          <a:ln/>
+        </p:spPr>
+      </p:sp>
+      <p:sp>
+        <p:nvSpPr>
+          <p:cNvPr id="10" name="Text 8"/>
+          <p:cNvSpPr/>
+          <p:nvPr/>
+        </p:nvSpPr>
+        <p:spPr>
+          <a:xfrm>
+            <a:off x="4937760" y="1005840"/>
+            <a:ext cx="3566160" cy="457200"/>
           </a:xfrm>
           <a:prstGeom prst="rect">
             <a:avLst/>
@@ -6669,62 +10673,62 @@
               <a:buNone/>
             </a:pPr>
             <a:r>
-              <a:rPr lang="en-US" sz="1800" b="1" dirty="0">
+              <a:rPr lang="en-US" sz="1400" b="1" dirty="0">
+                <a:solidFill>
+                  <a:srgbClr val="FFFFFF"/>
+                </a:solidFill>
+                <a:latin typeface="Consolas" pitchFamily="34" charset="0"/>
+                <a:ea typeface="Consolas" pitchFamily="34" charset="-122"/>
+                <a:cs typeface="Consolas" pitchFamily="34" charset="-120"/>
+              </a:rPr>
+              <a:t>back_populate_tables(session, obj)</a:t>
+            </a:r>
+            <a:endParaRPr lang="en-US" sz="1400" dirty="0"/>
+          </a:p>
+        </p:txBody>
+      </p:sp>
+      <p:sp>
+        <p:nvSpPr>
+          <p:cNvPr id="11" name="Text 9"/>
+          <p:cNvSpPr/>
+          <p:nvPr/>
+        </p:nvSpPr>
+        <p:spPr>
+          <a:xfrm>
+            <a:off x="4937760" y="1645920"/>
+            <a:ext cx="3566160" cy="3017520"/>
+          </a:xfrm>
+          <a:prstGeom prst="rect">
+            <a:avLst/>
+          </a:prstGeom>
+          <a:noFill/>
+          <a:ln/>
+        </p:spPr>
+        <p:txBody>
+          <a:bodyPr wrap="square" lIns="0" tIns="0" rIns="0" bIns="0" rtlCol="0" anchor="t"/>
+          <a:lstStyle/>
+          <a:p>
+            <a:pPr indent="0" marL="0">
+              <a:buNone/>
+            </a:pPr>
+            <a:r>
+              <a:rPr lang="en-US" sz="1400" b="1" dirty="0">
                 <a:solidFill>
                   <a:srgbClr val="0B3D4C"/>
-                </a:solidFill>
-                <a:latin typeface="Georgia" pitchFamily="34" charset="0"/>
-                <a:ea typeface="Georgia" pitchFamily="34" charset="-122"/>
-                <a:cs typeface="Georgia" pitchFamily="34" charset="-120"/>
-              </a:rPr>
-              <a:t>How back_populate Helps</a:t>
-            </a:r>
-            <a:endParaRPr lang="en-US" sz="1800" dirty="0"/>
-          </a:p>
-        </p:txBody>
-      </p:sp>
-      <p:sp>
-        <p:nvSpPr>
-          <p:cNvPr id="11" name="Text 7"/>
-          <p:cNvSpPr/>
-          <p:nvPr/>
-        </p:nvSpPr>
-        <p:spPr>
-          <a:xfrm>
-            <a:off x="4937760" y="1828800"/>
-            <a:ext cx="3566160" cy="2468880"/>
-          </a:xfrm>
-          <a:prstGeom prst="rect">
-            <a:avLst/>
-          </a:prstGeom>
-          <a:noFill/>
-          <a:ln/>
-        </p:spPr>
-        <p:txBody>
-          <a:bodyPr wrap="square" lIns="0" tIns="0" rIns="0" bIns="0" rtlCol="0" anchor="t"/>
-          <a:lstStyle/>
-          <a:p>
-            <a:pPr indent="0" marL="0">
-              <a:buNone/>
-            </a:pPr>
-            <a:r>
-              <a:rPr lang="en-US" sz="1300" dirty="0">
-                <a:solidFill>
-                  <a:srgbClr val="1A2B33"/>
                 </a:solidFill>
                 <a:latin typeface="Calibri" pitchFamily="34" charset="0"/>
                 <a:ea typeface="Calibri" pitchFamily="34" charset="-122"/>
                 <a:cs typeface="Calibri" pitchFamily="34" charset="-120"/>
               </a:rPr>
-              <a:t>The F006 ingestion pipeline uses back_populate_tables for:</a:t>
-            </a:r>
-            <a:endParaRPr lang="en-US" sz="1300" dirty="0"/>
-          </a:p>
-          <a:p>
-            <a:pPr indent="0" marL="0">
-              <a:buNone/>
-            </a:pPr>
-            <a:endParaRPr lang="en-US" sz="1300" dirty="0"/>
+              <a:t>For leaf tables only</a:t>
+            </a:r>
+            <a:endParaRPr lang="en-US" sz="1400" dirty="0"/>
+          </a:p>
+          <a:p>
+            <a:pPr indent="0" marL="0">
+              <a:buNone/>
+            </a:pPr>
+            <a:endParaRPr lang="en-US" sz="1400" dirty="0"/>
           </a:p>
           <a:p>
             <a:pPr marL="342900" indent="-342900">
@@ -6732,7 +10736,7 @@
               <a:buChar char="•"/>
             </a:pPr>
             <a:r>
-              <a:rPr lang="en-US" sz="1300" dirty="0">
+              <a:rPr lang="en-US" sz="1200" dirty="0">
                 <a:solidFill>
                   <a:srgbClr val="1A2B33"/>
                 </a:solidFill>
@@ -6740,9 +10744,15 @@
                 <a:ea typeface="Calibri" pitchFamily="34" charset="-122"/>
                 <a:cs typeface="Calibri" pitchFamily="34" charset="-120"/>
               </a:rPr>
-              <a:t>ValuesCat — modality tags (micro-CT)</a:t>
-            </a:r>
-            <a:endParaRPr lang="en-US" sz="1300" dirty="0"/>
+              <a:t>Recurse all MANYTOONE relationships</a:t>
+            </a:r>
+            <a:endParaRPr lang="en-US" sz="1400" dirty="0"/>
+          </a:p>
+          <a:p>
+            <a:pPr indent="0" marL="0">
+              <a:buNone/>
+            </a:pPr>
+            <a:endParaRPr lang="en-US" sz="1400" dirty="0"/>
           </a:p>
           <a:p>
             <a:pPr marL="342900" indent="-342900">
@@ -6750,7 +10760,7 @@
               <a:buChar char="•"/>
             </a:pPr>
             <a:r>
-              <a:rPr lang="en-US" sz="1300" dirty="0">
+              <a:rPr lang="en-US" sz="1200" dirty="0">
                 <a:solidFill>
                   <a:srgbClr val="1A2B33"/>
                 </a:solidFill>
@@ -6758,32 +10768,80 @@
                 <a:ea typeface="Calibri" pitchFamily="34" charset="-122"/>
                 <a:cs typeface="Calibri" pitchFamily="34" charset="-120"/>
               </a:rPr>
-              <a:t>ValuesQuant — actual measurements</a:t>
-            </a:r>
-            <a:endParaRPr lang="en-US" sz="1300" dirty="0"/>
-          </a:p>
-          <a:p>
-            <a:pPr indent="0" marL="0">
-              <a:buNone/>
-            </a:pPr>
-            <a:endParaRPr lang="en-US" sz="1300" dirty="0"/>
-          </a:p>
-          <a:p>
-            <a:pPr indent="0" marL="0">
-              <a:buNone/>
-            </a:pPr>
-            <a:r>
-              <a:rPr lang="en-US" sz="1300" i="1" dirty="0">
-                <a:solidFill>
-                  <a:srgbClr val="5A7A85"/>
+              <a:t>Resolve or create each parent first</a:t>
+            </a:r>
+            <a:endParaRPr lang="en-US" sz="1400" dirty="0"/>
+          </a:p>
+          <a:p>
+            <a:pPr indent="0" marL="0">
+              <a:buNone/>
+            </a:pPr>
+            <a:endParaRPr lang="en-US" sz="1400" dirty="0"/>
+          </a:p>
+          <a:p>
+            <a:pPr marL="342900" indent="-342900">
+              <a:buSzPct val="100000"/>
+              <a:buChar char="•"/>
+            </a:pPr>
+            <a:r>
+              <a:rPr lang="en-US" sz="1200" dirty="0">
+                <a:solidFill>
+                  <a:srgbClr val="1A2B33"/>
                 </a:solidFill>
                 <a:latin typeface="Calibri" pitchFamily="34" charset="0"/>
                 <a:ea typeface="Calibri" pitchFamily="34" charset="-122"/>
                 <a:cs typeface="Calibri" pitchFamily="34" charset="-120"/>
               </a:rPr>
-              <a:t>This avoids manually wiring 7+ FK relationships per measurement row.</a:t>
-            </a:r>
-            <a:endParaRPr lang="en-US" sz="1300" dirty="0"/>
+              <a:t>Sync FK attributes from existing parents</a:t>
+            </a:r>
+            <a:endParaRPr lang="en-US" sz="1400" dirty="0"/>
+          </a:p>
+          <a:p>
+            <a:pPr indent="0" marL="0">
+              <a:buNone/>
+            </a:pPr>
+            <a:endParaRPr lang="en-US" sz="1400" dirty="0"/>
+          </a:p>
+          <a:p>
+            <a:pPr marL="342900" indent="-342900">
+              <a:buSzPct val="100000"/>
+              <a:buChar char="•"/>
+            </a:pPr>
+            <a:r>
+              <a:rPr lang="en-US" sz="1200" dirty="0">
+                <a:solidFill>
+                  <a:srgbClr val="1A2B33"/>
+                </a:solidFill>
+                <a:latin typeface="Calibri" pitchFamily="34" charset="0"/>
+                <a:ea typeface="Calibri" pitchFamily="34" charset="-122"/>
+                <a:cs typeface="Calibri" pitchFamily="34" charset="-120"/>
+              </a:rPr>
+              <a:t>Commit final object with all refs intact</a:t>
+            </a:r>
+            <a:endParaRPr lang="en-US" sz="1400" dirty="0"/>
+          </a:p>
+          <a:p>
+            <a:pPr indent="0" marL="0">
+              <a:buNone/>
+            </a:pPr>
+            <a:endParaRPr lang="en-US" sz="1400" dirty="0"/>
+          </a:p>
+          <a:p>
+            <a:pPr indent="0" marL="0">
+              <a:buNone/>
+            </a:pPr>
+            <a:r>
+              <a:rPr lang="en-US" sz="1100" i="1" dirty="0">
+                <a:solidFill>
+                  <a:srgbClr val="5A7A85"/>
+                </a:solidFill>
+                <a:latin typeface="Calibri" pitchFamily="34" charset="0"/>
+                <a:ea typeface="Calibri" pitchFamily="34" charset="-122"/>
+                <a:cs typeface="Calibri" pitchFamily="34" charset="-120"/>
+              </a:rPr>
+              <a:t>Handles: ValuesCat, ValuesQuant (7+ FK dependencies each)</a:t>
+            </a:r>
+            <a:endParaRPr lang="en-US" sz="1400" dirty="0"/>
           </a:p>
         </p:txBody>
       </p:sp>
@@ -6847,7 +10905,7 @@
         </p:nvSpPr>
         <p:spPr>
           <a:xfrm>
-            <a:off x="548640" y="274320"/>
+            <a:off x="457200" y="274320"/>
             <a:ext cx="8229600" cy="548640"/>
           </a:xfrm>
           <a:prstGeom prst="rect">
@@ -6864,7 +10922,7 @@
               <a:buNone/>
             </a:pPr>
             <a:r>
-              <a:rPr lang="en-US" sz="3600" b="1" dirty="0">
+              <a:rPr lang="en-US" sz="3000" b="1" dirty="0">
                 <a:solidFill>
                   <a:srgbClr val="0B3D4C"/>
                 </a:solidFill>
@@ -6872,9 +10930,9 @@
                 <a:ea typeface="Georgia" pitchFamily="34" charset="-122"/>
                 <a:cs typeface="Georgia" pitchFamily="34" charset="-120"/>
               </a:rPr>
-              <a:t>Best Practices &amp; Pitfalls</a:t>
-            </a:r>
-            <a:endParaRPr lang="en-US" sz="3600" dirty="0"/>
+              <a:t>Real-World Usage: F006 Ingestion Pipeline</a:t>
+            </a:r>
+            <a:endParaRPr lang="en-US" sz="3000" dirty="0"/>
           </a:p>
         </p:txBody>
       </p:sp>
@@ -6886,14 +10944,14 @@
         </p:nvSpPr>
         <p:spPr>
           <a:xfrm>
-            <a:off x="457200" y="1005840"/>
-            <a:ext cx="3931920" cy="3749040"/>
+            <a:off x="365760" y="914400"/>
+            <a:ext cx="8412480" cy="3931920"/>
           </a:xfrm>
           <a:prstGeom prst="rect">
             <a:avLst/>
           </a:prstGeom>
           <a:solidFill>
-            <a:srgbClr val="E8F6F3"/>
+            <a:srgbClr val="1E2A33"/>
           </a:solidFill>
           <a:ln/>
           <a:effectLst>
@@ -6905,79 +10963,16 @@
           </a:effectLst>
         </p:spPr>
       </p:sp>
-      <p:pic>
-        <p:nvPicPr>
-          <p:cNvPr id="5" name="Image 0" descr="preencoded.png">    </p:cNvPr>
-          <p:cNvPicPr>
-            <a:picLocks noChangeAspect="1"/>
-          </p:cNvPicPr>
-          <p:nvPr/>
-        </p:nvPicPr>
-        <p:blipFill>
-          <a:blip r:embed="rId1"/>
-          <a:stretch>
-            <a:fillRect/>
-          </a:stretch>
-        </p:blipFill>
-        <p:spPr>
-          <a:xfrm>
-            <a:off x="731520" y="1188720"/>
-            <a:ext cx="320040" cy="320040"/>
-          </a:xfrm>
-          <a:prstGeom prst="rect">
-            <a:avLst/>
-          </a:prstGeom>
-        </p:spPr>
-      </p:pic>
-      <p:sp>
-        <p:nvSpPr>
-          <p:cNvPr id="6" name="Text 3"/>
-          <p:cNvSpPr/>
-          <p:nvPr/>
-        </p:nvSpPr>
-        <p:spPr>
-          <a:xfrm>
-            <a:off x="1143000" y="1143000"/>
-            <a:ext cx="1371600" cy="411480"/>
-          </a:xfrm>
-          <a:prstGeom prst="rect">
-            <a:avLst/>
-          </a:prstGeom>
-          <a:noFill/>
-          <a:ln/>
-        </p:spPr>
-        <p:txBody>
-          <a:bodyPr wrap="square" lIns="0" tIns="0" rIns="0" bIns="0" rtlCol="0" anchor="ctr"/>
-          <a:lstStyle/>
-          <a:p>
-            <a:pPr indent="0" marL="0">
-              <a:buNone/>
-            </a:pPr>
-            <a:r>
-              <a:rPr lang="en-US" sz="2000" b="1" dirty="0">
-                <a:solidFill>
-                  <a:srgbClr val="127C8B"/>
-                </a:solidFill>
-                <a:latin typeface="Georgia" pitchFamily="34" charset="0"/>
-                <a:ea typeface="Georgia" pitchFamily="34" charset="-122"/>
-                <a:cs typeface="Georgia" pitchFamily="34" charset="-120"/>
-              </a:rPr>
-              <a:t>Do</a:t>
-            </a:r>
-            <a:endParaRPr lang="en-US" sz="2000" dirty="0"/>
-          </a:p>
-        </p:txBody>
-      </p:sp>
-      <p:sp>
-        <p:nvSpPr>
-          <p:cNvPr id="7" name="Text 4"/>
-          <p:cNvSpPr/>
-          <p:nvPr/>
-        </p:nvSpPr>
-        <p:spPr>
-          <a:xfrm>
-            <a:off x="731520" y="1691640"/>
-            <a:ext cx="3474720" cy="2834640"/>
+      <p:sp>
+        <p:nvSpPr>
+          <p:cNvPr id="5" name="Text 3"/>
+          <p:cNvSpPr/>
+          <p:nvPr/>
+        </p:nvSpPr>
+        <p:spPr>
+          <a:xfrm>
+            <a:off x="640080" y="1005840"/>
+            <a:ext cx="7863840" cy="3657600"/>
           </a:xfrm>
           <a:prstGeom prst="rect">
             <a:avLst/>
@@ -6989,344 +10984,283 @@
           <a:bodyPr wrap="square" lIns="0" tIns="0" rIns="0" bIns="0" rtlCol="0" anchor="t"/>
           <a:lstStyle/>
           <a:p>
-            <a:pPr marL="342900" indent="-342900">
-              <a:buSzPct val="100000"/>
-              <a:buChar char="•"/>
-            </a:pPr>
-            <a:r>
-              <a:rPr lang="en-US" sz="1300" dirty="0">
-                <a:solidFill>
-                  <a:srgbClr val="1A2B33"/>
-                </a:solidFill>
-                <a:latin typeface="Calibri" pitchFamily="34" charset="0"/>
-                <a:ea typeface="Calibri" pitchFamily="34" charset="-122"/>
-                <a:cs typeface="Calibri" pitchFamily="34" charset="-120"/>
-              </a:rPr>
-              <a:t>Follow Root → Intermediate → Leaf order</a:t>
-            </a:r>
-            <a:endParaRPr lang="en-US" sz="1300" dirty="0"/>
-          </a:p>
-          <a:p>
-            <a:pPr indent="0" marL="0">
-              <a:buNone/>
-            </a:pPr>
-            <a:endParaRPr lang="en-US" sz="1300" dirty="0"/>
-          </a:p>
-          <a:p>
-            <a:pPr marL="342900" indent="-342900">
-              <a:buSzPct val="100000"/>
-              <a:buChar char="•"/>
-            </a:pPr>
-            <a:r>
-              <a:rPr lang="en-US" sz="1300" dirty="0">
-                <a:solidFill>
-                  <a:srgbClr val="1A2B33"/>
-                </a:solidFill>
-                <a:latin typeface="Calibri" pitchFamily="34" charset="0"/>
-                <a:ea typeface="Calibri" pitchFamily="34" charset="-122"/>
-                <a:cs typeface="Calibri" pitchFamily="34" charset="-120"/>
-              </a:rPr>
-              <a:t>Set all relationship properties before calling back_populate_tables</a:t>
-            </a:r>
-            <a:endParaRPr lang="en-US" sz="1300" dirty="0"/>
-          </a:p>
-          <a:p>
-            <a:pPr indent="0" marL="0">
-              <a:buNone/>
-            </a:pPr>
-            <a:endParaRPr lang="en-US" sz="1300" dirty="0"/>
-          </a:p>
-          <a:p>
-            <a:pPr marL="342900" indent="-342900">
-              <a:buSzPct val="100000"/>
-              <a:buChar char="•"/>
-            </a:pPr>
-            <a:r>
-              <a:rPr lang="en-US" sz="1300" dirty="0">
-                <a:solidFill>
-                  <a:srgbClr val="1A2B33"/>
-                </a:solidFill>
-                <a:latin typeface="Calibri" pitchFamily="34" charset="0"/>
-                <a:ea typeface="Calibri" pitchFamily="34" charset="-122"/>
-                <a:cs typeface="Calibri" pitchFamily="34" charset="-120"/>
-              </a:rPr>
-              <a:t>Use get_or_create for root and intermediate tables</a:t>
-            </a:r>
-            <a:endParaRPr lang="en-US" sz="1300" dirty="0"/>
-          </a:p>
-          <a:p>
-            <a:pPr indent="0" marL="0">
-              <a:buNone/>
-            </a:pPr>
-            <a:endParaRPr lang="en-US" sz="1300" dirty="0"/>
-          </a:p>
-          <a:p>
-            <a:pPr marL="342900" indent="-342900">
-              <a:buSzPct val="100000"/>
-              <a:buChar char="•"/>
-            </a:pPr>
-            <a:r>
-              <a:rPr lang="en-US" sz="1300" dirty="0">
-                <a:solidFill>
-                  <a:srgbClr val="1A2B33"/>
-                </a:solidFill>
-                <a:latin typeface="Calibri" pitchFamily="34" charset="0"/>
-                <a:ea typeface="Calibri" pitchFamily="34" charset="-122"/>
-                <a:cs typeface="Calibri" pitchFamily="34" charset="-120"/>
-              </a:rPr>
-              <a:t>Match ID patterns: sub- for subjects, sam- for samples</a:t>
-            </a:r>
-            <a:endParaRPr lang="en-US" sz="1300" dirty="0"/>
-          </a:p>
-          <a:p>
-            <a:pPr indent="0" marL="0">
-              <a:buNone/>
-            </a:pPr>
-            <a:endParaRPr lang="en-US" sz="1300" dirty="0"/>
-          </a:p>
-          <a:p>
-            <a:pPr marL="342900" indent="-342900">
-              <a:buSzPct val="100000"/>
-              <a:buChar char="•"/>
-            </a:pPr>
-            <a:r>
-              <a:rPr lang="en-US" sz="1300" dirty="0">
-                <a:solidFill>
-                  <a:srgbClr val="1A2B33"/>
-                </a:solidFill>
-                <a:latin typeface="Calibri" pitchFamily="34" charset="0"/>
-                <a:ea typeface="Calibri" pitchFamily="34" charset="-122"/>
-                <a:cs typeface="Calibri" pitchFamily="34" charset="-120"/>
-              </a:rPr>
-              <a:t>Always set id_file on package-type Objects</a:t>
-            </a:r>
-            <a:endParaRPr lang="en-US" sz="1300" dirty="0"/>
-          </a:p>
-        </p:txBody>
-      </p:sp>
-      <p:sp>
-        <p:nvSpPr>
-          <p:cNvPr id="8" name="Shape 5"/>
-          <p:cNvSpPr/>
-          <p:nvPr/>
-        </p:nvSpPr>
-        <p:spPr>
-          <a:xfrm>
-            <a:off x="4754880" y="1005840"/>
-            <a:ext cx="3931920" cy="3749040"/>
-          </a:xfrm>
-          <a:prstGeom prst="rect">
-            <a:avLst/>
-          </a:prstGeom>
-          <a:solidFill>
-            <a:srgbClr val="FDF2E9"/>
-          </a:solidFill>
-          <a:ln/>
-          <a:effectLst>
-            <a:outerShdw sx="100000" sy="100000" kx="0" ky="0" algn="bl" rotWithShape="0" blurRad="76200" dist="25400" dir="8100000">
-              <a:srgbClr val="000000">
-                <a:alpha val="12000"/>
-              </a:srgbClr>
-            </a:outerShdw>
-          </a:effectLst>
-        </p:spPr>
-      </p:sp>
-      <p:pic>
-        <p:nvPicPr>
-          <p:cNvPr id="9" name="Image 1" descr="preencoded.png">    </p:cNvPr>
-          <p:cNvPicPr>
-            <a:picLocks noChangeAspect="1"/>
-          </p:cNvPicPr>
-          <p:nvPr/>
-        </p:nvPicPr>
-        <p:blipFill>
-          <a:blip r:embed="rId2"/>
-          <a:stretch>
-            <a:fillRect/>
-          </a:stretch>
-        </p:blipFill>
-        <p:spPr>
-          <a:xfrm>
-            <a:off x="5029200" y="1188720"/>
-            <a:ext cx="320040" cy="320040"/>
-          </a:xfrm>
-          <a:prstGeom prst="rect">
-            <a:avLst/>
-          </a:prstGeom>
-        </p:spPr>
-      </p:pic>
-      <p:sp>
-        <p:nvSpPr>
-          <p:cNvPr id="10" name="Text 6"/>
-          <p:cNvSpPr/>
-          <p:nvPr/>
-        </p:nvSpPr>
-        <p:spPr>
-          <a:xfrm>
-            <a:off x="5440680" y="1143000"/>
-            <a:ext cx="1371600" cy="411480"/>
-          </a:xfrm>
-          <a:prstGeom prst="rect">
-            <a:avLst/>
-          </a:prstGeom>
-          <a:noFill/>
-          <a:ln/>
-        </p:spPr>
-        <p:txBody>
-          <a:bodyPr wrap="square" lIns="0" tIns="0" rIns="0" bIns="0" rtlCol="0" anchor="ctr"/>
-          <a:lstStyle/>
-          <a:p>
-            <a:pPr indent="0" marL="0">
-              <a:buNone/>
-            </a:pPr>
-            <a:r>
-              <a:rPr lang="en-US" sz="2000" b="1" dirty="0">
-                <a:solidFill>
-                  <a:srgbClr val="F4A940"/>
-                </a:solidFill>
-                <a:latin typeface="Georgia" pitchFamily="34" charset="0"/>
-                <a:ea typeface="Georgia" pitchFamily="34" charset="-122"/>
-                <a:cs typeface="Georgia" pitchFamily="34" charset="-120"/>
-              </a:rPr>
-              <a:t>Don't</a:t>
-            </a:r>
-            <a:endParaRPr lang="en-US" sz="2000" dirty="0"/>
-          </a:p>
-        </p:txBody>
-      </p:sp>
-      <p:sp>
-        <p:nvSpPr>
-          <p:cNvPr id="11" name="Text 7"/>
-          <p:cNvSpPr/>
-          <p:nvPr/>
-        </p:nvSpPr>
-        <p:spPr>
-          <a:xfrm>
-            <a:off x="5029200" y="1691640"/>
-            <a:ext cx="3474720" cy="2834640"/>
-          </a:xfrm>
-          <a:prstGeom prst="rect">
-            <a:avLst/>
-          </a:prstGeom>
-          <a:noFill/>
-          <a:ln/>
-        </p:spPr>
-        <p:txBody>
-          <a:bodyPr wrap="square" lIns="0" tIns="0" rIns="0" bIns="0" rtlCol="0" anchor="t"/>
-          <a:lstStyle/>
-          <a:p>
-            <a:pPr marL="342900" indent="-342900">
-              <a:buSzPct val="100000"/>
-              <a:buChar char="•"/>
-            </a:pPr>
-            <a:r>
-              <a:rPr lang="en-US" sz="1300" dirty="0">
-                <a:solidFill>
-                  <a:srgbClr val="1A2B33"/>
-                </a:solidFill>
-                <a:latin typeface="Calibri" pitchFamily="34" charset="0"/>
-                <a:ea typeface="Calibri" pitchFamily="34" charset="-122"/>
-                <a:cs typeface="Calibri" pitchFamily="34" charset="-120"/>
-              </a:rPr>
-              <a:t>Skip the population order — FK violations guaranteed</a:t>
-            </a:r>
-            <a:endParaRPr lang="en-US" sz="1300" dirty="0"/>
-          </a:p>
-          <a:p>
-            <a:pPr indent="0" marL="0">
-              <a:buNone/>
-            </a:pPr>
-            <a:endParaRPr lang="en-US" sz="1300" dirty="0"/>
-          </a:p>
-          <a:p>
-            <a:pPr marL="342900" indent="-342900">
-              <a:buSzPct val="100000"/>
-              <a:buChar char="•"/>
-            </a:pPr>
-            <a:r>
-              <a:rPr lang="en-US" sz="1300" dirty="0">
-                <a:solidFill>
-                  <a:srgbClr val="1A2B33"/>
-                </a:solidFill>
-                <a:latin typeface="Calibri" pitchFamily="34" charset="0"/>
-                <a:ea typeface="Calibri" pitchFamily="34" charset="-122"/>
-                <a:cs typeface="Calibri" pitchFamily="34" charset="-120"/>
-              </a:rPr>
-              <a:t>Use dataset objects in obj_desc_* tables (only packages)</a:t>
-            </a:r>
-            <a:endParaRPr lang="en-US" sz="1300" dirty="0"/>
-          </a:p>
-          <a:p>
-            <a:pPr indent="0" marL="0">
-              <a:buNone/>
-            </a:pPr>
-            <a:endParaRPr lang="en-US" sz="1300" dirty="0"/>
-          </a:p>
-          <a:p>
-            <a:pPr marL="342900" indent="-342900">
-              <a:buSzPct val="100000"/>
-              <a:buChar char="•"/>
-            </a:pPr>
-            <a:r>
-              <a:rPr lang="en-US" sz="1300" dirty="0">
-                <a:solidFill>
-                  <a:srgbClr val="1A2B33"/>
-                </a:solidFill>
-                <a:latin typeface="Calibri" pitchFamily="34" charset="0"/>
-                <a:ea typeface="Calibri" pitchFamily="34" charset="-122"/>
-                <a:cs typeface="Calibri" pitchFamily="34" charset="-120"/>
-              </a:rPr>
-              <a:t>Manually manage leaf table FKs — let back_populate handle it</a:t>
-            </a:r>
-            <a:endParaRPr lang="en-US" sz="1300" dirty="0"/>
-          </a:p>
-          <a:p>
-            <a:pPr indent="0" marL="0">
-              <a:buNone/>
-            </a:pPr>
-            <a:endParaRPr lang="en-US" sz="1300" dirty="0"/>
-          </a:p>
-          <a:p>
-            <a:pPr marL="342900" indent="-342900">
-              <a:buSzPct val="100000"/>
-              <a:buChar char="•"/>
-            </a:pPr>
-            <a:r>
-              <a:rPr lang="en-US" sz="1300" dirty="0">
-                <a:solidFill>
-                  <a:srgbClr val="1A2B33"/>
-                </a:solidFill>
-                <a:latin typeface="Calibri" pitchFamily="34" charset="0"/>
-                <a:ea typeface="Calibri" pitchFamily="34" charset="-122"/>
-                <a:cs typeface="Calibri" pitchFamily="34" charset="-120"/>
-              </a:rPr>
-              <a:t>Forget required enum values (address_type, instance_type, etc.)</a:t>
-            </a:r>
-            <a:endParaRPr lang="en-US" sz="1300" dirty="0"/>
-          </a:p>
-          <a:p>
-            <a:pPr indent="0" marL="0">
-              <a:buNone/>
-            </a:pPr>
-            <a:endParaRPr lang="en-US" sz="1300" dirty="0"/>
-          </a:p>
-          <a:p>
-            <a:pPr marL="342900" indent="-342900">
-              <a:buSzPct val="100000"/>
-              <a:buChar char="•"/>
-            </a:pPr>
-            <a:r>
-              <a:rPr lang="en-US" sz="1300" dirty="0">
-                <a:solidFill>
-                  <a:srgbClr val="1A2B33"/>
-                </a:solidFill>
-                <a:latin typeface="Calibri" pitchFamily="34" charset="0"/>
-                <a:ea typeface="Calibri" pitchFamily="34" charset="-122"/>
-                <a:cs typeface="Calibri" pitchFamily="34" charset="-120"/>
-              </a:rPr>
-              <a:t>Assume circular deps will resolve — they won't without recursion</a:t>
-            </a:r>
-            <a:endParaRPr lang="en-US" sz="1300" dirty="0"/>
+            <a:pPr indent="0" marL="0">
+              <a:buNone/>
+            </a:pPr>
+            <a:r>
+              <a:rPr lang="en-US" sz="1100" dirty="0">
+                <a:solidFill>
+                  <a:srgbClr val="6A9955"/>
+                </a:solidFill>
+                <a:latin typeface="Consolas" pitchFamily="34" charset="0"/>
+                <a:ea typeface="Consolas" pitchFamily="34" charset="-122"/>
+                <a:cs typeface="Consolas" pitchFamily="34" charset="-120"/>
+              </a:rPr>
+              <a:t># f006_ingest.py — fiber/fascicle measurements</a:t>
+            </a:r>
+            <a:endParaRPr lang="en-US" sz="1100" dirty="0"/>
+          </a:p>
+          <a:p>
+            <a:pPr indent="0" marL="0">
+              <a:buNone/>
+            </a:pPr>
+            <a:endParaRPr lang="en-US" sz="1100" dirty="0"/>
+          </a:p>
+          <a:p>
+            <a:pPr indent="0" marL="0">
+              <a:buNone/>
+            </a:pPr>
+            <a:r>
+              <a:rPr lang="en-US" sz="1100" dirty="0">
+                <a:solidFill>
+                  <a:srgbClr val="6A9955"/>
+                </a:solidFill>
+                <a:latin typeface="Consolas" pitchFamily="34" charset="0"/>
+                <a:ea typeface="Consolas" pitchFamily="34" charset="-122"/>
+                <a:cs typeface="Consolas" pitchFamily="34" charset="-120"/>
+              </a:rPr>
+              <a:t># 1. Load YAML mappings → creates root descriptors</a:t>
+            </a:r>
+            <a:endParaRPr lang="en-US" sz="1100" dirty="0"/>
+          </a:p>
+          <a:p>
+            <a:pPr indent="0" marL="0">
+              <a:buNone/>
+            </a:pPr>
+            <a:r>
+              <a:rPr lang="en-US" sz="1100" dirty="0">
+                <a:solidFill>
+                  <a:srgbClr val="DCDCAA"/>
+                </a:solidFill>
+                <a:latin typeface="Consolas" pitchFamily="34" charset="0"/>
+                <a:ea typeface="Consolas" pitchFamily="34" charset="-122"/>
+                <a:cs typeface="Consolas" pitchFamily="34" charset="-120"/>
+              </a:rPr>
+              <a:t>descriptors = create_all_descriptors_from_yaml(</a:t>
+            </a:r>
+            <a:endParaRPr lang="en-US" sz="1100" dirty="0"/>
+          </a:p>
+          <a:p>
+            <a:pPr indent="0" marL="0">
+              <a:buNone/>
+            </a:pPr>
+            <a:r>
+              <a:rPr lang="en-US" sz="1100" dirty="0">
+                <a:solidFill>
+                  <a:srgbClr val="DCDCAA"/>
+                </a:solidFill>
+                <a:latin typeface="Consolas" pitchFamily="34" charset="0"/>
+                <a:ea typeface="Consolas" pitchFamily="34" charset="-122"/>
+                <a:cs typeface="Consolas" pitchFamily="34" charset="-120"/>
+              </a:rPr>
+              <a:t>    session, MAPPINGS_FILE)  # Aspects, Units, DescInst</a:t>
+            </a:r>
+            <a:endParaRPr lang="en-US" sz="1100" dirty="0"/>
+          </a:p>
+          <a:p>
+            <a:pPr indent="0" marL="0">
+              <a:buNone/>
+            </a:pPr>
+            <a:endParaRPr lang="en-US" sz="1100" dirty="0"/>
+          </a:p>
+          <a:p>
+            <a:pPr indent="0" marL="0">
+              <a:buNone/>
+            </a:pPr>
+            <a:r>
+              <a:rPr lang="en-US" sz="1100" dirty="0">
+                <a:solidFill>
+                  <a:srgbClr val="6A9955"/>
+                </a:solidFill>
+                <a:latin typeface="Consolas" pitchFamily="34" charset="0"/>
+                <a:ea typeface="Consolas" pitchFamily="34" charset="-122"/>
+                <a:cs typeface="Consolas" pitchFamily="34" charset="-120"/>
+              </a:rPr>
+              <a:t># 2. Create dataset + package Objects (get_or_create)</a:t>
+            </a:r>
+            <a:endParaRPr lang="en-US" sz="1100" dirty="0"/>
+          </a:p>
+          <a:p>
+            <a:pPr indent="0" marL="0">
+              <a:buNone/>
+            </a:pPr>
+            <a:r>
+              <a:rPr lang="en-US" sz="1100" dirty="0">
+                <a:solidFill>
+                  <a:srgbClr val="DCDCAA"/>
+                </a:solidFill>
+                <a:latin typeface="Consolas" pitchFamily="34" charset="0"/>
+                <a:ea typeface="Consolas" pitchFamily="34" charset="-122"/>
+                <a:cs typeface="Consolas" pitchFamily="34" charset="-120"/>
+              </a:rPr>
+              <a:t>dataset = get_or_create_dynamic(session, Objects,</a:t>
+            </a:r>
+            <a:endParaRPr lang="en-US" sz="1100" dirty="0"/>
+          </a:p>
+          <a:p>
+            <a:pPr indent="0" marL="0">
+              <a:buNone/>
+            </a:pPr>
+            <a:r>
+              <a:rPr lang="en-US" sz="1100" dirty="0">
+                <a:solidFill>
+                  <a:srgbClr val="DCDCAA"/>
+                </a:solidFill>
+                <a:latin typeface="Consolas" pitchFamily="34" charset="0"/>
+                <a:ea typeface="Consolas" pitchFamily="34" charset="-122"/>
+                <a:cs typeface="Consolas" pitchFamily="34" charset="-120"/>
+              </a:rPr>
+              <a:t>    {'id': DATASET_UUID, 'id_type': 'dataset'})</a:t>
+            </a:r>
+            <a:endParaRPr lang="en-US" sz="1100" dirty="0"/>
+          </a:p>
+          <a:p>
+            <a:pPr indent="0" marL="0">
+              <a:buNone/>
+            </a:pPr>
+            <a:endParaRPr lang="en-US" sz="1100" dirty="0"/>
+          </a:p>
+          <a:p>
+            <a:pPr indent="0" marL="0">
+              <a:buNone/>
+            </a:pPr>
+            <a:r>
+              <a:rPr lang="en-US" sz="1100" dirty="0">
+                <a:solidFill>
+                  <a:srgbClr val="6A9955"/>
+                </a:solidFill>
+                <a:latin typeface="Consolas" pitchFamily="34" charset="0"/>
+                <a:ea typeface="Consolas" pitchFamily="34" charset="-122"/>
+                <a:cs typeface="Consolas" pitchFamily="34" charset="-120"/>
+              </a:rPr>
+              <a:t># 3. Loop CSV rows → create instances per subject/sample</a:t>
+            </a:r>
+            <a:endParaRPr lang="en-US" sz="1100" dirty="0"/>
+          </a:p>
+          <a:p>
+            <a:pPr indent="0" marL="0">
+              <a:buNone/>
+            </a:pPr>
+            <a:r>
+              <a:rPr lang="en-US" sz="1100" dirty="0">
+                <a:solidFill>
+                  <a:srgbClr val="C586C0"/>
+                </a:solidFill>
+                <a:latin typeface="Consolas" pitchFamily="34" charset="0"/>
+                <a:ea typeface="Consolas" pitchFamily="34" charset="-122"/>
+                <a:cs typeface="Consolas" pitchFamily="34" charset="-120"/>
+              </a:rPr>
+              <a:t>for row in csv_reader:</a:t>
+            </a:r>
+            <a:endParaRPr lang="en-US" sz="1100" dirty="0"/>
+          </a:p>
+          <a:p>
+            <a:pPr indent="0" marL="0">
+              <a:buNone/>
+            </a:pPr>
+            <a:r>
+              <a:rPr lang="en-US" sz="1100" dirty="0">
+                <a:solidFill>
+                  <a:srgbClr val="DCDCAA"/>
+                </a:solidFill>
+                <a:latin typeface="Consolas" pitchFamily="34" charset="0"/>
+                <a:ea typeface="Consolas" pitchFamily="34" charset="-122"/>
+                <a:cs typeface="Consolas" pitchFamily="34" charset="-120"/>
+              </a:rPr>
+              <a:t>    inst = get_or_create_dynamic(session, ValuesInst,</a:t>
+            </a:r>
+            <a:endParaRPr lang="en-US" sz="1100" dirty="0"/>
+          </a:p>
+          <a:p>
+            <a:pPr indent="0" marL="0">
+              <a:buNone/>
+            </a:pPr>
+            <a:r>
+              <a:rPr lang="en-US" sz="1100" dirty="0">
+                <a:solidFill>
+                  <a:srgbClr val="DCDCAA"/>
+                </a:solidFill>
+                <a:latin typeface="Consolas" pitchFamily="34" charset="0"/>
+                <a:ea typeface="Consolas" pitchFamily="34" charset="-122"/>
+                <a:cs typeface="Consolas" pitchFamily="34" charset="-120"/>
+              </a:rPr>
+              <a:t>        {'type':'sample', 'id_formal':row['sam_id']})</a:t>
+            </a:r>
+            <a:endParaRPr lang="en-US" sz="1100" dirty="0"/>
+          </a:p>
+          <a:p>
+            <a:pPr indent="0" marL="0">
+              <a:buNone/>
+            </a:pPr>
+            <a:endParaRPr lang="en-US" sz="1100" dirty="0"/>
+          </a:p>
+          <a:p>
+            <a:pPr indent="0" marL="0">
+              <a:buNone/>
+            </a:pPr>
+            <a:r>
+              <a:rPr lang="en-US" sz="1100" dirty="0">
+                <a:solidFill>
+                  <a:srgbClr val="6A9955"/>
+                </a:solidFill>
+                <a:latin typeface="Consolas" pitchFamily="34" charset="0"/>
+                <a:ea typeface="Consolas" pitchFamily="34" charset="-122"/>
+                <a:cs typeface="Consolas" pitchFamily="34" charset="-120"/>
+              </a:rPr>
+              <a:t>    # 4. Leaf values → back_populate handles all FKs</a:t>
+            </a:r>
+            <a:endParaRPr lang="en-US" sz="1100" dirty="0"/>
+          </a:p>
+          <a:p>
+            <a:pPr indent="0" marL="0">
+              <a:buNone/>
+            </a:pPr>
+            <a:r>
+              <a:rPr lang="en-US" sz="1100" b="1" dirty="0">
+                <a:solidFill>
+                  <a:srgbClr val="CE9178"/>
+                </a:solidFill>
+                <a:latin typeface="Consolas" pitchFamily="34" charset="0"/>
+                <a:ea typeface="Consolas" pitchFamily="34" charset="-122"/>
+                <a:cs typeface="Consolas" pitchFamily="34" charset="-120"/>
+              </a:rPr>
+              <a:t>    back_populate_with_dependencies(session,</a:t>
+            </a:r>
+            <a:endParaRPr lang="en-US" sz="1100" dirty="0"/>
+          </a:p>
+          <a:p>
+            <a:pPr indent="0" marL="0">
+              <a:buNone/>
+            </a:pPr>
+            <a:r>
+              <a:rPr lang="en-US" sz="1100" b="1" dirty="0">
+                <a:solidFill>
+                  <a:srgbClr val="CE9178"/>
+                </a:solidFill>
+                <a:latin typeface="Consolas" pitchFamily="34" charset="0"/>
+                <a:ea typeface="Consolas" pitchFamily="34" charset="-122"/>
+                <a:cs typeface="Consolas" pitchFamily="34" charset="-120"/>
+              </a:rPr>
+              <a:t>        'values_quant',</a:t>
+            </a:r>
+            <a:endParaRPr lang="en-US" sz="1100" dirty="0"/>
+          </a:p>
+          <a:p>
+            <a:pPr indent="0" marL="0">
+              <a:buNone/>
+            </a:pPr>
+            <a:r>
+              <a:rPr lang="en-US" sz="1100" b="1" dirty="0">
+                <a:solidFill>
+                  <a:srgbClr val="CE9178"/>
+                </a:solidFill>
+                <a:latin typeface="Consolas" pitchFamily="34" charset="0"/>
+                <a:ea typeface="Consolas" pitchFamily="34" charset="-122"/>
+                <a:cs typeface="Consolas" pitchFamily="34" charset="-120"/>
+              </a:rPr>
+              <a:t>        value=row['fiber_area'], desc_quant=dq, ...)</a:t>
+            </a:r>
+            <a:endParaRPr lang="en-US" sz="1100" dirty="0"/>
           </a:p>
         </p:txBody>
       </p:sp>
